--- a/reports/Meta_Labeling_Deck.pptx
+++ b/reports/Meta_Labeling_Deck.pptx
@@ -3101,14 +3101,102 @@
       <p:grpSpPr/>
       <p:sp>
         <p:nvSpPr>
-          <p:cNvPr id="2" name="TextBox 1"/>
+          <p:cNvPr id="2" name="Rectangle 1"/>
+          <p:cNvSpPr/>
+          <p:nvPr/>
+        </p:nvSpPr>
+        <p:spPr>
+          <a:xfrm>
+            <a:off x="0" y="0"/>
+            <a:ext cx="12191695" cy="320040"/>
+          </a:xfrm>
+          <a:prstGeom prst="rect">
+            <a:avLst/>
+          </a:prstGeom>
+          <a:solidFill>
+            <a:srgbClr val="0B2A4A"/>
+          </a:solidFill>
+          <a:ln>
+            <a:noFill/>
+          </a:ln>
+          <a:effectLst/>
+        </p:spPr>
+        <p:style>
+          <a:lnRef idx="1">
+            <a:schemeClr val="accent1"/>
+          </a:lnRef>
+          <a:fillRef idx="3">
+            <a:schemeClr val="accent1"/>
+          </a:fillRef>
+          <a:effectRef idx="2">
+            <a:schemeClr val="accent1"/>
+          </a:effectRef>
+          <a:fontRef idx="minor">
+            <a:schemeClr val="lt1"/>
+          </a:fontRef>
+        </p:style>
+        <p:txBody>
+          <a:bodyPr rtlCol="0" anchor="ctr"/>
+          <a:lstStyle/>
+          <a:p>
+            <a:pPr algn="ctr"/>
+          </a:p>
+        </p:txBody>
+      </p:sp>
+      <p:sp>
+        <p:nvSpPr>
+          <p:cNvPr id="3" name="Rectangle 2"/>
+          <p:cNvSpPr/>
+          <p:nvPr/>
+        </p:nvSpPr>
+        <p:spPr>
+          <a:xfrm>
+            <a:off x="0" y="6537960"/>
+            <a:ext cx="12191695" cy="320040"/>
+          </a:xfrm>
+          <a:prstGeom prst="rect">
+            <a:avLst/>
+          </a:prstGeom>
+          <a:solidFill>
+            <a:srgbClr val="1F6FB2"/>
+          </a:solidFill>
+          <a:ln>
+            <a:noFill/>
+          </a:ln>
+          <a:effectLst/>
+        </p:spPr>
+        <p:style>
+          <a:lnRef idx="1">
+            <a:schemeClr val="accent1"/>
+          </a:lnRef>
+          <a:fillRef idx="3">
+            <a:schemeClr val="accent1"/>
+          </a:fillRef>
+          <a:effectRef idx="2">
+            <a:schemeClr val="accent1"/>
+          </a:effectRef>
+          <a:fontRef idx="minor">
+            <a:schemeClr val="lt1"/>
+          </a:fontRef>
+        </p:style>
+        <p:txBody>
+          <a:bodyPr rtlCol="0" anchor="ctr"/>
+          <a:lstStyle/>
+          <a:p>
+            <a:pPr algn="ctr"/>
+          </a:p>
+        </p:txBody>
+      </p:sp>
+      <p:sp>
+        <p:nvSpPr>
+          <p:cNvPr id="4" name="TextBox 3"/>
           <p:cNvSpPr txBox="1"/>
           <p:nvPr/>
         </p:nvSpPr>
         <p:spPr>
           <a:xfrm>
-            <a:off x="822960" y="2194560"/>
-            <a:ext cx="10515600" cy="1828800"/>
+            <a:off x="822960" y="2286000"/>
+            <a:ext cx="10515600" cy="2194560"/>
           </a:xfrm>
           <a:prstGeom prst="rect">
             <a:avLst/>
@@ -3134,14 +3222,32 @@
           </a:p>
           <a:p>
             <a:pPr>
-              <a:defRPr sz="2000">
+              <a:spcBef>
+                <a:spcPts val="1000"/>
+              </a:spcBef>
+              <a:defRPr sz="1800">
                 <a:solidFill>
                   <a:srgbClr val="555B66"/>
                 </a:solidFill>
               </a:defRPr>
             </a:pPr>
             <a:r>
-              <a:t>A weekly, seven-sleeve allocation framework  ·  Research &amp; educational use only</a:t>
+              <a:t>A weekly, seven-sleeve global allocation framework  ·  research &amp; educational use only</a:t>
+            </a:r>
+          </a:p>
+          <a:p>
+            <a:pPr>
+              <a:spcBef>
+                <a:spcPts val="600"/>
+              </a:spcBef>
+              <a:defRPr sz="1600" b="1">
+                <a:solidFill>
+                  <a:srgbClr val="1F6FB2"/>
+                </a:solidFill>
+              </a:defRPr>
+            </a:pPr>
+            <a:r>
+              <a:t>June 18, 2026</a:t>
             </a:r>
           </a:p>
         </p:txBody>
@@ -3166,14 +3272,58 @@
       <p:grpSpPr/>
       <p:sp>
         <p:nvSpPr>
-          <p:cNvPr id="2" name="TextBox 1"/>
+          <p:cNvPr id="2" name="Rectangle 1"/>
+          <p:cNvSpPr/>
+          <p:nvPr/>
+        </p:nvSpPr>
+        <p:spPr>
+          <a:xfrm>
+            <a:off x="0" y="0"/>
+            <a:ext cx="201168" cy="6858000"/>
+          </a:xfrm>
+          <a:prstGeom prst="rect">
+            <a:avLst/>
+          </a:prstGeom>
+          <a:solidFill>
+            <a:srgbClr val="0B2A4A"/>
+          </a:solidFill>
+          <a:ln>
+            <a:noFill/>
+          </a:ln>
+          <a:effectLst/>
+        </p:spPr>
+        <p:style>
+          <a:lnRef idx="1">
+            <a:schemeClr val="accent1"/>
+          </a:lnRef>
+          <a:fillRef idx="3">
+            <a:schemeClr val="accent1"/>
+          </a:fillRef>
+          <a:effectRef idx="2">
+            <a:schemeClr val="accent1"/>
+          </a:effectRef>
+          <a:fontRef idx="minor">
+            <a:schemeClr val="lt1"/>
+          </a:fontRef>
+        </p:style>
+        <p:txBody>
+          <a:bodyPr rtlCol="0" anchor="ctr"/>
+          <a:lstStyle/>
+          <a:p>
+            <a:pPr algn="ctr"/>
+          </a:p>
+        </p:txBody>
+      </p:sp>
+      <p:sp>
+        <p:nvSpPr>
+          <p:cNvPr id="3" name="TextBox 2"/>
           <p:cNvSpPr txBox="1"/>
           <p:nvPr/>
         </p:nvSpPr>
         <p:spPr>
           <a:xfrm>
-            <a:off x="640080" y="411480"/>
-            <a:ext cx="10972800" cy="914400"/>
+            <a:off x="548640" y="320040"/>
+            <a:ext cx="11338560" cy="822960"/>
           </a:xfrm>
           <a:prstGeom prst="rect">
             <a:avLst/>
@@ -3187,7 +3337,7 @@
           <a:lstStyle/>
           <a:p>
             <a:pPr>
-              <a:defRPr sz="3000" b="1">
+              <a:defRPr sz="2600" b="1">
                 <a:solidFill>
                   <a:srgbClr val="0B2A4A"/>
                 </a:solidFill>
@@ -3201,14 +3351,58 @@
       </p:sp>
       <p:sp>
         <p:nvSpPr>
-          <p:cNvPr id="3" name="TextBox 2"/>
+          <p:cNvPr id="4" name="Rectangle 3"/>
+          <p:cNvSpPr/>
+          <p:nvPr/>
+        </p:nvSpPr>
+        <p:spPr>
+          <a:xfrm>
+            <a:off x="566928" y="1078992"/>
+            <a:ext cx="3840480" cy="41148"/>
+          </a:xfrm>
+          <a:prstGeom prst="rect">
+            <a:avLst/>
+          </a:prstGeom>
+          <a:solidFill>
+            <a:srgbClr val="1F6FB2"/>
+          </a:solidFill>
+          <a:ln>
+            <a:noFill/>
+          </a:ln>
+          <a:effectLst/>
+        </p:spPr>
+        <p:style>
+          <a:lnRef idx="1">
+            <a:schemeClr val="accent1"/>
+          </a:lnRef>
+          <a:fillRef idx="3">
+            <a:schemeClr val="accent1"/>
+          </a:fillRef>
+          <a:effectRef idx="2">
+            <a:schemeClr val="accent1"/>
+          </a:effectRef>
+          <a:fontRef idx="minor">
+            <a:schemeClr val="lt1"/>
+          </a:fontRef>
+        </p:style>
+        <p:txBody>
+          <a:bodyPr rtlCol="0" anchor="ctr"/>
+          <a:lstStyle/>
+          <a:p>
+            <a:pPr algn="ctr"/>
+          </a:p>
+        </p:txBody>
+      </p:sp>
+      <p:sp>
+        <p:nvSpPr>
+          <p:cNvPr id="5" name="TextBox 4"/>
           <p:cNvSpPr txBox="1"/>
           <p:nvPr/>
         </p:nvSpPr>
         <p:spPr>
           <a:xfrm>
-            <a:off x="822960" y="1463040"/>
-            <a:ext cx="10607040" cy="4206240"/>
+            <a:off x="640080" y="1325880"/>
+            <a:ext cx="10972800" cy="4297680"/>
           </a:xfrm>
           <a:prstGeom prst="rect">
             <a:avLst/>
@@ -3223,90 +3417,134 @@
           <a:p>
             <a:pPr>
               <a:spcAft>
-                <a:spcPts val="700"/>
+                <a:spcPts val="500"/>
               </a:spcAft>
-              <a:defRPr sz="2000">
+              <a:defRPr sz="1700" b="1">
                 <a:solidFill>
                   <a:srgbClr val="0B2A4A"/>
                 </a:solidFill>
               </a:defRPr>
             </a:pPr>
             <a:r>
-              <a:t>• M1 decomposed into its two sub-signals (full-sample Sharpe):</a:t>
+              <a:t>■  M1 decomposed into its two sub-signals (full-sample Sharpe):</a:t>
             </a:r>
           </a:p>
           <a:p>
             <a:pPr lvl="1">
               <a:spcAft>
-                <a:spcPts val="700"/>
+                <a:spcPts val="500"/>
               </a:spcAft>
-              <a:defRPr sz="1700">
+              <a:defRPr sz="1400" b="0">
                 <a:solidFill>
                   <a:srgbClr val="555B66"/>
                 </a:solidFill>
               </a:defRPr>
             </a:pPr>
             <a:r>
-              <a:t>– momentum 0.61  ·  trend 0.65  ·  combined technical 0.65</a:t>
+              <a:t>–  momentum 0.61  ·  trend 0.65  ·  combined technical 0.65</a:t>
             </a:r>
           </a:p>
           <a:p>
             <a:pPr>
               <a:spcAft>
-                <a:spcPts val="700"/>
+                <a:spcPts val="500"/>
               </a:spcAft>
-              <a:defRPr sz="2000">
+              <a:defRPr sz="1700" b="1">
                 <a:solidFill>
                   <a:srgbClr val="0B2A4A"/>
                 </a:solidFill>
               </a:defRPr>
             </a:pPr>
             <a:r>
-              <a:t>• Interaction is positive (+0.015) — momentum and trend reinforce, not redundant.</a:t>
+              <a:t>■  Interaction is positive (+0.015) — momentum and trend reinforce, not redundant.</a:t>
             </a:r>
           </a:p>
           <a:p>
             <a:pPr>
               <a:spcAft>
-                <a:spcPts val="700"/>
+                <a:spcPts val="500"/>
               </a:spcAft>
-              <a:defRPr sz="2000">
+              <a:defRPr sz="1700" b="1">
                 <a:solidFill>
                   <a:srgbClr val="0B2A4A"/>
                 </a:solidFill>
               </a:defRPr>
             </a:pPr>
             <a:r>
-              <a:t>• Cost layers (annualized return): gross 6.48% -&gt; net of expense 6.39% -&gt; net of all 6.19%.</a:t>
+              <a:t>■  Cost layers (annualized): gross 6.48% → net of expense 6.39% → net of all 6.19%.</a:t>
             </a:r>
           </a:p>
           <a:p>
             <a:pPr lvl="1">
               <a:spcAft>
-                <a:spcPts val="700"/>
+                <a:spcPts val="500"/>
               </a:spcAft>
-              <a:defRPr sz="1700">
+              <a:defRPr sz="1400" b="0">
                 <a:solidFill>
                   <a:srgbClr val="555B66"/>
                 </a:solidFill>
               </a:defRPr>
             </a:pPr>
             <a:r>
-              <a:t>– transaction cost (~29 bps) is a larger drag than the expense ratio (~9 bps)</a:t>
-            </a:r>
-          </a:p>
-        </p:txBody>
-      </p:sp>
-      <p:sp>
-        <p:nvSpPr>
-          <p:cNvPr id="4" name="TextBox 3"/>
+              <a:t>–  transaction cost (~29 bps) is a larger drag than the expense ratio (~9 bps)</a:t>
+            </a:r>
+          </a:p>
+        </p:txBody>
+      </p:sp>
+      <p:sp>
+        <p:nvSpPr>
+          <p:cNvPr id="6" name="Rectangle 5"/>
+          <p:cNvSpPr/>
+          <p:nvPr/>
+        </p:nvSpPr>
+        <p:spPr>
+          <a:xfrm>
+            <a:off x="548640" y="5715000"/>
+            <a:ext cx="11091672" cy="566928"/>
+          </a:xfrm>
+          <a:prstGeom prst="rect">
+            <a:avLst/>
+          </a:prstGeom>
+          <a:solidFill>
+            <a:srgbClr val="ECF1F6"/>
+          </a:solidFill>
+          <a:ln>
+            <a:noFill/>
+          </a:ln>
+          <a:effectLst/>
+        </p:spPr>
+        <p:style>
+          <a:lnRef idx="1">
+            <a:schemeClr val="accent1"/>
+          </a:lnRef>
+          <a:fillRef idx="3">
+            <a:schemeClr val="accent1"/>
+          </a:fillRef>
+          <a:effectRef idx="2">
+            <a:schemeClr val="accent1"/>
+          </a:effectRef>
+          <a:fontRef idx="minor">
+            <a:schemeClr val="lt1"/>
+          </a:fontRef>
+        </p:style>
+        <p:txBody>
+          <a:bodyPr rtlCol="0" anchor="ctr"/>
+          <a:lstStyle/>
+          <a:p>
+            <a:pPr algn="ctr"/>
+          </a:p>
+        </p:txBody>
+      </p:sp>
+      <p:sp>
+        <p:nvSpPr>
+          <p:cNvPr id="7" name="TextBox 6"/>
           <p:cNvSpPr txBox="1"/>
           <p:nvPr/>
         </p:nvSpPr>
         <p:spPr>
           <a:xfrm>
-            <a:off x="822960" y="5897880"/>
-            <a:ext cx="10607040" cy="822960"/>
+            <a:off x="731520" y="5760720"/>
+            <a:ext cx="10789920" cy="502920"/>
           </a:xfrm>
           <a:prstGeom prst="rect">
             <a:avLst/>
@@ -3314,20 +3552,90 @@
           <a:noFill/>
         </p:spPr>
         <p:txBody>
+          <a:bodyPr wrap="square" anchor="ctr">
+            <a:spAutoFit/>
+          </a:bodyPr>
+          <a:lstStyle/>
+          <a:p>
+            <a:pPr>
+              <a:defRPr sz="1300" b="1">
+                <a:solidFill>
+                  <a:srgbClr val="1F6FB2"/>
+                </a:solidFill>
+              </a:defRPr>
+            </a:pPr>
+            <a:r>
+              <a:t>Takeaway:  The directional value is real and complementary; costs are modest and turnover-driven.</a:t>
+            </a:r>
+          </a:p>
+        </p:txBody>
+      </p:sp>
+      <p:sp>
+        <p:nvSpPr>
+          <p:cNvPr id="8" name="TextBox 7"/>
+          <p:cNvSpPr txBox="1"/>
+          <p:nvPr/>
+        </p:nvSpPr>
+        <p:spPr>
+          <a:xfrm>
+            <a:off x="548640" y="6419088"/>
+            <a:ext cx="11155680" cy="320040"/>
+          </a:xfrm>
+          <a:prstGeom prst="rect">
+            <a:avLst/>
+          </a:prstGeom>
+          <a:noFill/>
+        </p:spPr>
+        <p:txBody>
           <a:bodyPr wrap="square">
             <a:spAutoFit/>
           </a:bodyPr>
           <a:lstStyle/>
           <a:p>
             <a:pPr>
-              <a:defRPr sz="1600" b="1" i="1">
-                <a:solidFill>
-                  <a:srgbClr val="1F6FB2"/>
+              <a:defRPr sz="900">
+                <a:solidFill>
+                  <a:srgbClr val="555B66"/>
                 </a:solidFill>
               </a:defRPr>
             </a:pPr>
             <a:r>
-              <a:t>Takeaway: The directional value is real and complementary; costs are modest and dominated by turnover.</a:t>
+              <a:t>Multi-Asset Meta-Labeling  ·  June 18, 2026</a:t>
+            </a:r>
+          </a:p>
+        </p:txBody>
+      </p:sp>
+      <p:sp>
+        <p:nvSpPr>
+          <p:cNvPr id="9" name="TextBox 8"/>
+          <p:cNvSpPr txBox="1"/>
+          <p:nvPr/>
+        </p:nvSpPr>
+        <p:spPr>
+          <a:xfrm>
+            <a:off x="11338560" y="6419088"/>
+            <a:ext cx="640080" cy="320040"/>
+          </a:xfrm>
+          <a:prstGeom prst="rect">
+            <a:avLst/>
+          </a:prstGeom>
+          <a:noFill/>
+        </p:spPr>
+        <p:txBody>
+          <a:bodyPr wrap="square">
+            <a:spAutoFit/>
+          </a:bodyPr>
+          <a:lstStyle/>
+          <a:p>
+            <a:pPr>
+              <a:defRPr sz="900">
+                <a:solidFill>
+                  <a:srgbClr val="555B66"/>
+                </a:solidFill>
+              </a:defRPr>
+            </a:pPr>
+            <a:r>
+              <a:t>9</a:t>
             </a:r>
           </a:p>
         </p:txBody>
@@ -3352,14 +3660,58 @@
       <p:grpSpPr/>
       <p:sp>
         <p:nvSpPr>
-          <p:cNvPr id="2" name="TextBox 1"/>
+          <p:cNvPr id="2" name="Rectangle 1"/>
+          <p:cNvSpPr/>
+          <p:nvPr/>
+        </p:nvSpPr>
+        <p:spPr>
+          <a:xfrm>
+            <a:off x="0" y="0"/>
+            <a:ext cx="201168" cy="6858000"/>
+          </a:xfrm>
+          <a:prstGeom prst="rect">
+            <a:avLst/>
+          </a:prstGeom>
+          <a:solidFill>
+            <a:srgbClr val="0B2A4A"/>
+          </a:solidFill>
+          <a:ln>
+            <a:noFill/>
+          </a:ln>
+          <a:effectLst/>
+        </p:spPr>
+        <p:style>
+          <a:lnRef idx="1">
+            <a:schemeClr val="accent1"/>
+          </a:lnRef>
+          <a:fillRef idx="3">
+            <a:schemeClr val="accent1"/>
+          </a:fillRef>
+          <a:effectRef idx="2">
+            <a:schemeClr val="accent1"/>
+          </a:effectRef>
+          <a:fontRef idx="minor">
+            <a:schemeClr val="lt1"/>
+          </a:fontRef>
+        </p:style>
+        <p:txBody>
+          <a:bodyPr rtlCol="0" anchor="ctr"/>
+          <a:lstStyle/>
+          <a:p>
+            <a:pPr algn="ctr"/>
+          </a:p>
+        </p:txBody>
+      </p:sp>
+      <p:sp>
+        <p:nvSpPr>
+          <p:cNvPr id="3" name="TextBox 2"/>
           <p:cNvSpPr txBox="1"/>
           <p:nvPr/>
         </p:nvSpPr>
         <p:spPr>
           <a:xfrm>
-            <a:off x="640080" y="411480"/>
-            <a:ext cx="10972800" cy="914400"/>
+            <a:off x="548640" y="320040"/>
+            <a:ext cx="11338560" cy="822960"/>
           </a:xfrm>
           <a:prstGeom prst="rect">
             <a:avLst/>
@@ -3373,7 +3725,7 @@
           <a:lstStyle/>
           <a:p>
             <a:pPr>
-              <a:defRPr sz="3000" b="1">
+              <a:defRPr sz="2600" b="1">
                 <a:solidFill>
                   <a:srgbClr val="0B2A4A"/>
                 </a:solidFill>
@@ -3387,14 +3739,58 @@
       </p:sp>
       <p:sp>
         <p:nvSpPr>
-          <p:cNvPr id="3" name="TextBox 2"/>
+          <p:cNvPr id="4" name="Rectangle 3"/>
+          <p:cNvSpPr/>
+          <p:nvPr/>
+        </p:nvSpPr>
+        <p:spPr>
+          <a:xfrm>
+            <a:off x="566928" y="1078992"/>
+            <a:ext cx="3840480" cy="41148"/>
+          </a:xfrm>
+          <a:prstGeom prst="rect">
+            <a:avLst/>
+          </a:prstGeom>
+          <a:solidFill>
+            <a:srgbClr val="1F6FB2"/>
+          </a:solidFill>
+          <a:ln>
+            <a:noFill/>
+          </a:ln>
+          <a:effectLst/>
+        </p:spPr>
+        <p:style>
+          <a:lnRef idx="1">
+            <a:schemeClr val="accent1"/>
+          </a:lnRef>
+          <a:fillRef idx="3">
+            <a:schemeClr val="accent1"/>
+          </a:fillRef>
+          <a:effectRef idx="2">
+            <a:schemeClr val="accent1"/>
+          </a:effectRef>
+          <a:fontRef idx="minor">
+            <a:schemeClr val="lt1"/>
+          </a:fontRef>
+        </p:style>
+        <p:txBody>
+          <a:bodyPr rtlCol="0" anchor="ctr"/>
+          <a:lstStyle/>
+          <a:p>
+            <a:pPr algn="ctr"/>
+          </a:p>
+        </p:txBody>
+      </p:sp>
+      <p:sp>
+        <p:nvSpPr>
+          <p:cNvPr id="5" name="TextBox 4"/>
           <p:cNvSpPr txBox="1"/>
           <p:nvPr/>
         </p:nvSpPr>
         <p:spPr>
           <a:xfrm>
-            <a:off x="822960" y="1463040"/>
-            <a:ext cx="10607040" cy="4206240"/>
+            <a:off x="640080" y="1325880"/>
+            <a:ext cx="10972800" cy="4297680"/>
           </a:xfrm>
           <a:prstGeom prst="rect">
             <a:avLst/>
@@ -3409,90 +3805,134 @@
           <a:p>
             <a:pPr>
               <a:spcAft>
-                <a:spcPts val="700"/>
+                <a:spcPts val="500"/>
               </a:spcAft>
-              <a:defRPr sz="2000">
+              <a:defRPr sz="1700" b="1">
                 <a:solidFill>
                   <a:srgbClr val="0B2A4A"/>
                 </a:solidFill>
               </a:defRPr>
             </a:pPr>
             <a:r>
-              <a:t>• Research-grade data (free index/ETF-proxy series); a true long-history index study needs Bloomberg.</a:t>
+              <a:t>■  Research-grade data (free index / ETF-proxy series); true long-history index needs Bloomberg.</a:t>
             </a:r>
           </a:p>
           <a:p>
             <a:pPr>
               <a:spcAft>
-                <a:spcPts val="700"/>
+                <a:spcPts val="500"/>
               </a:spcAft>
-              <a:defRPr sz="2000">
+              <a:defRPr sz="1700" b="1">
                 <a:solidFill>
                   <a:srgbClr val="0B2A4A"/>
                 </a:solidFill>
               </a:defRPr>
             </a:pPr>
             <a:r>
-              <a:t>• Historical simulation only — no capacity, market impact, borrow, or live execution.</a:t>
+              <a:t>■  Historical simulation only — no capacity, market impact, borrow, or live execution.</a:t>
             </a:r>
           </a:p>
           <a:p>
             <a:pPr>
               <a:spcAft>
-                <a:spcPts val="700"/>
+                <a:spcPts val="500"/>
               </a:spcAft>
-              <a:defRPr sz="2000">
+              <a:defRPr sz="1700" b="1">
                 <a:solidFill>
                   <a:srgbClr val="0B2A4A"/>
                 </a:solidFill>
               </a:defRPr>
             </a:pPr>
             <a:r>
-              <a:t>• M1's edge is regime-concentrated (recent), not uniform across history.</a:t>
+              <a:t>■  M1's edge is regime-concentrated (recent), not uniform across history.</a:t>
             </a:r>
           </a:p>
           <a:p>
             <a:pPr>
               <a:spcAft>
-                <a:spcPts val="700"/>
+                <a:spcPts val="500"/>
               </a:spcAft>
-              <a:defRPr sz="2000">
+              <a:defRPr sz="1700" b="1">
                 <a:solidFill>
                   <a:srgbClr val="0B2A4A"/>
                 </a:solidFill>
               </a:defRPr>
             </a:pPr>
             <a:r>
-              <a:t>• M2 is not yet usable; its prediction target needs to be reformulated.</a:t>
+              <a:t>■  M2 is not yet usable; its prediction target needs reformulation.</a:t>
             </a:r>
           </a:p>
           <a:p>
             <a:pPr>
               <a:spcAft>
-                <a:spcPts val="700"/>
+                <a:spcPts val="500"/>
               </a:spcAft>
-              <a:defRPr sz="2000">
+              <a:defRPr sz="1700" b="1">
                 <a:solidFill>
                   <a:srgbClr val="0B2A4A"/>
                 </a:solidFill>
               </a:defRPr>
             </a:pPr>
             <a:r>
-              <a:t>• Some diagnostics are full-sample; production needs broader walk-forward / purged CV.</a:t>
-            </a:r>
-          </a:p>
-        </p:txBody>
-      </p:sp>
-      <p:sp>
-        <p:nvSpPr>
-          <p:cNvPr id="4" name="TextBox 3"/>
+              <a:t>■  Some diagnostics are full-sample; production needs broader walk-forward / purged CV.</a:t>
+            </a:r>
+          </a:p>
+        </p:txBody>
+      </p:sp>
+      <p:sp>
+        <p:nvSpPr>
+          <p:cNvPr id="6" name="Rectangle 5"/>
+          <p:cNvSpPr/>
+          <p:nvPr/>
+        </p:nvSpPr>
+        <p:spPr>
+          <a:xfrm>
+            <a:off x="548640" y="5715000"/>
+            <a:ext cx="11091672" cy="566928"/>
+          </a:xfrm>
+          <a:prstGeom prst="rect">
+            <a:avLst/>
+          </a:prstGeom>
+          <a:solidFill>
+            <a:srgbClr val="ECF1F6"/>
+          </a:solidFill>
+          <a:ln>
+            <a:noFill/>
+          </a:ln>
+          <a:effectLst/>
+        </p:spPr>
+        <p:style>
+          <a:lnRef idx="1">
+            <a:schemeClr val="accent1"/>
+          </a:lnRef>
+          <a:fillRef idx="3">
+            <a:schemeClr val="accent1"/>
+          </a:fillRef>
+          <a:effectRef idx="2">
+            <a:schemeClr val="accent1"/>
+          </a:effectRef>
+          <a:fontRef idx="minor">
+            <a:schemeClr val="lt1"/>
+          </a:fontRef>
+        </p:style>
+        <p:txBody>
+          <a:bodyPr rtlCol="0" anchor="ctr"/>
+          <a:lstStyle/>
+          <a:p>
+            <a:pPr algn="ctr"/>
+          </a:p>
+        </p:txBody>
+      </p:sp>
+      <p:sp>
+        <p:nvSpPr>
+          <p:cNvPr id="7" name="TextBox 6"/>
           <p:cNvSpPr txBox="1"/>
           <p:nvPr/>
         </p:nvSpPr>
         <p:spPr>
           <a:xfrm>
-            <a:off x="822960" y="5897880"/>
-            <a:ext cx="10607040" cy="822960"/>
+            <a:off x="731520" y="5760720"/>
+            <a:ext cx="10789920" cy="502920"/>
           </a:xfrm>
           <a:prstGeom prst="rect">
             <a:avLst/>
@@ -3500,20 +3940,90 @@
           <a:noFill/>
         </p:spPr>
         <p:txBody>
+          <a:bodyPr wrap="square" anchor="ctr">
+            <a:spAutoFit/>
+          </a:bodyPr>
+          <a:lstStyle/>
+          <a:p>
+            <a:pPr>
+              <a:defRPr sz="1300" b="1">
+                <a:solidFill>
+                  <a:srgbClr val="1F6FB2"/>
+                </a:solidFill>
+              </a:defRPr>
+            </a:pPr>
+            <a:r>
+              <a:t>Takeaway:  Solid on each step — we report what works and what does not, without overselling.</a:t>
+            </a:r>
+          </a:p>
+        </p:txBody>
+      </p:sp>
+      <p:sp>
+        <p:nvSpPr>
+          <p:cNvPr id="8" name="TextBox 7"/>
+          <p:cNvSpPr txBox="1"/>
+          <p:nvPr/>
+        </p:nvSpPr>
+        <p:spPr>
+          <a:xfrm>
+            <a:off x="548640" y="6419088"/>
+            <a:ext cx="11155680" cy="320040"/>
+          </a:xfrm>
+          <a:prstGeom prst="rect">
+            <a:avLst/>
+          </a:prstGeom>
+          <a:noFill/>
+        </p:spPr>
+        <p:txBody>
           <a:bodyPr wrap="square">
             <a:spAutoFit/>
           </a:bodyPr>
           <a:lstStyle/>
           <a:p>
             <a:pPr>
-              <a:defRPr sz="1600" b="1" i="1">
-                <a:solidFill>
-                  <a:srgbClr val="1F6FB2"/>
+              <a:defRPr sz="900">
+                <a:solidFill>
+                  <a:srgbClr val="555B66"/>
                 </a:solidFill>
               </a:defRPr>
             </a:pPr>
             <a:r>
-              <a:t>Takeaway: Solid on each step; we report what works and what does not, without overselling.</a:t>
+              <a:t>Multi-Asset Meta-Labeling  ·  June 18, 2026</a:t>
+            </a:r>
+          </a:p>
+        </p:txBody>
+      </p:sp>
+      <p:sp>
+        <p:nvSpPr>
+          <p:cNvPr id="9" name="TextBox 8"/>
+          <p:cNvSpPr txBox="1"/>
+          <p:nvPr/>
+        </p:nvSpPr>
+        <p:spPr>
+          <a:xfrm>
+            <a:off x="11338560" y="6419088"/>
+            <a:ext cx="640080" cy="320040"/>
+          </a:xfrm>
+          <a:prstGeom prst="rect">
+            <a:avLst/>
+          </a:prstGeom>
+          <a:noFill/>
+        </p:spPr>
+        <p:txBody>
+          <a:bodyPr wrap="square">
+            <a:spAutoFit/>
+          </a:bodyPr>
+          <a:lstStyle/>
+          <a:p>
+            <a:pPr>
+              <a:defRPr sz="900">
+                <a:solidFill>
+                  <a:srgbClr val="555B66"/>
+                </a:solidFill>
+              </a:defRPr>
+            </a:pPr>
+            <a:r>
+              <a:t>10</a:t>
             </a:r>
           </a:p>
         </p:txBody>
@@ -3538,14 +4048,58 @@
       <p:grpSpPr/>
       <p:sp>
         <p:nvSpPr>
-          <p:cNvPr id="2" name="TextBox 1"/>
+          <p:cNvPr id="2" name="Rectangle 1"/>
+          <p:cNvSpPr/>
+          <p:nvPr/>
+        </p:nvSpPr>
+        <p:spPr>
+          <a:xfrm>
+            <a:off x="0" y="0"/>
+            <a:ext cx="201168" cy="6858000"/>
+          </a:xfrm>
+          <a:prstGeom prst="rect">
+            <a:avLst/>
+          </a:prstGeom>
+          <a:solidFill>
+            <a:srgbClr val="0B2A4A"/>
+          </a:solidFill>
+          <a:ln>
+            <a:noFill/>
+          </a:ln>
+          <a:effectLst/>
+        </p:spPr>
+        <p:style>
+          <a:lnRef idx="1">
+            <a:schemeClr val="accent1"/>
+          </a:lnRef>
+          <a:fillRef idx="3">
+            <a:schemeClr val="accent1"/>
+          </a:fillRef>
+          <a:effectRef idx="2">
+            <a:schemeClr val="accent1"/>
+          </a:effectRef>
+          <a:fontRef idx="minor">
+            <a:schemeClr val="lt1"/>
+          </a:fontRef>
+        </p:style>
+        <p:txBody>
+          <a:bodyPr rtlCol="0" anchor="ctr"/>
+          <a:lstStyle/>
+          <a:p>
+            <a:pPr algn="ctr"/>
+          </a:p>
+        </p:txBody>
+      </p:sp>
+      <p:sp>
+        <p:nvSpPr>
+          <p:cNvPr id="3" name="TextBox 2"/>
           <p:cNvSpPr txBox="1"/>
           <p:nvPr/>
         </p:nvSpPr>
         <p:spPr>
           <a:xfrm>
-            <a:off x="640080" y="411480"/>
-            <a:ext cx="10972800" cy="914400"/>
+            <a:off x="548640" y="320040"/>
+            <a:ext cx="11338560" cy="822960"/>
           </a:xfrm>
           <a:prstGeom prst="rect">
             <a:avLst/>
@@ -3559,7 +4113,7 @@
           <a:lstStyle/>
           <a:p>
             <a:pPr>
-              <a:defRPr sz="3000" b="1">
+              <a:defRPr sz="2600" b="1">
                 <a:solidFill>
                   <a:srgbClr val="0B2A4A"/>
                 </a:solidFill>
@@ -3573,14 +4127,58 @@
       </p:sp>
       <p:sp>
         <p:nvSpPr>
-          <p:cNvPr id="3" name="TextBox 2"/>
+          <p:cNvPr id="4" name="Rectangle 3"/>
+          <p:cNvSpPr/>
+          <p:nvPr/>
+        </p:nvSpPr>
+        <p:spPr>
+          <a:xfrm>
+            <a:off x="566928" y="1078992"/>
+            <a:ext cx="3840480" cy="41148"/>
+          </a:xfrm>
+          <a:prstGeom prst="rect">
+            <a:avLst/>
+          </a:prstGeom>
+          <a:solidFill>
+            <a:srgbClr val="1F6FB2"/>
+          </a:solidFill>
+          <a:ln>
+            <a:noFill/>
+          </a:ln>
+          <a:effectLst/>
+        </p:spPr>
+        <p:style>
+          <a:lnRef idx="1">
+            <a:schemeClr val="accent1"/>
+          </a:lnRef>
+          <a:fillRef idx="3">
+            <a:schemeClr val="accent1"/>
+          </a:fillRef>
+          <a:effectRef idx="2">
+            <a:schemeClr val="accent1"/>
+          </a:effectRef>
+          <a:fontRef idx="minor">
+            <a:schemeClr val="lt1"/>
+          </a:fontRef>
+        </p:style>
+        <p:txBody>
+          <a:bodyPr rtlCol="0" anchor="ctr"/>
+          <a:lstStyle/>
+          <a:p>
+            <a:pPr algn="ctr"/>
+          </a:p>
+        </p:txBody>
+      </p:sp>
+      <p:sp>
+        <p:nvSpPr>
+          <p:cNvPr id="5" name="TextBox 4"/>
           <p:cNvSpPr txBox="1"/>
           <p:nvPr/>
         </p:nvSpPr>
         <p:spPr>
           <a:xfrm>
-            <a:off x="822960" y="1463040"/>
-            <a:ext cx="10607040" cy="4206240"/>
+            <a:off x="640080" y="1325880"/>
+            <a:ext cx="10972800" cy="4297680"/>
           </a:xfrm>
           <a:prstGeom prst="rect">
             <a:avLst/>
@@ -3595,135 +4193,179 @@
           <a:p>
             <a:pPr>
               <a:spcAft>
-                <a:spcPts val="700"/>
+                <a:spcPts val="500"/>
               </a:spcAft>
-              <a:defRPr sz="2000">
+              <a:defRPr sz="1700" b="1">
                 <a:solidFill>
                   <a:srgbClr val="0B2A4A"/>
                 </a:solidFill>
               </a:defRPr>
             </a:pPr>
             <a:r>
-              <a:t>• M2 reformulation — which direction do you prefer?</a:t>
+              <a:t>■  M2 reformulation — which direction?</a:t>
             </a:r>
           </a:p>
           <a:p>
             <a:pPr lvl="1">
               <a:spcAft>
-                <a:spcPts val="700"/>
+                <a:spcPts val="500"/>
               </a:spcAft>
-              <a:defRPr sz="1700">
+              <a:defRPr sz="1400" b="0">
                 <a:solidFill>
                   <a:srgbClr val="555B66"/>
                 </a:solidFill>
               </a:defRPr>
             </a:pPr>
             <a:r>
-              <a:t>– a regime gate (scale total active risk down in stress regimes), or</a:t>
+              <a:t>–  a regime gate (scale total active risk down in stress), or</a:t>
             </a:r>
           </a:p>
           <a:p>
             <a:pPr lvl="1">
               <a:spcAft>
-                <a:spcPts val="700"/>
+                <a:spcPts val="500"/>
               </a:spcAft>
-              <a:defRPr sz="1700">
+              <a:defRPr sz="1400" b="0">
                 <a:solidFill>
                   <a:srgbClr val="555B66"/>
                 </a:solidFill>
               </a:defRPr>
             </a:pPr>
             <a:r>
-              <a:t>– a factor-timer (momentum vs trend by regime), or a different target/horizon?</a:t>
+              <a:t>–  a factor-timer (momentum vs trend by regime), or a different target / horizon?</a:t>
             </a:r>
           </a:p>
           <a:p>
             <a:pPr>
               <a:spcAft>
-                <a:spcPts val="700"/>
+                <a:spcPts val="500"/>
               </a:spcAft>
-              <a:defRPr sz="2000">
+              <a:defRPr sz="1700" b="1">
                 <a:solidFill>
                   <a:srgbClr val="0B2A4A"/>
                 </a:solidFill>
               </a:defRPr>
             </a:pPr>
             <a:r>
-              <a:t>• Is the 4-week, benchmark-relative success label the right thing to predict?</a:t>
+              <a:t>■  Is the 4-week, benchmark-relative success label the right thing to predict?</a:t>
             </a:r>
           </a:p>
           <a:p>
             <a:pPr>
               <a:spcAft>
-                <a:spcPts val="700"/>
+                <a:spcPts val="500"/>
               </a:spcAft>
-              <a:defRPr sz="2000">
+              <a:defRPr sz="1700" b="1">
                 <a:solidFill>
                   <a:srgbClr val="0B2A4A"/>
                 </a:solidFill>
               </a:defRPr>
             </a:pPr>
             <a:r>
-              <a:t>• M1's edge is recent-regime concentrated — acceptable, or do we need cross-regime robustness?</a:t>
+              <a:t>■  M1's edge is recent-regime concentrated — acceptable, or do we need cross-regime robustness?</a:t>
             </a:r>
           </a:p>
           <a:p>
             <a:pPr>
               <a:spcAft>
-                <a:spcPts val="700"/>
+                <a:spcPts val="500"/>
               </a:spcAft>
-              <a:defRPr sz="2000">
+              <a:defRPr sz="1700" b="1">
                 <a:solidFill>
                   <a:srgbClr val="0B2A4A"/>
                 </a:solidFill>
               </a:defRPr>
             </a:pPr>
             <a:r>
-              <a:t>• Data: prioritize Bloomberg true-index history (pre-2012)? Which sleeves matter most?</a:t>
+              <a:t>■  Data — prioritize Bloomberg true-index history (pre-2012)? Which sleeves first?</a:t>
             </a:r>
           </a:p>
           <a:p>
             <a:pPr>
               <a:spcAft>
-                <a:spcPts val="700"/>
+                <a:spcPts val="500"/>
               </a:spcAft>
-              <a:defRPr sz="2000">
+              <a:defRPr sz="1700" b="1">
                 <a:solidFill>
                   <a:srgbClr val="0B2A4A"/>
                 </a:solidFill>
               </a:defRPr>
             </a:pPr>
             <a:r>
-              <a:t>• Universe: stay at 7, or add IG credit + broad commodity (9)?</a:t>
+              <a:t>■  Universe — stay at 7, or add IG credit + broad commodity (9)?</a:t>
             </a:r>
           </a:p>
           <a:p>
             <a:pPr>
               <a:spcAft>
-                <a:spcPts val="700"/>
+                <a:spcPts val="500"/>
               </a:spcAft>
-              <a:defRPr sz="2000">
+              <a:defRPr sz="1700" b="1">
                 <a:solidFill>
                   <a:srgbClr val="0B2A4A"/>
                 </a:solidFill>
               </a:defRPr>
             </a:pPr>
             <a:r>
-              <a:t>• Benchmark / tracking-error budget for the information-ratio framing?</a:t>
-            </a:r>
-          </a:p>
-        </p:txBody>
-      </p:sp>
-      <p:sp>
-        <p:nvSpPr>
-          <p:cNvPr id="4" name="TextBox 3"/>
+              <a:t>■  Benchmark / tracking-error budget for the information-ratio framing?</a:t>
+            </a:r>
+          </a:p>
+        </p:txBody>
+      </p:sp>
+      <p:sp>
+        <p:nvSpPr>
+          <p:cNvPr id="6" name="Rectangle 5"/>
+          <p:cNvSpPr/>
+          <p:nvPr/>
+        </p:nvSpPr>
+        <p:spPr>
+          <a:xfrm>
+            <a:off x="548640" y="5715000"/>
+            <a:ext cx="11091672" cy="566928"/>
+          </a:xfrm>
+          <a:prstGeom prst="rect">
+            <a:avLst/>
+          </a:prstGeom>
+          <a:solidFill>
+            <a:srgbClr val="ECF1F6"/>
+          </a:solidFill>
+          <a:ln>
+            <a:noFill/>
+          </a:ln>
+          <a:effectLst/>
+        </p:spPr>
+        <p:style>
+          <a:lnRef idx="1">
+            <a:schemeClr val="accent1"/>
+          </a:lnRef>
+          <a:fillRef idx="3">
+            <a:schemeClr val="accent1"/>
+          </a:fillRef>
+          <a:effectRef idx="2">
+            <a:schemeClr val="accent1"/>
+          </a:effectRef>
+          <a:fontRef idx="minor">
+            <a:schemeClr val="lt1"/>
+          </a:fontRef>
+        </p:style>
+        <p:txBody>
+          <a:bodyPr rtlCol="0" anchor="ctr"/>
+          <a:lstStyle/>
+          <a:p>
+            <a:pPr algn="ctr"/>
+          </a:p>
+        </p:txBody>
+      </p:sp>
+      <p:sp>
+        <p:nvSpPr>
+          <p:cNvPr id="7" name="TextBox 6"/>
           <p:cNvSpPr txBox="1"/>
           <p:nvPr/>
         </p:nvSpPr>
         <p:spPr>
           <a:xfrm>
-            <a:off x="822960" y="5897880"/>
-            <a:ext cx="10607040" cy="822960"/>
+            <a:off x="731520" y="5760720"/>
+            <a:ext cx="10789920" cy="502920"/>
           </a:xfrm>
           <a:prstGeom prst="rect">
             <a:avLst/>
@@ -3731,20 +4373,90 @@
           <a:noFill/>
         </p:spPr>
         <p:txBody>
+          <a:bodyPr wrap="square" anchor="ctr">
+            <a:spAutoFit/>
+          </a:bodyPr>
+          <a:lstStyle/>
+          <a:p>
+            <a:pPr>
+              <a:defRPr sz="1300" b="1">
+                <a:solidFill>
+                  <a:srgbClr val="1F6FB2"/>
+                </a:solidFill>
+              </a:defRPr>
+            </a:pPr>
+            <a:r>
+              <a:t>Takeaway:  We are solid on M1 and the framework; M2's design is the open research decision.</a:t>
+            </a:r>
+          </a:p>
+        </p:txBody>
+      </p:sp>
+      <p:sp>
+        <p:nvSpPr>
+          <p:cNvPr id="8" name="TextBox 7"/>
+          <p:cNvSpPr txBox="1"/>
+          <p:nvPr/>
+        </p:nvSpPr>
+        <p:spPr>
+          <a:xfrm>
+            <a:off x="548640" y="6419088"/>
+            <a:ext cx="11155680" cy="320040"/>
+          </a:xfrm>
+          <a:prstGeom prst="rect">
+            <a:avLst/>
+          </a:prstGeom>
+          <a:noFill/>
+        </p:spPr>
+        <p:txBody>
           <a:bodyPr wrap="square">
             <a:spAutoFit/>
           </a:bodyPr>
           <a:lstStyle/>
           <a:p>
             <a:pPr>
-              <a:defRPr sz="1600" b="1" i="1">
-                <a:solidFill>
-                  <a:srgbClr val="1F6FB2"/>
+              <a:defRPr sz="900">
+                <a:solidFill>
+                  <a:srgbClr val="555B66"/>
                 </a:solidFill>
               </a:defRPr>
             </a:pPr>
             <a:r>
-              <a:t>Takeaway: We are solid on M1 and the framework; M2's design is the open research decision.</a:t>
+              <a:t>Multi-Asset Meta-Labeling  ·  June 18, 2026</a:t>
+            </a:r>
+          </a:p>
+        </p:txBody>
+      </p:sp>
+      <p:sp>
+        <p:nvSpPr>
+          <p:cNvPr id="9" name="TextBox 8"/>
+          <p:cNvSpPr txBox="1"/>
+          <p:nvPr/>
+        </p:nvSpPr>
+        <p:spPr>
+          <a:xfrm>
+            <a:off x="11338560" y="6419088"/>
+            <a:ext cx="640080" cy="320040"/>
+          </a:xfrm>
+          <a:prstGeom prst="rect">
+            <a:avLst/>
+          </a:prstGeom>
+          <a:noFill/>
+        </p:spPr>
+        <p:txBody>
+          <a:bodyPr wrap="square">
+            <a:spAutoFit/>
+          </a:bodyPr>
+          <a:lstStyle/>
+          <a:p>
+            <a:pPr>
+              <a:defRPr sz="900">
+                <a:solidFill>
+                  <a:srgbClr val="555B66"/>
+                </a:solidFill>
+              </a:defRPr>
+            </a:pPr>
+            <a:r>
+              <a:t>11</a:t>
             </a:r>
           </a:p>
         </p:txBody>
@@ -3769,14 +4481,58 @@
       <p:grpSpPr/>
       <p:sp>
         <p:nvSpPr>
-          <p:cNvPr id="2" name="TextBox 1"/>
+          <p:cNvPr id="2" name="Rectangle 1"/>
+          <p:cNvSpPr/>
+          <p:nvPr/>
+        </p:nvSpPr>
+        <p:spPr>
+          <a:xfrm>
+            <a:off x="0" y="0"/>
+            <a:ext cx="201168" cy="6858000"/>
+          </a:xfrm>
+          <a:prstGeom prst="rect">
+            <a:avLst/>
+          </a:prstGeom>
+          <a:solidFill>
+            <a:srgbClr val="0B2A4A"/>
+          </a:solidFill>
+          <a:ln>
+            <a:noFill/>
+          </a:ln>
+          <a:effectLst/>
+        </p:spPr>
+        <p:style>
+          <a:lnRef idx="1">
+            <a:schemeClr val="accent1"/>
+          </a:lnRef>
+          <a:fillRef idx="3">
+            <a:schemeClr val="accent1"/>
+          </a:fillRef>
+          <a:effectRef idx="2">
+            <a:schemeClr val="accent1"/>
+          </a:effectRef>
+          <a:fontRef idx="minor">
+            <a:schemeClr val="lt1"/>
+          </a:fontRef>
+        </p:style>
+        <p:txBody>
+          <a:bodyPr rtlCol="0" anchor="ctr"/>
+          <a:lstStyle/>
+          <a:p>
+            <a:pPr algn="ctr"/>
+          </a:p>
+        </p:txBody>
+      </p:sp>
+      <p:sp>
+        <p:nvSpPr>
+          <p:cNvPr id="3" name="TextBox 2"/>
           <p:cNvSpPr txBox="1"/>
           <p:nvPr/>
         </p:nvSpPr>
         <p:spPr>
           <a:xfrm>
-            <a:off x="640080" y="411480"/>
-            <a:ext cx="10972800" cy="914400"/>
+            <a:off x="548640" y="320040"/>
+            <a:ext cx="11338560" cy="822960"/>
           </a:xfrm>
           <a:prstGeom prst="rect">
             <a:avLst/>
@@ -3790,7 +4546,7 @@
           <a:lstStyle/>
           <a:p>
             <a:pPr>
-              <a:defRPr sz="3000" b="1">
+              <a:defRPr sz="2600" b="1">
                 <a:solidFill>
                   <a:srgbClr val="0B2A4A"/>
                 </a:solidFill>
@@ -3804,14 +4560,58 @@
       </p:sp>
       <p:sp>
         <p:nvSpPr>
-          <p:cNvPr id="3" name="TextBox 2"/>
+          <p:cNvPr id="4" name="Rectangle 3"/>
+          <p:cNvSpPr/>
+          <p:nvPr/>
+        </p:nvSpPr>
+        <p:spPr>
+          <a:xfrm>
+            <a:off x="566928" y="1078992"/>
+            <a:ext cx="3840480" cy="41148"/>
+          </a:xfrm>
+          <a:prstGeom prst="rect">
+            <a:avLst/>
+          </a:prstGeom>
+          <a:solidFill>
+            <a:srgbClr val="1F6FB2"/>
+          </a:solidFill>
+          <a:ln>
+            <a:noFill/>
+          </a:ln>
+          <a:effectLst/>
+        </p:spPr>
+        <p:style>
+          <a:lnRef idx="1">
+            <a:schemeClr val="accent1"/>
+          </a:lnRef>
+          <a:fillRef idx="3">
+            <a:schemeClr val="accent1"/>
+          </a:fillRef>
+          <a:effectRef idx="2">
+            <a:schemeClr val="accent1"/>
+          </a:effectRef>
+          <a:fontRef idx="minor">
+            <a:schemeClr val="lt1"/>
+          </a:fontRef>
+        </p:style>
+        <p:txBody>
+          <a:bodyPr rtlCol="0" anchor="ctr"/>
+          <a:lstStyle/>
+          <a:p>
+            <a:pPr algn="ctr"/>
+          </a:p>
+        </p:txBody>
+      </p:sp>
+      <p:sp>
+        <p:nvSpPr>
+          <p:cNvPr id="5" name="TextBox 4"/>
           <p:cNvSpPr txBox="1"/>
           <p:nvPr/>
         </p:nvSpPr>
         <p:spPr>
           <a:xfrm>
-            <a:off x="822960" y="1463040"/>
-            <a:ext cx="10607040" cy="4206240"/>
+            <a:off x="640080" y="1325880"/>
+            <a:ext cx="10972800" cy="4297680"/>
           </a:xfrm>
           <a:prstGeom prst="rect">
             <a:avLst/>
@@ -3826,105 +4626,149 @@
           <a:p>
             <a:pPr>
               <a:spcAft>
-                <a:spcPts val="700"/>
+                <a:spcPts val="500"/>
               </a:spcAft>
-              <a:defRPr sz="2000">
+              <a:defRPr sz="1700" b="1">
                 <a:solidFill>
                   <a:srgbClr val="0B2A4A"/>
                 </a:solidFill>
               </a:defRPr>
             </a:pPr>
             <a:r>
-              <a:t>• Allocate weekly across a diversified seven-sleeve global asset universe.</a:t>
+              <a:t>■  Allocate weekly across a diversified seven-sleeve global asset universe.</a:t>
             </a:r>
           </a:p>
           <a:p>
             <a:pPr>
               <a:spcAft>
-                <a:spcPts val="700"/>
+                <a:spcPts val="500"/>
               </a:spcAft>
-              <a:defRPr sz="2000">
+              <a:defRPr sz="1700" b="1">
                 <a:solidFill>
                   <a:srgbClr val="0B2A4A"/>
                 </a:solidFill>
               </a:defRPr>
             </a:pPr>
             <a:r>
-              <a:t>• Separate the two decisions a single model usually blurs:</a:t>
+              <a:t>■  Split the two decisions a single model usually blurs:</a:t>
             </a:r>
           </a:p>
           <a:p>
             <a:pPr lvl="1">
               <a:spcAft>
-                <a:spcPts val="700"/>
+                <a:spcPts val="500"/>
               </a:spcAft>
-              <a:defRPr sz="1700">
+              <a:defRPr sz="1400" b="0">
                 <a:solidFill>
                   <a:srgbClr val="555B66"/>
                 </a:solidFill>
               </a:defRPr>
             </a:pPr>
             <a:r>
-              <a:t>– M1 — direction: which assets to favour (high recall, simple)</a:t>
+              <a:t>–  M1 — direction: which assets to favour (simple, high recall)</a:t>
             </a:r>
           </a:p>
           <a:p>
             <a:pPr lvl="1">
               <a:spcAft>
-                <a:spcPts val="700"/>
+                <a:spcPts val="500"/>
               </a:spcAft>
-              <a:defRPr sz="1700">
+              <a:defRPr sz="1400" b="0">
                 <a:solidFill>
                   <a:srgbClr val="555B66"/>
                 </a:solidFill>
               </a:defRPr>
             </a:pPr>
             <a:r>
-              <a:t>– M2 — conviction: is the view likely to pay, and how much to size (precision)</a:t>
+              <a:t>–  M2 — conviction: is the view likely to pay, and how much to size</a:t>
             </a:r>
           </a:p>
           <a:p>
             <a:pPr>
               <a:spcAft>
-                <a:spcPts val="700"/>
+                <a:spcPts val="500"/>
               </a:spcAft>
-              <a:defRPr sz="2000">
+              <a:defRPr sz="1700" b="1">
                 <a:solidFill>
                   <a:srgbClr val="0B2A4A"/>
                 </a:solidFill>
               </a:defRPr>
             </a:pPr>
             <a:r>
-              <a:t>• This is the meta-labeling design from systematic-PM literature (Lopez de Prado).</a:t>
+              <a:t>■  Meta-labeling design from systematic-PM literature (Lopez de Prado).</a:t>
             </a:r>
           </a:p>
           <a:p>
             <a:pPr>
               <a:spcAft>
-                <a:spcPts val="700"/>
+                <a:spcPts val="500"/>
               </a:spcAft>
-              <a:defRPr sz="2000">
+              <a:defRPr sz="1700" b="1">
                 <a:solidFill>
                   <a:srgbClr val="0B2A4A"/>
                 </a:solidFill>
               </a:defRPr>
             </a:pPr>
             <a:r>
-              <a:t>• Organizing principle: STATIC factors live in M1, DYNAMIC factors live in M2.</a:t>
-            </a:r>
-          </a:p>
-        </p:txBody>
-      </p:sp>
-      <p:sp>
-        <p:nvSpPr>
-          <p:cNvPr id="4" name="TextBox 3"/>
+              <a:t>■  Principle: STATIC factors live in M1; DYNAMIC factors live in M2.</a:t>
+            </a:r>
+          </a:p>
+        </p:txBody>
+      </p:sp>
+      <p:sp>
+        <p:nvSpPr>
+          <p:cNvPr id="6" name="Rectangle 5"/>
+          <p:cNvSpPr/>
+          <p:nvPr/>
+        </p:nvSpPr>
+        <p:spPr>
+          <a:xfrm>
+            <a:off x="548640" y="5715000"/>
+            <a:ext cx="11091672" cy="566928"/>
+          </a:xfrm>
+          <a:prstGeom prst="rect">
+            <a:avLst/>
+          </a:prstGeom>
+          <a:solidFill>
+            <a:srgbClr val="ECF1F6"/>
+          </a:solidFill>
+          <a:ln>
+            <a:noFill/>
+          </a:ln>
+          <a:effectLst/>
+        </p:spPr>
+        <p:style>
+          <a:lnRef idx="1">
+            <a:schemeClr val="accent1"/>
+          </a:lnRef>
+          <a:fillRef idx="3">
+            <a:schemeClr val="accent1"/>
+          </a:fillRef>
+          <a:effectRef idx="2">
+            <a:schemeClr val="accent1"/>
+          </a:effectRef>
+          <a:fontRef idx="minor">
+            <a:schemeClr val="lt1"/>
+          </a:fontRef>
+        </p:style>
+        <p:txBody>
+          <a:bodyPr rtlCol="0" anchor="ctr"/>
+          <a:lstStyle/>
+          <a:p>
+            <a:pPr algn="ctr"/>
+          </a:p>
+        </p:txBody>
+      </p:sp>
+      <p:sp>
+        <p:nvSpPr>
+          <p:cNvPr id="7" name="TextBox 6"/>
           <p:cNvSpPr txBox="1"/>
           <p:nvPr/>
         </p:nvSpPr>
         <p:spPr>
           <a:xfrm>
-            <a:off x="822960" y="5897880"/>
-            <a:ext cx="10607040" cy="822960"/>
+            <a:off x="731520" y="5760720"/>
+            <a:ext cx="10789920" cy="502920"/>
           </a:xfrm>
           <a:prstGeom prst="rect">
             <a:avLst/>
@@ -3932,20 +4776,90 @@
           <a:noFill/>
         </p:spPr>
         <p:txBody>
+          <a:bodyPr wrap="square" anchor="ctr">
+            <a:spAutoFit/>
+          </a:bodyPr>
+          <a:lstStyle/>
+          <a:p>
+            <a:pPr>
+              <a:defRPr sz="1300" b="1">
+                <a:solidFill>
+                  <a:srgbClr val="1F6FB2"/>
+                </a:solidFill>
+              </a:defRPr>
+            </a:pPr>
+            <a:r>
+              <a:t>Takeaway:  Two simple problems beat one hard one — M1 proposes, M2 filters and sizes.</a:t>
+            </a:r>
+          </a:p>
+        </p:txBody>
+      </p:sp>
+      <p:sp>
+        <p:nvSpPr>
+          <p:cNvPr id="8" name="TextBox 7"/>
+          <p:cNvSpPr txBox="1"/>
+          <p:nvPr/>
+        </p:nvSpPr>
+        <p:spPr>
+          <a:xfrm>
+            <a:off x="548640" y="6419088"/>
+            <a:ext cx="11155680" cy="320040"/>
+          </a:xfrm>
+          <a:prstGeom prst="rect">
+            <a:avLst/>
+          </a:prstGeom>
+          <a:noFill/>
+        </p:spPr>
+        <p:txBody>
           <a:bodyPr wrap="square">
             <a:spAutoFit/>
           </a:bodyPr>
           <a:lstStyle/>
           <a:p>
             <a:pPr>
-              <a:defRPr sz="1600" b="1" i="1">
-                <a:solidFill>
-                  <a:srgbClr val="1F6FB2"/>
+              <a:defRPr sz="900">
+                <a:solidFill>
+                  <a:srgbClr val="555B66"/>
                 </a:solidFill>
               </a:defRPr>
             </a:pPr>
             <a:r>
-              <a:t>Takeaway: Two simpler problems beat one hard one — M1 proposes, M2 filters and sizes.</a:t>
+              <a:t>Multi-Asset Meta-Labeling  ·  June 18, 2026</a:t>
+            </a:r>
+          </a:p>
+        </p:txBody>
+      </p:sp>
+      <p:sp>
+        <p:nvSpPr>
+          <p:cNvPr id="9" name="TextBox 8"/>
+          <p:cNvSpPr txBox="1"/>
+          <p:nvPr/>
+        </p:nvSpPr>
+        <p:spPr>
+          <a:xfrm>
+            <a:off x="11338560" y="6419088"/>
+            <a:ext cx="640080" cy="320040"/>
+          </a:xfrm>
+          <a:prstGeom prst="rect">
+            <a:avLst/>
+          </a:prstGeom>
+          <a:noFill/>
+        </p:spPr>
+        <p:txBody>
+          <a:bodyPr wrap="square">
+            <a:spAutoFit/>
+          </a:bodyPr>
+          <a:lstStyle/>
+          <a:p>
+            <a:pPr>
+              <a:defRPr sz="900">
+                <a:solidFill>
+                  <a:srgbClr val="555B66"/>
+                </a:solidFill>
+              </a:defRPr>
+            </a:pPr>
+            <a:r>
+              <a:t>1</a:t>
             </a:r>
           </a:p>
         </p:txBody>
@@ -3970,14 +4884,58 @@
       <p:grpSpPr/>
       <p:sp>
         <p:nvSpPr>
-          <p:cNvPr id="2" name="TextBox 1"/>
+          <p:cNvPr id="2" name="Rectangle 1"/>
+          <p:cNvSpPr/>
+          <p:nvPr/>
+        </p:nvSpPr>
+        <p:spPr>
+          <a:xfrm>
+            <a:off x="0" y="0"/>
+            <a:ext cx="201168" cy="6858000"/>
+          </a:xfrm>
+          <a:prstGeom prst="rect">
+            <a:avLst/>
+          </a:prstGeom>
+          <a:solidFill>
+            <a:srgbClr val="0B2A4A"/>
+          </a:solidFill>
+          <a:ln>
+            <a:noFill/>
+          </a:ln>
+          <a:effectLst/>
+        </p:spPr>
+        <p:style>
+          <a:lnRef idx="1">
+            <a:schemeClr val="accent1"/>
+          </a:lnRef>
+          <a:fillRef idx="3">
+            <a:schemeClr val="accent1"/>
+          </a:fillRef>
+          <a:effectRef idx="2">
+            <a:schemeClr val="accent1"/>
+          </a:effectRef>
+          <a:fontRef idx="minor">
+            <a:schemeClr val="lt1"/>
+          </a:fontRef>
+        </p:style>
+        <p:txBody>
+          <a:bodyPr rtlCol="0" anchor="ctr"/>
+          <a:lstStyle/>
+          <a:p>
+            <a:pPr algn="ctr"/>
+          </a:p>
+        </p:txBody>
+      </p:sp>
+      <p:sp>
+        <p:nvSpPr>
+          <p:cNvPr id="3" name="TextBox 2"/>
           <p:cNvSpPr txBox="1"/>
           <p:nvPr/>
         </p:nvSpPr>
         <p:spPr>
           <a:xfrm>
-            <a:off x="640080" y="411480"/>
-            <a:ext cx="10972800" cy="914400"/>
+            <a:off x="548640" y="320040"/>
+            <a:ext cx="11338560" cy="822960"/>
           </a:xfrm>
           <a:prstGeom prst="rect">
             <a:avLst/>
@@ -3991,7 +4949,7 @@
           <a:lstStyle/>
           <a:p>
             <a:pPr>
-              <a:defRPr sz="3000" b="1">
+              <a:defRPr sz="2600" b="1">
                 <a:solidFill>
                   <a:srgbClr val="0B2A4A"/>
                 </a:solidFill>
@@ -4005,14 +4963,58 @@
       </p:sp>
       <p:sp>
         <p:nvSpPr>
-          <p:cNvPr id="3" name="TextBox 2"/>
+          <p:cNvPr id="4" name="Rectangle 3"/>
+          <p:cNvSpPr/>
+          <p:nvPr/>
+        </p:nvSpPr>
+        <p:spPr>
+          <a:xfrm>
+            <a:off x="566928" y="1078992"/>
+            <a:ext cx="3840480" cy="41148"/>
+          </a:xfrm>
+          <a:prstGeom prst="rect">
+            <a:avLst/>
+          </a:prstGeom>
+          <a:solidFill>
+            <a:srgbClr val="1F6FB2"/>
+          </a:solidFill>
+          <a:ln>
+            <a:noFill/>
+          </a:ln>
+          <a:effectLst/>
+        </p:spPr>
+        <p:style>
+          <a:lnRef idx="1">
+            <a:schemeClr val="accent1"/>
+          </a:lnRef>
+          <a:fillRef idx="3">
+            <a:schemeClr val="accent1"/>
+          </a:fillRef>
+          <a:effectRef idx="2">
+            <a:schemeClr val="accent1"/>
+          </a:effectRef>
+          <a:fontRef idx="minor">
+            <a:schemeClr val="lt1"/>
+          </a:fontRef>
+        </p:style>
+        <p:txBody>
+          <a:bodyPr rtlCol="0" anchor="ctr"/>
+          <a:lstStyle/>
+          <a:p>
+            <a:pPr algn="ctr"/>
+          </a:p>
+        </p:txBody>
+      </p:sp>
+      <p:sp>
+        <p:nvSpPr>
+          <p:cNvPr id="5" name="TextBox 4"/>
           <p:cNvSpPr txBox="1"/>
           <p:nvPr/>
         </p:nvSpPr>
         <p:spPr>
           <a:xfrm>
-            <a:off x="822960" y="1463040"/>
-            <a:ext cx="10607040" cy="4206240"/>
+            <a:off x="640080" y="1325880"/>
+            <a:ext cx="10972800" cy="4297680"/>
           </a:xfrm>
           <a:prstGeom prst="rect">
             <a:avLst/>
@@ -4027,120 +5029,149 @@
           <a:p>
             <a:pPr>
               <a:spcAft>
-                <a:spcPts val="700"/>
+                <a:spcPts val="500"/>
               </a:spcAft>
-              <a:defRPr sz="2000">
+              <a:defRPr sz="1700" b="1">
                 <a:solidFill>
                   <a:srgbClr val="0B2A4A"/>
                 </a:solidFill>
               </a:defRPr>
             </a:pPr>
             <a:r>
-              <a:t>• M1 — static, linear directional model (momentum + trend only).</a:t>
+              <a:t>■  M1 — static, linear directional model (momentum + trend only).</a:t>
             </a:r>
           </a:p>
           <a:p>
             <a:pPr>
               <a:spcAft>
-                <a:spcPts val="700"/>
+                <a:spcPts val="500"/>
               </a:spcAft>
-              <a:defRPr sz="2000">
+              <a:defRPr sz="1700" b="1">
                 <a:solidFill>
                   <a:srgbClr val="0B2A4A"/>
                 </a:solidFill>
               </a:defRPr>
             </a:pPr>
             <a:r>
-              <a:t>• M2 — dynamic, regime-aware meta-label (logistic regression).</a:t>
+              <a:t>■  M2 — dynamic, regime-aware meta-label (logistic regression):</a:t>
             </a:r>
           </a:p>
           <a:p>
             <a:pPr lvl="1">
               <a:spcAft>
-                <a:spcPts val="700"/>
+                <a:spcPts val="500"/>
               </a:spcAft>
-              <a:defRPr sz="1700">
+              <a:defRPr sz="1400" b="0">
                 <a:solidFill>
                   <a:srgbClr val="555B66"/>
                 </a:solidFill>
               </a:defRPr>
             </a:pPr>
             <a:r>
-              <a:t>– sees momentum, trend, macro, volatility separately + regime features</a:t>
+              <a:t>–  sees momentum, trend, macro, volatility separately + regime features</a:t>
             </a:r>
           </a:p>
           <a:p>
             <a:pPr lvl="1">
               <a:spcAft>
-                <a:spcPts val="700"/>
+                <a:spcPts val="500"/>
               </a:spcAft>
-              <a:defRPr sz="1700">
+              <a:defRPr sz="1400" b="0">
                 <a:solidFill>
                   <a:srgbClr val="555B66"/>
                 </a:solidFill>
               </a:defRPr>
             </a:pPr>
             <a:r>
-              <a:t>– can weight factors differently across regimes (factor-timing)</a:t>
+              <a:t>–  weights factors differently across regimes (factor-timing)</a:t>
             </a:r>
           </a:p>
           <a:p>
             <a:pPr>
               <a:spcAft>
-                <a:spcPts val="700"/>
+                <a:spcPts val="500"/>
               </a:spcAft>
-              <a:defRPr sz="2000">
+              <a:defRPr sz="1700" b="1">
                 <a:solidFill>
                   <a:srgbClr val="0B2A4A"/>
                 </a:solidFill>
               </a:defRPr>
             </a:pPr>
             <a:r>
-              <a:t>• Portfolio — benchmark-relative active weights (benchmark ± bounded tilt).</a:t>
-            </a:r>
-          </a:p>
-          <a:p>
-            <a:pPr lvl="1">
-              <a:spcAft>
-                <a:spcPts val="700"/>
-              </a:spcAft>
-              <a:defRPr sz="1700">
-                <a:solidFill>
-                  <a:srgbClr val="555B66"/>
-                </a:solidFill>
-              </a:defRPr>
-            </a:pPr>
-            <a:r>
-              <a:t>– volatility targeting, position caps, two-layer cost model</a:t>
+              <a:t>■  Portfolio — benchmark-relative active weights, vol targeting, position caps, 2-layer costs.</a:t>
             </a:r>
           </a:p>
           <a:p>
             <a:pPr>
               <a:spcAft>
-                <a:spcPts val="700"/>
+                <a:spcPts val="500"/>
               </a:spcAft>
-              <a:defRPr sz="2000">
+              <a:defRPr sz="1700" b="1">
                 <a:solidFill>
                   <a:srgbClr val="0B2A4A"/>
                 </a:solidFill>
               </a:defRPr>
             </a:pPr>
             <a:r>
-              <a:t>• Discipline: no look-ahead, 4-week macro lag, 4-week train/test embargo.</a:t>
-            </a:r>
-          </a:p>
-        </p:txBody>
-      </p:sp>
-      <p:sp>
-        <p:nvSpPr>
-          <p:cNvPr id="4" name="TextBox 3"/>
+              <a:t>■  Discipline — no look-ahead, 4-week macro lag, 4-week train/test embargo.</a:t>
+            </a:r>
+          </a:p>
+        </p:txBody>
+      </p:sp>
+      <p:sp>
+        <p:nvSpPr>
+          <p:cNvPr id="6" name="Rectangle 5"/>
+          <p:cNvSpPr/>
+          <p:nvPr/>
+        </p:nvSpPr>
+        <p:spPr>
+          <a:xfrm>
+            <a:off x="548640" y="5715000"/>
+            <a:ext cx="11091672" cy="566928"/>
+          </a:xfrm>
+          <a:prstGeom prst="rect">
+            <a:avLst/>
+          </a:prstGeom>
+          <a:solidFill>
+            <a:srgbClr val="ECF1F6"/>
+          </a:solidFill>
+          <a:ln>
+            <a:noFill/>
+          </a:ln>
+          <a:effectLst/>
+        </p:spPr>
+        <p:style>
+          <a:lnRef idx="1">
+            <a:schemeClr val="accent1"/>
+          </a:lnRef>
+          <a:fillRef idx="3">
+            <a:schemeClr val="accent1"/>
+          </a:fillRef>
+          <a:effectRef idx="2">
+            <a:schemeClr val="accent1"/>
+          </a:effectRef>
+          <a:fontRef idx="minor">
+            <a:schemeClr val="lt1"/>
+          </a:fontRef>
+        </p:style>
+        <p:txBody>
+          <a:bodyPr rtlCol="0" anchor="ctr"/>
+          <a:lstStyle/>
+          <a:p>
+            <a:pPr algn="ctr"/>
+          </a:p>
+        </p:txBody>
+      </p:sp>
+      <p:sp>
+        <p:nvSpPr>
+          <p:cNvPr id="7" name="TextBox 6"/>
           <p:cNvSpPr txBox="1"/>
           <p:nvPr/>
         </p:nvSpPr>
         <p:spPr>
           <a:xfrm>
-            <a:off x="822960" y="5897880"/>
-            <a:ext cx="10607040" cy="822960"/>
+            <a:off x="731520" y="5760720"/>
+            <a:ext cx="10789920" cy="502920"/>
           </a:xfrm>
           <a:prstGeom prst="rect">
             <a:avLst/>
@@ -4148,20 +5179,90 @@
           <a:noFill/>
         </p:spPr>
         <p:txBody>
+          <a:bodyPr wrap="square" anchor="ctr">
+            <a:spAutoFit/>
+          </a:bodyPr>
+          <a:lstStyle/>
+          <a:p>
+            <a:pPr>
+              <a:defRPr sz="1300" b="1">
+                <a:solidFill>
+                  <a:srgbClr val="1F6FB2"/>
+                </a:solidFill>
+              </a:defRPr>
+            </a:pPr>
+            <a:r>
+              <a:t>Takeaway:  M1 is simple on purpose; all dynamic / regime intelligence is isolated in M2.</a:t>
+            </a:r>
+          </a:p>
+        </p:txBody>
+      </p:sp>
+      <p:sp>
+        <p:nvSpPr>
+          <p:cNvPr id="8" name="TextBox 7"/>
+          <p:cNvSpPr txBox="1"/>
+          <p:nvPr/>
+        </p:nvSpPr>
+        <p:spPr>
+          <a:xfrm>
+            <a:off x="548640" y="6419088"/>
+            <a:ext cx="11155680" cy="320040"/>
+          </a:xfrm>
+          <a:prstGeom prst="rect">
+            <a:avLst/>
+          </a:prstGeom>
+          <a:noFill/>
+        </p:spPr>
+        <p:txBody>
           <a:bodyPr wrap="square">
             <a:spAutoFit/>
           </a:bodyPr>
           <a:lstStyle/>
           <a:p>
             <a:pPr>
-              <a:defRPr sz="1600" b="1" i="1">
-                <a:solidFill>
-                  <a:srgbClr val="1F6FB2"/>
+              <a:defRPr sz="900">
+                <a:solidFill>
+                  <a:srgbClr val="555B66"/>
                 </a:solidFill>
               </a:defRPr>
             </a:pPr>
             <a:r>
-              <a:t>Takeaway: M1 stays simple on purpose; all dynamic/regime intelligence is isolated in M2.</a:t>
+              <a:t>Multi-Asset Meta-Labeling  ·  June 18, 2026</a:t>
+            </a:r>
+          </a:p>
+        </p:txBody>
+      </p:sp>
+      <p:sp>
+        <p:nvSpPr>
+          <p:cNvPr id="9" name="TextBox 8"/>
+          <p:cNvSpPr txBox="1"/>
+          <p:nvPr/>
+        </p:nvSpPr>
+        <p:spPr>
+          <a:xfrm>
+            <a:off x="11338560" y="6419088"/>
+            <a:ext cx="640080" cy="320040"/>
+          </a:xfrm>
+          <a:prstGeom prst="rect">
+            <a:avLst/>
+          </a:prstGeom>
+          <a:noFill/>
+        </p:spPr>
+        <p:txBody>
+          <a:bodyPr wrap="square">
+            <a:spAutoFit/>
+          </a:bodyPr>
+          <a:lstStyle/>
+          <a:p>
+            <a:pPr>
+              <a:defRPr sz="900">
+                <a:solidFill>
+                  <a:srgbClr val="555B66"/>
+                </a:solidFill>
+              </a:defRPr>
+            </a:pPr>
+            <a:r>
+              <a:t>2</a:t>
             </a:r>
           </a:p>
         </p:txBody>
@@ -4186,14 +5287,58 @@
       <p:grpSpPr/>
       <p:sp>
         <p:nvSpPr>
-          <p:cNvPr id="2" name="TextBox 1"/>
+          <p:cNvPr id="2" name="Rectangle 1"/>
+          <p:cNvSpPr/>
+          <p:nvPr/>
+        </p:nvSpPr>
+        <p:spPr>
+          <a:xfrm>
+            <a:off x="0" y="0"/>
+            <a:ext cx="201168" cy="6858000"/>
+          </a:xfrm>
+          <a:prstGeom prst="rect">
+            <a:avLst/>
+          </a:prstGeom>
+          <a:solidFill>
+            <a:srgbClr val="0B2A4A"/>
+          </a:solidFill>
+          <a:ln>
+            <a:noFill/>
+          </a:ln>
+          <a:effectLst/>
+        </p:spPr>
+        <p:style>
+          <a:lnRef idx="1">
+            <a:schemeClr val="accent1"/>
+          </a:lnRef>
+          <a:fillRef idx="3">
+            <a:schemeClr val="accent1"/>
+          </a:fillRef>
+          <a:effectRef idx="2">
+            <a:schemeClr val="accent1"/>
+          </a:effectRef>
+          <a:fontRef idx="minor">
+            <a:schemeClr val="lt1"/>
+          </a:fontRef>
+        </p:style>
+        <p:txBody>
+          <a:bodyPr rtlCol="0" anchor="ctr"/>
+          <a:lstStyle/>
+          <a:p>
+            <a:pPr algn="ctr"/>
+          </a:p>
+        </p:txBody>
+      </p:sp>
+      <p:sp>
+        <p:nvSpPr>
+          <p:cNvPr id="3" name="TextBox 2"/>
           <p:cNvSpPr txBox="1"/>
           <p:nvPr/>
         </p:nvSpPr>
         <p:spPr>
           <a:xfrm>
-            <a:off x="640080" y="411480"/>
-            <a:ext cx="10972800" cy="914400"/>
+            <a:off x="548640" y="320040"/>
+            <a:ext cx="11338560" cy="822960"/>
           </a:xfrm>
           <a:prstGeom prst="rect">
             <a:avLst/>
@@ -4207,29 +5352,73 @@
           <a:lstStyle/>
           <a:p>
             <a:pPr>
-              <a:defRPr sz="3000" b="1">
+              <a:defRPr sz="2600" b="1">
                 <a:solidFill>
                   <a:srgbClr val="0B2A4A"/>
                 </a:solidFill>
               </a:defRPr>
             </a:pPr>
             <a:r>
-              <a:t>M1 — Static Directional Model (worked 3-asset example)</a:t>
-            </a:r>
+              <a:t>M1 — Static Directional Model: worked 3-asset example</a:t>
+            </a:r>
+          </a:p>
+        </p:txBody>
+      </p:sp>
+      <p:sp>
+        <p:nvSpPr>
+          <p:cNvPr id="4" name="Rectangle 3"/>
+          <p:cNvSpPr/>
+          <p:nvPr/>
+        </p:nvSpPr>
+        <p:spPr>
+          <a:xfrm>
+            <a:off x="566928" y="1078992"/>
+            <a:ext cx="3840480" cy="41148"/>
+          </a:xfrm>
+          <a:prstGeom prst="rect">
+            <a:avLst/>
+          </a:prstGeom>
+          <a:solidFill>
+            <a:srgbClr val="1F6FB2"/>
+          </a:solidFill>
+          <a:ln>
+            <a:noFill/>
+          </a:ln>
+          <a:effectLst/>
+        </p:spPr>
+        <p:style>
+          <a:lnRef idx="1">
+            <a:schemeClr val="accent1"/>
+          </a:lnRef>
+          <a:fillRef idx="3">
+            <a:schemeClr val="accent1"/>
+          </a:fillRef>
+          <a:effectRef idx="2">
+            <a:schemeClr val="accent1"/>
+          </a:effectRef>
+          <a:fontRef idx="minor">
+            <a:schemeClr val="lt1"/>
+          </a:fontRef>
+        </p:style>
+        <p:txBody>
+          <a:bodyPr rtlCol="0" anchor="ctr"/>
+          <a:lstStyle/>
+          <a:p>
+            <a:pPr algn="ctr"/>
           </a:p>
         </p:txBody>
       </p:sp>
       <p:graphicFrame>
         <p:nvGraphicFramePr>
-          <p:cNvPr id="3" name="Table 2"/>
+          <p:cNvPr id="5" name="Table 4"/>
           <p:cNvGraphicFramePr>
             <a:graphicFrameLocks noGrp="1"/>
           </p:cNvGraphicFramePr>
           <p:nvPr/>
         </p:nvGraphicFramePr>
         <p:xfrm>
-          <a:off x="731520" y="1554480"/>
-          <a:ext cx="10698480" cy="1463040"/>
+          <a:off x="640080" y="1371600"/>
+          <a:ext cx="10881360" cy="1243584"/>
         </p:xfrm>
         <a:graphic>
           <a:graphicData uri="http://schemas.openxmlformats.org/drawingml/2006/table">
@@ -4238,22 +5427,22 @@
                 <a:tableStyleId>{5C22544A-7EE6-4342-B048-85BDC9FD1C3A}</a:tableStyleId>
               </a:tblPr>
               <a:tblGrid>
-                <a:gridCol w="1528354"/>
-                <a:gridCol w="1528354"/>
-                <a:gridCol w="1528354"/>
-                <a:gridCol w="1528354"/>
-                <a:gridCol w="1528354"/>
-                <a:gridCol w="1528354"/>
-                <a:gridCol w="1528356"/>
+                <a:gridCol w="1554480"/>
+                <a:gridCol w="1554480"/>
+                <a:gridCol w="1554480"/>
+                <a:gridCol w="1554480"/>
+                <a:gridCol w="1554480"/>
+                <a:gridCol w="1554480"/>
+                <a:gridCol w="1554480"/>
               </a:tblGrid>
-              <a:tr h="365760">
-                <a:tc>
-                  <a:txBody>
-                    <a:bodyPr/>
-                    <a:lstStyle/>
-                    <a:p>
-                      <a:pPr>
-                        <a:defRPr sz="1500" b="1">
+              <a:tr h="310896">
+                <a:tc>
+                  <a:txBody>
+                    <a:bodyPr/>
+                    <a:lstStyle/>
+                    <a:p>
+                      <a:pPr>
+                        <a:defRPr sz="1300" b="1">
                           <a:solidFill>
                             <a:srgbClr val="FFFFFF"/>
                           </a:solidFill>
@@ -4276,7 +5465,7 @@
                     <a:lstStyle/>
                     <a:p>
                       <a:pPr>
-                        <a:defRPr sz="1500" b="1">
+                        <a:defRPr sz="1300" b="1">
                           <a:solidFill>
                             <a:srgbClr val="FFFFFF"/>
                           </a:solidFill>
@@ -4299,7 +5488,7 @@
                     <a:lstStyle/>
                     <a:p>
                       <a:pPr>
-                        <a:defRPr sz="1500" b="1">
+                        <a:defRPr sz="1300" b="1">
                           <a:solidFill>
                             <a:srgbClr val="FFFFFF"/>
                           </a:solidFill>
@@ -4322,7 +5511,7 @@
                     <a:lstStyle/>
                     <a:p>
                       <a:pPr>
-                        <a:defRPr sz="1500" b="1">
+                        <a:defRPr sz="1300" b="1">
                           <a:solidFill>
                             <a:srgbClr val="FFFFFF"/>
                           </a:solidFill>
@@ -4345,7 +5534,7 @@
                     <a:lstStyle/>
                     <a:p>
                       <a:pPr>
-                        <a:defRPr sz="1500" b="1">
+                        <a:defRPr sz="1300" b="1">
                           <a:solidFill>
                             <a:srgbClr val="FFFFFF"/>
                           </a:solidFill>
@@ -4368,14 +5557,14 @@
                     <a:lstStyle/>
                     <a:p>
                       <a:pPr>
-                        <a:defRPr sz="1500" b="1">
+                        <a:defRPr sz="1300" b="1">
                           <a:solidFill>
                             <a:srgbClr val="FFFFFF"/>
                           </a:solidFill>
                         </a:defRPr>
                       </a:pPr>
                       <a:r>
-                        <a:t>Tilt vs bench</a:t>
+                        <a:t>Tilt</a:t>
                       </a:r>
                     </a:p>
                   </a:txBody>
@@ -4391,7 +5580,7 @@
                     <a:lstStyle/>
                     <a:p>
                       <a:pPr>
-                        <a:defRPr sz="1500" b="1">
+                        <a:defRPr sz="1300" b="1">
                           <a:solidFill>
                             <a:srgbClr val="FFFFFF"/>
                           </a:solidFill>
@@ -4409,14 +5598,14 @@
                   </a:tcPr>
                 </a:tc>
               </a:tr>
-              <a:tr h="365760">
-                <a:tc>
-                  <a:txBody>
-                    <a:bodyPr/>
-                    <a:lstStyle/>
-                    <a:p>
-                      <a:pPr>
-                        <a:defRPr sz="1400" b="1">
+              <a:tr h="310896">
+                <a:tc>
+                  <a:txBody>
+                    <a:bodyPr/>
+                    <a:lstStyle/>
+                    <a:p>
+                      <a:pPr>
+                        <a:defRPr sz="1300" b="1">
                           <a:solidFill>
                             <a:srgbClr val="1F6FB2"/>
                           </a:solidFill>
@@ -4427,15 +5616,19 @@
                       </a:r>
                     </a:p>
                   </a:txBody>
-                  <a:tcPr/>
-                </a:tc>
-                <a:tc>
-                  <a:txBody>
-                    <a:bodyPr/>
-                    <a:lstStyle/>
-                    <a:p>
-                      <a:pPr>
-                        <a:defRPr sz="1400" b="1">
+                  <a:tcPr>
+                    <a:solidFill>
+                      <a:srgbClr val="ECF1F6"/>
+                    </a:solidFill>
+                  </a:tcPr>
+                </a:tc>
+                <a:tc>
+                  <a:txBody>
+                    <a:bodyPr/>
+                    <a:lstStyle/>
+                    <a:p>
+                      <a:pPr>
+                        <a:defRPr sz="1300" b="1">
                           <a:solidFill>
                             <a:srgbClr val="1F6FB2"/>
                           </a:solidFill>
@@ -4446,15 +5639,19 @@
                       </a:r>
                     </a:p>
                   </a:txBody>
-                  <a:tcPr/>
-                </a:tc>
-                <a:tc>
-                  <a:txBody>
-                    <a:bodyPr/>
-                    <a:lstStyle/>
-                    <a:p>
-                      <a:pPr>
-                        <a:defRPr sz="1400" b="1">
+                  <a:tcPr>
+                    <a:solidFill>
+                      <a:srgbClr val="ECF1F6"/>
+                    </a:solidFill>
+                  </a:tcPr>
+                </a:tc>
+                <a:tc>
+                  <a:txBody>
+                    <a:bodyPr/>
+                    <a:lstStyle/>
+                    <a:p>
+                      <a:pPr>
+                        <a:defRPr sz="1300" b="1">
                           <a:solidFill>
                             <a:srgbClr val="1F6FB2"/>
                           </a:solidFill>
@@ -4465,15 +5662,19 @@
                       </a:r>
                     </a:p>
                   </a:txBody>
-                  <a:tcPr/>
-                </a:tc>
-                <a:tc>
-                  <a:txBody>
-                    <a:bodyPr/>
-                    <a:lstStyle/>
-                    <a:p>
-                      <a:pPr>
-                        <a:defRPr sz="1400" b="1">
+                  <a:tcPr>
+                    <a:solidFill>
+                      <a:srgbClr val="ECF1F6"/>
+                    </a:solidFill>
+                  </a:tcPr>
+                </a:tc>
+                <a:tc>
+                  <a:txBody>
+                    <a:bodyPr/>
+                    <a:lstStyle/>
+                    <a:p>
+                      <a:pPr>
+                        <a:defRPr sz="1300" b="1">
                           <a:solidFill>
                             <a:srgbClr val="1F6FB2"/>
                           </a:solidFill>
@@ -4484,34 +5685,42 @@
                       </a:r>
                     </a:p>
                   </a:txBody>
-                  <a:tcPr/>
-                </a:tc>
-                <a:tc>
-                  <a:txBody>
-                    <a:bodyPr/>
-                    <a:lstStyle/>
-                    <a:p>
-                      <a:pPr>
-                        <a:defRPr sz="1400" b="1">
+                  <a:tcPr>
+                    <a:solidFill>
+                      <a:srgbClr val="ECF1F6"/>
+                    </a:solidFill>
+                  </a:tcPr>
+                </a:tc>
+                <a:tc>
+                  <a:txBody>
+                    <a:bodyPr/>
+                    <a:lstStyle/>
+                    <a:p>
+                      <a:pPr>
+                        <a:defRPr sz="1300" b="1">
                           <a:solidFill>
                             <a:srgbClr val="1F6FB2"/>
                           </a:solidFill>
                         </a:defRPr>
                       </a:pPr>
                       <a:r>
-                        <a:t>3 (best)</a:t>
-                      </a:r>
-                    </a:p>
-                  </a:txBody>
-                  <a:tcPr/>
-                </a:tc>
-                <a:tc>
-                  <a:txBody>
-                    <a:bodyPr/>
-                    <a:lstStyle/>
-                    <a:p>
-                      <a:pPr>
-                        <a:defRPr sz="1400" b="1">
+                        <a:t>best</a:t>
+                      </a:r>
+                    </a:p>
+                  </a:txBody>
+                  <a:tcPr>
+                    <a:solidFill>
+                      <a:srgbClr val="ECF1F6"/>
+                    </a:solidFill>
+                  </a:tcPr>
+                </a:tc>
+                <a:tc>
+                  <a:txBody>
+                    <a:bodyPr/>
+                    <a:lstStyle/>
+                    <a:p>
+                      <a:pPr>
+                        <a:defRPr sz="1300" b="1">
                           <a:solidFill>
                             <a:srgbClr val="1F6FB2"/>
                           </a:solidFill>
@@ -4522,15 +5731,19 @@
                       </a:r>
                     </a:p>
                   </a:txBody>
-                  <a:tcPr/>
-                </a:tc>
-                <a:tc>
-                  <a:txBody>
-                    <a:bodyPr/>
-                    <a:lstStyle/>
-                    <a:p>
-                      <a:pPr>
-                        <a:defRPr sz="1400" b="1">
+                  <a:tcPr>
+                    <a:solidFill>
+                      <a:srgbClr val="ECF1F6"/>
+                    </a:solidFill>
+                  </a:tcPr>
+                </a:tc>
+                <a:tc>
+                  <a:txBody>
+                    <a:bodyPr/>
+                    <a:lstStyle/>
+                    <a:p>
+                      <a:pPr>
+                        <a:defRPr sz="1300" b="1">
                           <a:solidFill>
                             <a:srgbClr val="1F6FB2"/>
                           </a:solidFill>
@@ -4541,17 +5754,21 @@
                       </a:r>
                     </a:p>
                   </a:txBody>
-                  <a:tcPr/>
+                  <a:tcPr>
+                    <a:solidFill>
+                      <a:srgbClr val="ECF1F6"/>
+                    </a:solidFill>
+                  </a:tcPr>
                 </a:tc>
               </a:tr>
-              <a:tr h="365760">
-                <a:tc>
-                  <a:txBody>
-                    <a:bodyPr/>
-                    <a:lstStyle/>
-                    <a:p>
-                      <a:pPr>
-                        <a:defRPr sz="1400" b="0">
+              <a:tr h="310896">
+                <a:tc>
+                  <a:txBody>
+                    <a:bodyPr/>
+                    <a:lstStyle/>
+                    <a:p>
+                      <a:pPr>
+                        <a:defRPr sz="1300" b="0">
                           <a:solidFill>
                             <a:srgbClr val="0B2A4A"/>
                           </a:solidFill>
@@ -4562,15 +5779,19 @@
                       </a:r>
                     </a:p>
                   </a:txBody>
-                  <a:tcPr/>
-                </a:tc>
-                <a:tc>
-                  <a:txBody>
-                    <a:bodyPr/>
-                    <a:lstStyle/>
-                    <a:p>
-                      <a:pPr>
-                        <a:defRPr sz="1400" b="0">
+                  <a:tcPr>
+                    <a:solidFill>
+                      <a:srgbClr val="FFFFFF"/>
+                    </a:solidFill>
+                  </a:tcPr>
+                </a:tc>
+                <a:tc>
+                  <a:txBody>
+                    <a:bodyPr/>
+                    <a:lstStyle/>
+                    <a:p>
+                      <a:pPr>
+                        <a:defRPr sz="1300" b="0">
                           <a:solidFill>
                             <a:srgbClr val="0B2A4A"/>
                           </a:solidFill>
@@ -4581,15 +5802,19 @@
                       </a:r>
                     </a:p>
                   </a:txBody>
-                  <a:tcPr/>
-                </a:tc>
-                <a:tc>
-                  <a:txBody>
-                    <a:bodyPr/>
-                    <a:lstStyle/>
-                    <a:p>
-                      <a:pPr>
-                        <a:defRPr sz="1400" b="0">
+                  <a:tcPr>
+                    <a:solidFill>
+                      <a:srgbClr val="FFFFFF"/>
+                    </a:solidFill>
+                  </a:tcPr>
+                </a:tc>
+                <a:tc>
+                  <a:txBody>
+                    <a:bodyPr/>
+                    <a:lstStyle/>
+                    <a:p>
+                      <a:pPr>
+                        <a:defRPr sz="1300" b="0">
                           <a:solidFill>
                             <a:srgbClr val="0B2A4A"/>
                           </a:solidFill>
@@ -4600,15 +5825,19 @@
                       </a:r>
                     </a:p>
                   </a:txBody>
-                  <a:tcPr/>
-                </a:tc>
-                <a:tc>
-                  <a:txBody>
-                    <a:bodyPr/>
-                    <a:lstStyle/>
-                    <a:p>
-                      <a:pPr>
-                        <a:defRPr sz="1400" b="0">
+                  <a:tcPr>
+                    <a:solidFill>
+                      <a:srgbClr val="FFFFFF"/>
+                    </a:solidFill>
+                  </a:tcPr>
+                </a:tc>
+                <a:tc>
+                  <a:txBody>
+                    <a:bodyPr/>
+                    <a:lstStyle/>
+                    <a:p>
+                      <a:pPr>
+                        <a:defRPr sz="1300" b="0">
                           <a:solidFill>
                             <a:srgbClr val="0B2A4A"/>
                           </a:solidFill>
@@ -4619,34 +5848,42 @@
                       </a:r>
                     </a:p>
                   </a:txBody>
-                  <a:tcPr/>
-                </a:tc>
-                <a:tc>
-                  <a:txBody>
-                    <a:bodyPr/>
-                    <a:lstStyle/>
-                    <a:p>
-                      <a:pPr>
-                        <a:defRPr sz="1400" b="0">
+                  <a:tcPr>
+                    <a:solidFill>
+                      <a:srgbClr val="FFFFFF"/>
+                    </a:solidFill>
+                  </a:tcPr>
+                </a:tc>
+                <a:tc>
+                  <a:txBody>
+                    <a:bodyPr/>
+                    <a:lstStyle/>
+                    <a:p>
+                      <a:pPr>
+                        <a:defRPr sz="1300" b="0">
                           <a:solidFill>
                             <a:srgbClr val="0B2A4A"/>
                           </a:solidFill>
                         </a:defRPr>
                       </a:pPr>
                       <a:r>
-                        <a:t>2</a:t>
-                      </a:r>
-                    </a:p>
-                  </a:txBody>
-                  <a:tcPr/>
-                </a:tc>
-                <a:tc>
-                  <a:txBody>
-                    <a:bodyPr/>
-                    <a:lstStyle/>
-                    <a:p>
-                      <a:pPr>
-                        <a:defRPr sz="1400" b="0">
+                        <a:t>mid</a:t>
+                      </a:r>
+                    </a:p>
+                  </a:txBody>
+                  <a:tcPr>
+                    <a:solidFill>
+                      <a:srgbClr val="FFFFFF"/>
+                    </a:solidFill>
+                  </a:tcPr>
+                </a:tc>
+                <a:tc>
+                  <a:txBody>
+                    <a:bodyPr/>
+                    <a:lstStyle/>
+                    <a:p>
+                      <a:pPr>
+                        <a:defRPr sz="1300" b="0">
                           <a:solidFill>
                             <a:srgbClr val="0B2A4A"/>
                           </a:solidFill>
@@ -4657,15 +5894,19 @@
                       </a:r>
                     </a:p>
                   </a:txBody>
-                  <a:tcPr/>
-                </a:tc>
-                <a:tc>
-                  <a:txBody>
-                    <a:bodyPr/>
-                    <a:lstStyle/>
-                    <a:p>
-                      <a:pPr>
-                        <a:defRPr sz="1400" b="0">
+                  <a:tcPr>
+                    <a:solidFill>
+                      <a:srgbClr val="FFFFFF"/>
+                    </a:solidFill>
+                  </a:tcPr>
+                </a:tc>
+                <a:tc>
+                  <a:txBody>
+                    <a:bodyPr/>
+                    <a:lstStyle/>
+                    <a:p>
+                      <a:pPr>
+                        <a:defRPr sz="1300" b="0">
                           <a:solidFill>
                             <a:srgbClr val="0B2A4A"/>
                           </a:solidFill>
@@ -4676,17 +5917,21 @@
                       </a:r>
                     </a:p>
                   </a:txBody>
-                  <a:tcPr/>
+                  <a:tcPr>
+                    <a:solidFill>
+                      <a:srgbClr val="FFFFFF"/>
+                    </a:solidFill>
+                  </a:tcPr>
                 </a:tc>
               </a:tr>
-              <a:tr h="365760">
-                <a:tc>
-                  <a:txBody>
-                    <a:bodyPr/>
-                    <a:lstStyle/>
-                    <a:p>
-                      <a:pPr>
-                        <a:defRPr sz="1400" b="0">
+              <a:tr h="310896">
+                <a:tc>
+                  <a:txBody>
+                    <a:bodyPr/>
+                    <a:lstStyle/>
+                    <a:p>
+                      <a:pPr>
+                        <a:defRPr sz="1300" b="0">
                           <a:solidFill>
                             <a:srgbClr val="0B2A4A"/>
                           </a:solidFill>
@@ -4697,15 +5942,19 @@
                       </a:r>
                     </a:p>
                   </a:txBody>
-                  <a:tcPr/>
-                </a:tc>
-                <a:tc>
-                  <a:txBody>
-                    <a:bodyPr/>
-                    <a:lstStyle/>
-                    <a:p>
-                      <a:pPr>
-                        <a:defRPr sz="1400" b="0">
+                  <a:tcPr>
+                    <a:solidFill>
+                      <a:srgbClr val="FFFFFF"/>
+                    </a:solidFill>
+                  </a:tcPr>
+                </a:tc>
+                <a:tc>
+                  <a:txBody>
+                    <a:bodyPr/>
+                    <a:lstStyle/>
+                    <a:p>
+                      <a:pPr>
+                        <a:defRPr sz="1300" b="0">
                           <a:solidFill>
                             <a:srgbClr val="0B2A4A"/>
                           </a:solidFill>
@@ -4716,15 +5965,19 @@
                       </a:r>
                     </a:p>
                   </a:txBody>
-                  <a:tcPr/>
-                </a:tc>
-                <a:tc>
-                  <a:txBody>
-                    <a:bodyPr/>
-                    <a:lstStyle/>
-                    <a:p>
-                      <a:pPr>
-                        <a:defRPr sz="1400" b="0">
+                  <a:tcPr>
+                    <a:solidFill>
+                      <a:srgbClr val="FFFFFF"/>
+                    </a:solidFill>
+                  </a:tcPr>
+                </a:tc>
+                <a:tc>
+                  <a:txBody>
+                    <a:bodyPr/>
+                    <a:lstStyle/>
+                    <a:p>
+                      <a:pPr>
+                        <a:defRPr sz="1300" b="0">
                           <a:solidFill>
                             <a:srgbClr val="0B2A4A"/>
                           </a:solidFill>
@@ -4735,15 +5988,19 @@
                       </a:r>
                     </a:p>
                   </a:txBody>
-                  <a:tcPr/>
-                </a:tc>
-                <a:tc>
-                  <a:txBody>
-                    <a:bodyPr/>
-                    <a:lstStyle/>
-                    <a:p>
-                      <a:pPr>
-                        <a:defRPr sz="1400" b="0">
+                  <a:tcPr>
+                    <a:solidFill>
+                      <a:srgbClr val="FFFFFF"/>
+                    </a:solidFill>
+                  </a:tcPr>
+                </a:tc>
+                <a:tc>
+                  <a:txBody>
+                    <a:bodyPr/>
+                    <a:lstStyle/>
+                    <a:p>
+                      <a:pPr>
+                        <a:defRPr sz="1300" b="0">
                           <a:solidFill>
                             <a:srgbClr val="0B2A4A"/>
                           </a:solidFill>
@@ -4754,34 +6011,42 @@
                       </a:r>
                     </a:p>
                   </a:txBody>
-                  <a:tcPr/>
-                </a:tc>
-                <a:tc>
-                  <a:txBody>
-                    <a:bodyPr/>
-                    <a:lstStyle/>
-                    <a:p>
-                      <a:pPr>
-                        <a:defRPr sz="1400" b="0">
+                  <a:tcPr>
+                    <a:solidFill>
+                      <a:srgbClr val="FFFFFF"/>
+                    </a:solidFill>
+                  </a:tcPr>
+                </a:tc>
+                <a:tc>
+                  <a:txBody>
+                    <a:bodyPr/>
+                    <a:lstStyle/>
+                    <a:p>
+                      <a:pPr>
+                        <a:defRPr sz="1300" b="0">
                           <a:solidFill>
                             <a:srgbClr val="0B2A4A"/>
                           </a:solidFill>
                         </a:defRPr>
                       </a:pPr>
                       <a:r>
-                        <a:t>1 (worst)</a:t>
-                      </a:r>
-                    </a:p>
-                  </a:txBody>
-                  <a:tcPr/>
-                </a:tc>
-                <a:tc>
-                  <a:txBody>
-                    <a:bodyPr/>
-                    <a:lstStyle/>
-                    <a:p>
-                      <a:pPr>
-                        <a:defRPr sz="1400" b="0">
+                        <a:t>worst</a:t>
+                      </a:r>
+                    </a:p>
+                  </a:txBody>
+                  <a:tcPr>
+                    <a:solidFill>
+                      <a:srgbClr val="FFFFFF"/>
+                    </a:solidFill>
+                  </a:tcPr>
+                </a:tc>
+                <a:tc>
+                  <a:txBody>
+                    <a:bodyPr/>
+                    <a:lstStyle/>
+                    <a:p>
+                      <a:pPr>
+                        <a:defRPr sz="1300" b="0">
                           <a:solidFill>
                             <a:srgbClr val="0B2A4A"/>
                           </a:solidFill>
@@ -4792,15 +6057,19 @@
                       </a:r>
                     </a:p>
                   </a:txBody>
-                  <a:tcPr/>
-                </a:tc>
-                <a:tc>
-                  <a:txBody>
-                    <a:bodyPr/>
-                    <a:lstStyle/>
-                    <a:p>
-                      <a:pPr>
-                        <a:defRPr sz="1400" b="0">
+                  <a:tcPr>
+                    <a:solidFill>
+                      <a:srgbClr val="FFFFFF"/>
+                    </a:solidFill>
+                  </a:tcPr>
+                </a:tc>
+                <a:tc>
+                  <a:txBody>
+                    <a:bodyPr/>
+                    <a:lstStyle/>
+                    <a:p>
+                      <a:pPr>
+                        <a:defRPr sz="1300" b="0">
                           <a:solidFill>
                             <a:srgbClr val="0B2A4A"/>
                           </a:solidFill>
@@ -4811,7 +6080,11 @@
                       </a:r>
                     </a:p>
                   </a:txBody>
-                  <a:tcPr/>
+                  <a:tcPr>
+                    <a:solidFill>
+                      <a:srgbClr val="FFFFFF"/>
+                    </a:solidFill>
+                  </a:tcPr>
                 </a:tc>
               </a:tr>
             </a:tbl>
@@ -4820,14 +6093,58 @@
       </p:graphicFrame>
       <p:sp>
         <p:nvSpPr>
-          <p:cNvPr id="4" name="TextBox 3"/>
+          <p:cNvPr id="6" name="Rectangle 5"/>
+          <p:cNvSpPr/>
+          <p:nvPr/>
+        </p:nvSpPr>
+        <p:spPr>
+          <a:xfrm>
+            <a:off x="548640" y="2843784"/>
+            <a:ext cx="11091672" cy="914400"/>
+          </a:xfrm>
+          <a:prstGeom prst="rect">
+            <a:avLst/>
+          </a:prstGeom>
+          <a:solidFill>
+            <a:srgbClr val="ECF1F6"/>
+          </a:solidFill>
+          <a:ln>
+            <a:noFill/>
+          </a:ln>
+          <a:effectLst/>
+        </p:spPr>
+        <p:style>
+          <a:lnRef idx="1">
+            <a:schemeClr val="accent1"/>
+          </a:lnRef>
+          <a:fillRef idx="3">
+            <a:schemeClr val="accent1"/>
+          </a:fillRef>
+          <a:effectRef idx="2">
+            <a:schemeClr val="accent1"/>
+          </a:effectRef>
+          <a:fontRef idx="minor">
+            <a:schemeClr val="lt1"/>
+          </a:fontRef>
+        </p:style>
+        <p:txBody>
+          <a:bodyPr rtlCol="0" anchor="ctr"/>
+          <a:lstStyle/>
+          <a:p>
+            <a:pPr algn="ctr"/>
+          </a:p>
+        </p:txBody>
+      </p:sp>
+      <p:sp>
+        <p:nvSpPr>
+          <p:cNvPr id="7" name="TextBox 6"/>
           <p:cNvSpPr txBox="1"/>
           <p:nvPr/>
         </p:nvSpPr>
         <p:spPr>
           <a:xfrm>
-            <a:off x="822960" y="3337560"/>
-            <a:ext cx="10607040" cy="1280160"/>
+            <a:off x="731520" y="2898648"/>
+            <a:ext cx="10789920" cy="822960"/>
           </a:xfrm>
           <a:prstGeom prst="rect">
             <a:avLst/>
@@ -4835,20 +6152,90 @@
           <a:noFill/>
         </p:spPr>
         <p:txBody>
+          <a:bodyPr wrap="square" anchor="ctr">
+            <a:spAutoFit/>
+          </a:bodyPr>
+          <a:lstStyle/>
+          <a:p>
+            <a:pPr>
+              <a:defRPr sz="1300" i="1">
+                <a:solidFill>
+                  <a:srgbClr val="1F6FB2"/>
+                </a:solidFill>
+              </a:defRPr>
+            </a:pPr>
+            <a:r>
+              <a:t>What it means:  Score each factor, z-score across assets, rank, then tilt around the 1/7 benchmark. An underweight is an implicit short — no outright shorting needed.</a:t>
+            </a:r>
+          </a:p>
+        </p:txBody>
+      </p:sp>
+      <p:sp>
+        <p:nvSpPr>
+          <p:cNvPr id="8" name="TextBox 7"/>
+          <p:cNvSpPr txBox="1"/>
+          <p:nvPr/>
+        </p:nvSpPr>
+        <p:spPr>
+          <a:xfrm>
+            <a:off x="548640" y="6419088"/>
+            <a:ext cx="11155680" cy="320040"/>
+          </a:xfrm>
+          <a:prstGeom prst="rect">
+            <a:avLst/>
+          </a:prstGeom>
+          <a:noFill/>
+        </p:spPr>
+        <p:txBody>
           <a:bodyPr wrap="square">
             <a:spAutoFit/>
           </a:bodyPr>
           <a:lstStyle/>
           <a:p>
             <a:pPr>
-              <a:defRPr sz="1600" i="1">
-                <a:solidFill>
-                  <a:srgbClr val="1F6FB2"/>
+              <a:defRPr sz="900">
+                <a:solidFill>
+                  <a:srgbClr val="555B66"/>
                 </a:solidFill>
               </a:defRPr>
             </a:pPr>
             <a:r>
-              <a:t>What it means: Score each factor -&gt; z-score across assets -&gt; rank -&gt; tilt around the 1/7 benchmark. An underweight is an implicit short, so no outright shorting is needed.</a:t>
+              <a:t>Multi-Asset Meta-Labeling  ·  June 18, 2026</a:t>
+            </a:r>
+          </a:p>
+        </p:txBody>
+      </p:sp>
+      <p:sp>
+        <p:nvSpPr>
+          <p:cNvPr id="9" name="TextBox 8"/>
+          <p:cNvSpPr txBox="1"/>
+          <p:nvPr/>
+        </p:nvSpPr>
+        <p:spPr>
+          <a:xfrm>
+            <a:off x="11338560" y="6419088"/>
+            <a:ext cx="640080" cy="320040"/>
+          </a:xfrm>
+          <a:prstGeom prst="rect">
+            <a:avLst/>
+          </a:prstGeom>
+          <a:noFill/>
+        </p:spPr>
+        <p:txBody>
+          <a:bodyPr wrap="square">
+            <a:spAutoFit/>
+          </a:bodyPr>
+          <a:lstStyle/>
+          <a:p>
+            <a:pPr>
+              <a:defRPr sz="900">
+                <a:solidFill>
+                  <a:srgbClr val="555B66"/>
+                </a:solidFill>
+              </a:defRPr>
+            </a:pPr>
+            <a:r>
+              <a:t>3</a:t>
             </a:r>
           </a:p>
         </p:txBody>
@@ -4873,14 +6260,58 @@
       <p:grpSpPr/>
       <p:sp>
         <p:nvSpPr>
-          <p:cNvPr id="2" name="TextBox 1"/>
+          <p:cNvPr id="2" name="Rectangle 1"/>
+          <p:cNvSpPr/>
+          <p:nvPr/>
+        </p:nvSpPr>
+        <p:spPr>
+          <a:xfrm>
+            <a:off x="0" y="0"/>
+            <a:ext cx="201168" cy="6858000"/>
+          </a:xfrm>
+          <a:prstGeom prst="rect">
+            <a:avLst/>
+          </a:prstGeom>
+          <a:solidFill>
+            <a:srgbClr val="0B2A4A"/>
+          </a:solidFill>
+          <a:ln>
+            <a:noFill/>
+          </a:ln>
+          <a:effectLst/>
+        </p:spPr>
+        <p:style>
+          <a:lnRef idx="1">
+            <a:schemeClr val="accent1"/>
+          </a:lnRef>
+          <a:fillRef idx="3">
+            <a:schemeClr val="accent1"/>
+          </a:fillRef>
+          <a:effectRef idx="2">
+            <a:schemeClr val="accent1"/>
+          </a:effectRef>
+          <a:fontRef idx="minor">
+            <a:schemeClr val="lt1"/>
+          </a:fontRef>
+        </p:style>
+        <p:txBody>
+          <a:bodyPr rtlCol="0" anchor="ctr"/>
+          <a:lstStyle/>
+          <a:p>
+            <a:pPr algn="ctr"/>
+          </a:p>
+        </p:txBody>
+      </p:sp>
+      <p:sp>
+        <p:nvSpPr>
+          <p:cNvPr id="3" name="TextBox 2"/>
           <p:cNvSpPr txBox="1"/>
           <p:nvPr/>
         </p:nvSpPr>
         <p:spPr>
           <a:xfrm>
-            <a:off x="640080" y="411480"/>
-            <a:ext cx="10972800" cy="914400"/>
+            <a:off x="548640" y="320040"/>
+            <a:ext cx="11338560" cy="822960"/>
           </a:xfrm>
           <a:prstGeom prst="rect">
             <a:avLst/>
@@ -4894,7 +6325,7 @@
           <a:lstStyle/>
           <a:p>
             <a:pPr>
-              <a:defRPr sz="3000" b="1">
+              <a:defRPr sz="2600" b="1">
                 <a:solidFill>
                   <a:srgbClr val="0B2A4A"/>
                 </a:solidFill>
@@ -4908,14 +6339,58 @@
       </p:sp>
       <p:sp>
         <p:nvSpPr>
-          <p:cNvPr id="3" name="TextBox 2"/>
+          <p:cNvPr id="4" name="Rectangle 3"/>
+          <p:cNvSpPr/>
+          <p:nvPr/>
+        </p:nvSpPr>
+        <p:spPr>
+          <a:xfrm>
+            <a:off x="566928" y="1078992"/>
+            <a:ext cx="3840480" cy="41148"/>
+          </a:xfrm>
+          <a:prstGeom prst="rect">
+            <a:avLst/>
+          </a:prstGeom>
+          <a:solidFill>
+            <a:srgbClr val="1F6FB2"/>
+          </a:solidFill>
+          <a:ln>
+            <a:noFill/>
+          </a:ln>
+          <a:effectLst/>
+        </p:spPr>
+        <p:style>
+          <a:lnRef idx="1">
+            <a:schemeClr val="accent1"/>
+          </a:lnRef>
+          <a:fillRef idx="3">
+            <a:schemeClr val="accent1"/>
+          </a:fillRef>
+          <a:effectRef idx="2">
+            <a:schemeClr val="accent1"/>
+          </a:effectRef>
+          <a:fontRef idx="minor">
+            <a:schemeClr val="lt1"/>
+          </a:fontRef>
+        </p:style>
+        <p:txBody>
+          <a:bodyPr rtlCol="0" anchor="ctr"/>
+          <a:lstStyle/>
+          <a:p>
+            <a:pPr algn="ctr"/>
+          </a:p>
+        </p:txBody>
+      </p:sp>
+      <p:sp>
+        <p:nvSpPr>
+          <p:cNvPr id="5" name="TextBox 4"/>
           <p:cNvSpPr txBox="1"/>
           <p:nvPr/>
         </p:nvSpPr>
         <p:spPr>
           <a:xfrm>
-            <a:off x="822960" y="1463040"/>
-            <a:ext cx="10607040" cy="4206240"/>
+            <a:off x="640080" y="1325880"/>
+            <a:ext cx="10972800" cy="4297680"/>
           </a:xfrm>
           <a:prstGeom prst="rect">
             <a:avLst/>
@@ -4930,90 +6405,134 @@
           <a:p>
             <a:pPr>
               <a:spcAft>
-                <a:spcPts val="700"/>
+                <a:spcPts val="500"/>
               </a:spcAft>
-              <a:defRPr sz="2000">
+              <a:defRPr sz="1700" b="1">
                 <a:solidFill>
                   <a:srgbClr val="0B2A4A"/>
                 </a:solidFill>
               </a:defRPr>
             </a:pPr>
             <a:r>
-              <a:t>• Target: did M1's benchmark-relative bet pay over the next 4 weeks?</a:t>
+              <a:t>■  Target — did M1's benchmark-relative bet pay over the next 4 weeks?</a:t>
             </a:r>
           </a:p>
           <a:p>
             <a:pPr>
               <a:spcAft>
-                <a:spcPts val="700"/>
+                <a:spcPts val="500"/>
               </a:spcAft>
-              <a:defRPr sz="2000">
+              <a:defRPr sz="1700" b="1">
                 <a:solidFill>
                   <a:srgbClr val="0B2A4A"/>
                 </a:solidFill>
               </a:defRPr>
             </a:pPr>
             <a:r>
-              <a:t>• Model: logistic regression (kept simple by design), refit on a rolling ~12-month window.</a:t>
+              <a:t>■  Model — logistic regression (simple by design), refit on a rolling ~12-month window.</a:t>
             </a:r>
           </a:p>
           <a:p>
             <a:pPr>
               <a:spcAft>
-                <a:spcPts val="700"/>
+                <a:spcPts val="500"/>
               </a:spcAft>
-              <a:defRPr sz="2000">
+              <a:defRPr sz="1700" b="1">
                 <a:solidFill>
                   <a:srgbClr val="0B2A4A"/>
                 </a:solidFill>
               </a:defRPr>
             </a:pPr>
             <a:r>
-              <a:t>• Features: momentum, trend, macro, volatility (each separate) + regime (VIX, curve, credit, growth, inflation).</a:t>
+              <a:t>■  Features — momentum, trend, macro, volatility (each separate) + regime (VIX, curve, credit, growth, inflation).</a:t>
             </a:r>
           </a:p>
           <a:p>
             <a:pPr>
               <a:spcAft>
-                <a:spcPts val="700"/>
+                <a:spcPts val="500"/>
               </a:spcAft>
-              <a:defRPr sz="2000">
+              <a:defRPr sz="1700" b="1">
                 <a:solidFill>
                   <a:srgbClr val="0B2A4A"/>
                 </a:solidFill>
               </a:defRPr>
             </a:pPr>
             <a:r>
-              <a:t>• Output: P(success) -&gt; a sizing multiplier on the M1 tilt.</a:t>
+              <a:t>■  Output — P(success), converted into a sizing multiplier on the M1 tilt.</a:t>
             </a:r>
           </a:p>
           <a:p>
             <a:pPr>
               <a:spcAft>
-                <a:spcPts val="700"/>
+                <a:spcPts val="500"/>
               </a:spcAft>
-              <a:defRPr sz="2000">
+              <a:defRPr sz="1700" b="1">
                 <a:solidFill>
                   <a:srgbClr val="0B2A4A"/>
                 </a:solidFill>
               </a:defRPr>
             </a:pPr>
             <a:r>
-              <a:t>• Evaluated with multiple methods, not just accuracy: F1, AUC-ROC, AUC-PR, calibration.</a:t>
-            </a:r>
-          </a:p>
-        </p:txBody>
-      </p:sp>
-      <p:sp>
-        <p:nvSpPr>
-          <p:cNvPr id="4" name="TextBox 3"/>
+              <a:t>■  Evaluated with multiple methods — F1, AUC-ROC, AUC-PR, calibration — not just accuracy.</a:t>
+            </a:r>
+          </a:p>
+        </p:txBody>
+      </p:sp>
+      <p:sp>
+        <p:nvSpPr>
+          <p:cNvPr id="6" name="Rectangle 5"/>
+          <p:cNvSpPr/>
+          <p:nvPr/>
+        </p:nvSpPr>
+        <p:spPr>
+          <a:xfrm>
+            <a:off x="548640" y="5715000"/>
+            <a:ext cx="11091672" cy="566928"/>
+          </a:xfrm>
+          <a:prstGeom prst="rect">
+            <a:avLst/>
+          </a:prstGeom>
+          <a:solidFill>
+            <a:srgbClr val="ECF1F6"/>
+          </a:solidFill>
+          <a:ln>
+            <a:noFill/>
+          </a:ln>
+          <a:effectLst/>
+        </p:spPr>
+        <p:style>
+          <a:lnRef idx="1">
+            <a:schemeClr val="accent1"/>
+          </a:lnRef>
+          <a:fillRef idx="3">
+            <a:schemeClr val="accent1"/>
+          </a:fillRef>
+          <a:effectRef idx="2">
+            <a:schemeClr val="accent1"/>
+          </a:effectRef>
+          <a:fontRef idx="minor">
+            <a:schemeClr val="lt1"/>
+          </a:fontRef>
+        </p:style>
+        <p:txBody>
+          <a:bodyPr rtlCol="0" anchor="ctr"/>
+          <a:lstStyle/>
+          <a:p>
+            <a:pPr algn="ctr"/>
+          </a:p>
+        </p:txBody>
+      </p:sp>
+      <p:sp>
+        <p:nvSpPr>
+          <p:cNvPr id="7" name="TextBox 6"/>
           <p:cNvSpPr txBox="1"/>
           <p:nvPr/>
         </p:nvSpPr>
         <p:spPr>
           <a:xfrm>
-            <a:off x="822960" y="5897880"/>
-            <a:ext cx="10607040" cy="822960"/>
+            <a:off x="731520" y="5760720"/>
+            <a:ext cx="10789920" cy="502920"/>
           </a:xfrm>
           <a:prstGeom prst="rect">
             <a:avLst/>
@@ -5021,20 +6540,90 @@
           <a:noFill/>
         </p:spPr>
         <p:txBody>
+          <a:bodyPr wrap="square" anchor="ctr">
+            <a:spAutoFit/>
+          </a:bodyPr>
+          <a:lstStyle/>
+          <a:p>
+            <a:pPr>
+              <a:defRPr sz="1300" b="1">
+                <a:solidFill>
+                  <a:srgbClr val="1F6FB2"/>
+                </a:solidFill>
+              </a:defRPr>
+            </a:pPr>
+            <a:r>
+              <a:t>Takeaway:  M2 is where 'which factor works in which regime' is meant to be learned.</a:t>
+            </a:r>
+          </a:p>
+        </p:txBody>
+      </p:sp>
+      <p:sp>
+        <p:nvSpPr>
+          <p:cNvPr id="8" name="TextBox 7"/>
+          <p:cNvSpPr txBox="1"/>
+          <p:nvPr/>
+        </p:nvSpPr>
+        <p:spPr>
+          <a:xfrm>
+            <a:off x="548640" y="6419088"/>
+            <a:ext cx="11155680" cy="320040"/>
+          </a:xfrm>
+          <a:prstGeom prst="rect">
+            <a:avLst/>
+          </a:prstGeom>
+          <a:noFill/>
+        </p:spPr>
+        <p:txBody>
           <a:bodyPr wrap="square">
             <a:spAutoFit/>
           </a:bodyPr>
           <a:lstStyle/>
           <a:p>
             <a:pPr>
-              <a:defRPr sz="1600" b="1" i="1">
-                <a:solidFill>
-                  <a:srgbClr val="1F6FB2"/>
+              <a:defRPr sz="900">
+                <a:solidFill>
+                  <a:srgbClr val="555B66"/>
                 </a:solidFill>
               </a:defRPr>
             </a:pPr>
             <a:r>
-              <a:t>Takeaway: M2 is where 'which factor works in which regime' is meant to be learned.</a:t>
+              <a:t>Multi-Asset Meta-Labeling  ·  June 18, 2026</a:t>
+            </a:r>
+          </a:p>
+        </p:txBody>
+      </p:sp>
+      <p:sp>
+        <p:nvSpPr>
+          <p:cNvPr id="9" name="TextBox 8"/>
+          <p:cNvSpPr txBox="1"/>
+          <p:nvPr/>
+        </p:nvSpPr>
+        <p:spPr>
+          <a:xfrm>
+            <a:off x="11338560" y="6419088"/>
+            <a:ext cx="640080" cy="320040"/>
+          </a:xfrm>
+          <a:prstGeom prst="rect">
+            <a:avLst/>
+          </a:prstGeom>
+          <a:noFill/>
+        </p:spPr>
+        <p:txBody>
+          <a:bodyPr wrap="square">
+            <a:spAutoFit/>
+          </a:bodyPr>
+          <a:lstStyle/>
+          <a:p>
+            <a:pPr>
+              <a:defRPr sz="900">
+                <a:solidFill>
+                  <a:srgbClr val="555B66"/>
+                </a:solidFill>
+              </a:defRPr>
+            </a:pPr>
+            <a:r>
+              <a:t>4</a:t>
             </a:r>
           </a:p>
         </p:txBody>
@@ -5059,14 +6648,58 @@
       <p:grpSpPr/>
       <p:sp>
         <p:nvSpPr>
-          <p:cNvPr id="2" name="TextBox 1"/>
+          <p:cNvPr id="2" name="Rectangle 1"/>
+          <p:cNvSpPr/>
+          <p:nvPr/>
+        </p:nvSpPr>
+        <p:spPr>
+          <a:xfrm>
+            <a:off x="0" y="0"/>
+            <a:ext cx="201168" cy="6858000"/>
+          </a:xfrm>
+          <a:prstGeom prst="rect">
+            <a:avLst/>
+          </a:prstGeom>
+          <a:solidFill>
+            <a:srgbClr val="0B2A4A"/>
+          </a:solidFill>
+          <a:ln>
+            <a:noFill/>
+          </a:ln>
+          <a:effectLst/>
+        </p:spPr>
+        <p:style>
+          <a:lnRef idx="1">
+            <a:schemeClr val="accent1"/>
+          </a:lnRef>
+          <a:fillRef idx="3">
+            <a:schemeClr val="accent1"/>
+          </a:fillRef>
+          <a:effectRef idx="2">
+            <a:schemeClr val="accent1"/>
+          </a:effectRef>
+          <a:fontRef idx="minor">
+            <a:schemeClr val="lt1"/>
+          </a:fontRef>
+        </p:style>
+        <p:txBody>
+          <a:bodyPr rtlCol="0" anchor="ctr"/>
+          <a:lstStyle/>
+          <a:p>
+            <a:pPr algn="ctr"/>
+          </a:p>
+        </p:txBody>
+      </p:sp>
+      <p:sp>
+        <p:nvSpPr>
+          <p:cNvPr id="3" name="TextBox 2"/>
           <p:cNvSpPr txBox="1"/>
           <p:nvPr/>
         </p:nvSpPr>
         <p:spPr>
           <a:xfrm>
-            <a:off x="640080" y="411480"/>
-            <a:ext cx="10972800" cy="914400"/>
+            <a:off x="548640" y="320040"/>
+            <a:ext cx="11338560" cy="822960"/>
           </a:xfrm>
           <a:prstGeom prst="rect">
             <a:avLst/>
@@ -5080,7 +6713,7 @@
           <a:lstStyle/>
           <a:p>
             <a:pPr>
-              <a:defRPr sz="3000" b="1">
+              <a:defRPr sz="2600" b="1">
                 <a:solidFill>
                   <a:srgbClr val="0B2A4A"/>
                 </a:solidFill>
@@ -5089,20 +6722,64 @@
             <a:r>
               <a:t>Universe &amp; Data</a:t>
             </a:r>
+          </a:p>
+        </p:txBody>
+      </p:sp>
+      <p:sp>
+        <p:nvSpPr>
+          <p:cNvPr id="4" name="Rectangle 3"/>
+          <p:cNvSpPr/>
+          <p:nvPr/>
+        </p:nvSpPr>
+        <p:spPr>
+          <a:xfrm>
+            <a:off x="566928" y="1078992"/>
+            <a:ext cx="3840480" cy="41148"/>
+          </a:xfrm>
+          <a:prstGeom prst="rect">
+            <a:avLst/>
+          </a:prstGeom>
+          <a:solidFill>
+            <a:srgbClr val="1F6FB2"/>
+          </a:solidFill>
+          <a:ln>
+            <a:noFill/>
+          </a:ln>
+          <a:effectLst/>
+        </p:spPr>
+        <p:style>
+          <a:lnRef idx="1">
+            <a:schemeClr val="accent1"/>
+          </a:lnRef>
+          <a:fillRef idx="3">
+            <a:schemeClr val="accent1"/>
+          </a:fillRef>
+          <a:effectRef idx="2">
+            <a:schemeClr val="accent1"/>
+          </a:effectRef>
+          <a:fontRef idx="minor">
+            <a:schemeClr val="lt1"/>
+          </a:fontRef>
+        </p:style>
+        <p:txBody>
+          <a:bodyPr rtlCol="0" anchor="ctr"/>
+          <a:lstStyle/>
+          <a:p>
+            <a:pPr algn="ctr"/>
           </a:p>
         </p:txBody>
       </p:sp>
       <p:graphicFrame>
         <p:nvGraphicFramePr>
-          <p:cNvPr id="3" name="Table 2"/>
+          <p:cNvPr id="5" name="Table 4"/>
           <p:cNvGraphicFramePr>
             <a:graphicFrameLocks noGrp="1"/>
           </p:cNvGraphicFramePr>
           <p:nvPr/>
         </p:nvGraphicFramePr>
         <p:xfrm>
-          <a:off x="731520" y="1554480"/>
-          <a:ext cx="10698480" cy="2926080"/>
+          <a:off x="640080" y="1371600"/>
+          <a:ext cx="10881360" cy="2487168"/>
         </p:xfrm>
         <a:graphic>
           <a:graphicData uri="http://schemas.openxmlformats.org/drawingml/2006/table">
@@ -5111,19 +6788,19 @@
                 <a:tableStyleId>{5C22544A-7EE6-4342-B048-85BDC9FD1C3A}</a:tableStyleId>
               </a:tblPr>
               <a:tblGrid>
-                <a:gridCol w="2674620"/>
-                <a:gridCol w="2674620"/>
-                <a:gridCol w="2674620"/>
-                <a:gridCol w="2674620"/>
+                <a:gridCol w="2720340"/>
+                <a:gridCol w="2720340"/>
+                <a:gridCol w="2720340"/>
+                <a:gridCol w="2720340"/>
               </a:tblGrid>
-              <a:tr h="365760">
-                <a:tc>
-                  <a:txBody>
-                    <a:bodyPr/>
-                    <a:lstStyle/>
-                    <a:p>
-                      <a:pPr>
-                        <a:defRPr sz="1500" b="1">
+              <a:tr h="310896">
+                <a:tc>
+                  <a:txBody>
+                    <a:bodyPr/>
+                    <a:lstStyle/>
+                    <a:p>
+                      <a:pPr>
+                        <a:defRPr sz="1300" b="1">
                           <a:solidFill>
                             <a:srgbClr val="FFFFFF"/>
                           </a:solidFill>
@@ -5146,7 +6823,7 @@
                     <a:lstStyle/>
                     <a:p>
                       <a:pPr>
-                        <a:defRPr sz="1500" b="1">
+                        <a:defRPr sz="1300" b="1">
                           <a:solidFill>
                             <a:srgbClr val="FFFFFF"/>
                           </a:solidFill>
@@ -5169,7 +6846,7 @@
                     <a:lstStyle/>
                     <a:p>
                       <a:pPr>
-                        <a:defRPr sz="1500" b="1">
+                        <a:defRPr sz="1300" b="1">
                           <a:solidFill>
                             <a:srgbClr val="FFFFFF"/>
                           </a:solidFill>
@@ -5192,7 +6869,7 @@
                     <a:lstStyle/>
                     <a:p>
                       <a:pPr>
-                        <a:defRPr sz="1500" b="1">
+                        <a:defRPr sz="1300" b="1">
                           <a:solidFill>
                             <a:srgbClr val="FFFFFF"/>
                           </a:solidFill>
@@ -5210,14 +6887,14 @@
                   </a:tcPr>
                 </a:tc>
               </a:tr>
-              <a:tr h="365760">
-                <a:tc>
-                  <a:txBody>
-                    <a:bodyPr/>
-                    <a:lstStyle/>
-                    <a:p>
-                      <a:pPr>
-                        <a:defRPr sz="1400" b="0">
+              <a:tr h="310896">
+                <a:tc>
+                  <a:txBody>
+                    <a:bodyPr/>
+                    <a:lstStyle/>
+                    <a:p>
+                      <a:pPr>
+                        <a:defRPr sz="1300" b="0">
                           <a:solidFill>
                             <a:srgbClr val="0B2A4A"/>
                           </a:solidFill>
@@ -5228,15 +6905,19 @@
                       </a:r>
                     </a:p>
                   </a:txBody>
-                  <a:tcPr/>
-                </a:tc>
-                <a:tc>
-                  <a:txBody>
-                    <a:bodyPr/>
-                    <a:lstStyle/>
-                    <a:p>
-                      <a:pPr>
-                        <a:defRPr sz="1400" b="0">
+                  <a:tcPr>
+                    <a:solidFill>
+                      <a:srgbClr val="FFFFFF"/>
+                    </a:solidFill>
+                  </a:tcPr>
+                </a:tc>
+                <a:tc>
+                  <a:txBody>
+                    <a:bodyPr/>
+                    <a:lstStyle/>
+                    <a:p>
+                      <a:pPr>
+                        <a:defRPr sz="1300" b="0">
                           <a:solidFill>
                             <a:srgbClr val="0B2A4A"/>
                           </a:solidFill>
@@ -5247,15 +6928,19 @@
                       </a:r>
                     </a:p>
                   </a:txBody>
-                  <a:tcPr/>
-                </a:tc>
-                <a:tc>
-                  <a:txBody>
-                    <a:bodyPr/>
-                    <a:lstStyle/>
-                    <a:p>
-                      <a:pPr>
-                        <a:defRPr sz="1400" b="0">
+                  <a:tcPr>
+                    <a:solidFill>
+                      <a:srgbClr val="FFFFFF"/>
+                    </a:solidFill>
+                  </a:tcPr>
+                </a:tc>
+                <a:tc>
+                  <a:txBody>
+                    <a:bodyPr/>
+                    <a:lstStyle/>
+                    <a:p>
+                      <a:pPr>
+                        <a:defRPr sz="1300" b="0">
                           <a:solidFill>
                             <a:srgbClr val="0B2A4A"/>
                           </a:solidFill>
@@ -5266,15 +6951,19 @@
                       </a:r>
                     </a:p>
                   </a:txBody>
-                  <a:tcPr/>
-                </a:tc>
-                <a:tc>
-                  <a:txBody>
-                    <a:bodyPr/>
-                    <a:lstStyle/>
-                    <a:p>
-                      <a:pPr>
-                        <a:defRPr sz="1400" b="0">
+                  <a:tcPr>
+                    <a:solidFill>
+                      <a:srgbClr val="FFFFFF"/>
+                    </a:solidFill>
+                  </a:tcPr>
+                </a:tc>
+                <a:tc>
+                  <a:txBody>
+                    <a:bodyPr/>
+                    <a:lstStyle/>
+                    <a:p>
+                      <a:pPr>
+                        <a:defRPr sz="1300" b="0">
                           <a:solidFill>
                             <a:srgbClr val="0B2A4A"/>
                           </a:solidFill>
@@ -5285,36 +6974,44 @@
                       </a:r>
                     </a:p>
                   </a:txBody>
-                  <a:tcPr/>
+                  <a:tcPr>
+                    <a:solidFill>
+                      <a:srgbClr val="FFFFFF"/>
+                    </a:solidFill>
+                  </a:tcPr>
                 </a:tc>
               </a:tr>
-              <a:tr h="365760">
-                <a:tc>
-                  <a:txBody>
-                    <a:bodyPr/>
-                    <a:lstStyle/>
-                    <a:p>
-                      <a:pPr>
-                        <a:defRPr sz="1400" b="0">
+              <a:tr h="310896">
+                <a:tc>
+                  <a:txBody>
+                    <a:bodyPr/>
+                    <a:lstStyle/>
+                    <a:p>
+                      <a:pPr>
+                        <a:defRPr sz="1300" b="0">
                           <a:solidFill>
                             <a:srgbClr val="0B2A4A"/>
                           </a:solidFill>
                         </a:defRPr>
                       </a:pPr>
                       <a:r>
-                        <a:t>Dev. Intl Equity</a:t>
-                      </a:r>
-                    </a:p>
-                  </a:txBody>
-                  <a:tcPr/>
-                </a:tc>
-                <a:tc>
-                  <a:txBody>
-                    <a:bodyPr/>
-                    <a:lstStyle/>
-                    <a:p>
-                      <a:pPr>
-                        <a:defRPr sz="1400" b="0">
+                        <a:t>Developed Intl</a:t>
+                      </a:r>
+                    </a:p>
+                  </a:txBody>
+                  <a:tcPr>
+                    <a:solidFill>
+                      <a:srgbClr val="FFFFFF"/>
+                    </a:solidFill>
+                  </a:tcPr>
+                </a:tc>
+                <a:tc>
+                  <a:txBody>
+                    <a:bodyPr/>
+                    <a:lstStyle/>
+                    <a:p>
+                      <a:pPr>
+                        <a:defRPr sz="1300" b="0">
                           <a:solidFill>
                             <a:srgbClr val="0B2A4A"/>
                           </a:solidFill>
@@ -5325,15 +7022,19 @@
                       </a:r>
                     </a:p>
                   </a:txBody>
-                  <a:tcPr/>
-                </a:tc>
-                <a:tc>
-                  <a:txBody>
-                    <a:bodyPr/>
-                    <a:lstStyle/>
-                    <a:p>
-                      <a:pPr>
-                        <a:defRPr sz="1400" b="0">
+                  <a:tcPr>
+                    <a:solidFill>
+                      <a:srgbClr val="FFFFFF"/>
+                    </a:solidFill>
+                  </a:tcPr>
+                </a:tc>
+                <a:tc>
+                  <a:txBody>
+                    <a:bodyPr/>
+                    <a:lstStyle/>
+                    <a:p>
+                      <a:pPr>
+                        <a:defRPr sz="1300" b="0">
                           <a:solidFill>
                             <a:srgbClr val="0B2A4A"/>
                           </a:solidFill>
@@ -5344,15 +7045,19 @@
                       </a:r>
                     </a:p>
                   </a:txBody>
-                  <a:tcPr/>
-                </a:tc>
-                <a:tc>
-                  <a:txBody>
-                    <a:bodyPr/>
-                    <a:lstStyle/>
-                    <a:p>
-                      <a:pPr>
-                        <a:defRPr sz="1400" b="0">
+                  <a:tcPr>
+                    <a:solidFill>
+                      <a:srgbClr val="FFFFFF"/>
+                    </a:solidFill>
+                  </a:tcPr>
+                </a:tc>
+                <a:tc>
+                  <a:txBody>
+                    <a:bodyPr/>
+                    <a:lstStyle/>
+                    <a:p>
+                      <a:pPr>
+                        <a:defRPr sz="1300" b="0">
                           <a:solidFill>
                             <a:srgbClr val="0B2A4A"/>
                           </a:solidFill>
@@ -5363,36 +7068,44 @@
                       </a:r>
                     </a:p>
                   </a:txBody>
-                  <a:tcPr/>
+                  <a:tcPr>
+                    <a:solidFill>
+                      <a:srgbClr val="FFFFFF"/>
+                    </a:solidFill>
+                  </a:tcPr>
                 </a:tc>
               </a:tr>
-              <a:tr h="365760">
-                <a:tc>
-                  <a:txBody>
-                    <a:bodyPr/>
-                    <a:lstStyle/>
-                    <a:p>
-                      <a:pPr>
-                        <a:defRPr sz="1400" b="0">
+              <a:tr h="310896">
+                <a:tc>
+                  <a:txBody>
+                    <a:bodyPr/>
+                    <a:lstStyle/>
+                    <a:p>
+                      <a:pPr>
+                        <a:defRPr sz="1300" b="0">
                           <a:solidFill>
                             <a:srgbClr val="0B2A4A"/>
                           </a:solidFill>
                         </a:defRPr>
                       </a:pPr>
                       <a:r>
-                        <a:t>EM Equity</a:t>
-                      </a:r>
-                    </a:p>
-                  </a:txBody>
-                  <a:tcPr/>
-                </a:tc>
-                <a:tc>
-                  <a:txBody>
-                    <a:bodyPr/>
-                    <a:lstStyle/>
-                    <a:p>
-                      <a:pPr>
-                        <a:defRPr sz="1400" b="0">
+                        <a:t>Emerging Mkts</a:t>
+                      </a:r>
+                    </a:p>
+                  </a:txBody>
+                  <a:tcPr>
+                    <a:solidFill>
+                      <a:srgbClr val="FFFFFF"/>
+                    </a:solidFill>
+                  </a:tcPr>
+                </a:tc>
+                <a:tc>
+                  <a:txBody>
+                    <a:bodyPr/>
+                    <a:lstStyle/>
+                    <a:p>
+                      <a:pPr>
+                        <a:defRPr sz="1300" b="0">
                           <a:solidFill>
                             <a:srgbClr val="0B2A4A"/>
                           </a:solidFill>
@@ -5403,15 +7116,19 @@
                       </a:r>
                     </a:p>
                   </a:txBody>
-                  <a:tcPr/>
-                </a:tc>
-                <a:tc>
-                  <a:txBody>
-                    <a:bodyPr/>
-                    <a:lstStyle/>
-                    <a:p>
-                      <a:pPr>
-                        <a:defRPr sz="1400" b="0">
+                  <a:tcPr>
+                    <a:solidFill>
+                      <a:srgbClr val="FFFFFF"/>
+                    </a:solidFill>
+                  </a:tcPr>
+                </a:tc>
+                <a:tc>
+                  <a:txBody>
+                    <a:bodyPr/>
+                    <a:lstStyle/>
+                    <a:p>
+                      <a:pPr>
+                        <a:defRPr sz="1300" b="0">
                           <a:solidFill>
                             <a:srgbClr val="0B2A4A"/>
                           </a:solidFill>
@@ -5422,15 +7139,19 @@
                       </a:r>
                     </a:p>
                   </a:txBody>
-                  <a:tcPr/>
-                </a:tc>
-                <a:tc>
-                  <a:txBody>
-                    <a:bodyPr/>
-                    <a:lstStyle/>
-                    <a:p>
-                      <a:pPr>
-                        <a:defRPr sz="1400" b="0">
+                  <a:tcPr>
+                    <a:solidFill>
+                      <a:srgbClr val="FFFFFF"/>
+                    </a:solidFill>
+                  </a:tcPr>
+                </a:tc>
+                <a:tc>
+                  <a:txBody>
+                    <a:bodyPr/>
+                    <a:lstStyle/>
+                    <a:p>
+                      <a:pPr>
+                        <a:defRPr sz="1300" b="0">
                           <a:solidFill>
                             <a:srgbClr val="0B2A4A"/>
                           </a:solidFill>
@@ -5441,17 +7162,21 @@
                       </a:r>
                     </a:p>
                   </a:txBody>
-                  <a:tcPr/>
+                  <a:tcPr>
+                    <a:solidFill>
+                      <a:srgbClr val="FFFFFF"/>
+                    </a:solidFill>
+                  </a:tcPr>
                 </a:tc>
               </a:tr>
-              <a:tr h="365760">
-                <a:tc>
-                  <a:txBody>
-                    <a:bodyPr/>
-                    <a:lstStyle/>
-                    <a:p>
-                      <a:pPr>
-                        <a:defRPr sz="1400" b="0">
+              <a:tr h="310896">
+                <a:tc>
+                  <a:txBody>
+                    <a:bodyPr/>
+                    <a:lstStyle/>
+                    <a:p>
+                      <a:pPr>
+                        <a:defRPr sz="1300" b="0">
                           <a:solidFill>
                             <a:srgbClr val="0B2A4A"/>
                           </a:solidFill>
@@ -5462,15 +7187,19 @@
                       </a:r>
                     </a:p>
                   </a:txBody>
-                  <a:tcPr/>
-                </a:tc>
-                <a:tc>
-                  <a:txBody>
-                    <a:bodyPr/>
-                    <a:lstStyle/>
-                    <a:p>
-                      <a:pPr>
-                        <a:defRPr sz="1400" b="0">
+                  <a:tcPr>
+                    <a:solidFill>
+                      <a:srgbClr val="FFFFFF"/>
+                    </a:solidFill>
+                  </a:tcPr>
+                </a:tc>
+                <a:tc>
+                  <a:txBody>
+                    <a:bodyPr/>
+                    <a:lstStyle/>
+                    <a:p>
+                      <a:pPr>
+                        <a:defRPr sz="1300" b="0">
                           <a:solidFill>
                             <a:srgbClr val="0B2A4A"/>
                           </a:solidFill>
@@ -5481,15 +7210,19 @@
                       </a:r>
                     </a:p>
                   </a:txBody>
-                  <a:tcPr/>
-                </a:tc>
-                <a:tc>
-                  <a:txBody>
-                    <a:bodyPr/>
-                    <a:lstStyle/>
-                    <a:p>
-                      <a:pPr>
-                        <a:defRPr sz="1400" b="0">
+                  <a:tcPr>
+                    <a:solidFill>
+                      <a:srgbClr val="FFFFFF"/>
+                    </a:solidFill>
+                  </a:tcPr>
+                </a:tc>
+                <a:tc>
+                  <a:txBody>
+                    <a:bodyPr/>
+                    <a:lstStyle/>
+                    <a:p>
+                      <a:pPr>
+                        <a:defRPr sz="1300" b="0">
                           <a:solidFill>
                             <a:srgbClr val="0B2A4A"/>
                           </a:solidFill>
@@ -5500,15 +7233,19 @@
                       </a:r>
                     </a:p>
                   </a:txBody>
-                  <a:tcPr/>
-                </a:tc>
-                <a:tc>
-                  <a:txBody>
-                    <a:bodyPr/>
-                    <a:lstStyle/>
-                    <a:p>
-                      <a:pPr>
-                        <a:defRPr sz="1400" b="0">
+                  <a:tcPr>
+                    <a:solidFill>
+                      <a:srgbClr val="FFFFFF"/>
+                    </a:solidFill>
+                  </a:tcPr>
+                </a:tc>
+                <a:tc>
+                  <a:txBody>
+                    <a:bodyPr/>
+                    <a:lstStyle/>
+                    <a:p>
+                      <a:pPr>
+                        <a:defRPr sz="1300" b="0">
                           <a:solidFill>
                             <a:srgbClr val="0B2A4A"/>
                           </a:solidFill>
@@ -5519,17 +7256,21 @@
                       </a:r>
                     </a:p>
                   </a:txBody>
-                  <a:tcPr/>
+                  <a:tcPr>
+                    <a:solidFill>
+                      <a:srgbClr val="FFFFFF"/>
+                    </a:solidFill>
+                  </a:tcPr>
                 </a:tc>
               </a:tr>
-              <a:tr h="365760">
-                <a:tc>
-                  <a:txBody>
-                    <a:bodyPr/>
-                    <a:lstStyle/>
-                    <a:p>
-                      <a:pPr>
-                        <a:defRPr sz="1400" b="0">
+              <a:tr h="310896">
+                <a:tc>
+                  <a:txBody>
+                    <a:bodyPr/>
+                    <a:lstStyle/>
+                    <a:p>
+                      <a:pPr>
+                        <a:defRPr sz="1300" b="0">
                           <a:solidFill>
                             <a:srgbClr val="0B2A4A"/>
                           </a:solidFill>
@@ -5540,15 +7281,19 @@
                       </a:r>
                     </a:p>
                   </a:txBody>
-                  <a:tcPr/>
-                </a:tc>
-                <a:tc>
-                  <a:txBody>
-                    <a:bodyPr/>
-                    <a:lstStyle/>
-                    <a:p>
-                      <a:pPr>
-                        <a:defRPr sz="1400" b="0">
+                  <a:tcPr>
+                    <a:solidFill>
+                      <a:srgbClr val="FFFFFF"/>
+                    </a:solidFill>
+                  </a:tcPr>
+                </a:tc>
+                <a:tc>
+                  <a:txBody>
+                    <a:bodyPr/>
+                    <a:lstStyle/>
+                    <a:p>
+                      <a:pPr>
+                        <a:defRPr sz="1300" b="0">
                           <a:solidFill>
                             <a:srgbClr val="0B2A4A"/>
                           </a:solidFill>
@@ -5559,15 +7304,19 @@
                       </a:r>
                     </a:p>
                   </a:txBody>
-                  <a:tcPr/>
-                </a:tc>
-                <a:tc>
-                  <a:txBody>
-                    <a:bodyPr/>
-                    <a:lstStyle/>
-                    <a:p>
-                      <a:pPr>
-                        <a:defRPr sz="1400" b="0">
+                  <a:tcPr>
+                    <a:solidFill>
+                      <a:srgbClr val="FFFFFF"/>
+                    </a:solidFill>
+                  </a:tcPr>
+                </a:tc>
+                <a:tc>
+                  <a:txBody>
+                    <a:bodyPr/>
+                    <a:lstStyle/>
+                    <a:p>
+                      <a:pPr>
+                        <a:defRPr sz="1300" b="0">
                           <a:solidFill>
                             <a:srgbClr val="0B2A4A"/>
                           </a:solidFill>
@@ -5578,15 +7327,19 @@
                       </a:r>
                     </a:p>
                   </a:txBody>
-                  <a:tcPr/>
-                </a:tc>
-                <a:tc>
-                  <a:txBody>
-                    <a:bodyPr/>
-                    <a:lstStyle/>
-                    <a:p>
-                      <a:pPr>
-                        <a:defRPr sz="1400" b="0">
+                  <a:tcPr>
+                    <a:solidFill>
+                      <a:srgbClr val="FFFFFF"/>
+                    </a:solidFill>
+                  </a:tcPr>
+                </a:tc>
+                <a:tc>
+                  <a:txBody>
+                    <a:bodyPr/>
+                    <a:lstStyle/>
+                    <a:p>
+                      <a:pPr>
+                        <a:defRPr sz="1300" b="0">
                           <a:solidFill>
                             <a:srgbClr val="0B2A4A"/>
                           </a:solidFill>
@@ -5597,17 +7350,21 @@
                       </a:r>
                     </a:p>
                   </a:txBody>
-                  <a:tcPr/>
+                  <a:tcPr>
+                    <a:solidFill>
+                      <a:srgbClr val="FFFFFF"/>
+                    </a:solidFill>
+                  </a:tcPr>
                 </a:tc>
               </a:tr>
-              <a:tr h="365760">
-                <a:tc>
-                  <a:txBody>
-                    <a:bodyPr/>
-                    <a:lstStyle/>
-                    <a:p>
-                      <a:pPr>
-                        <a:defRPr sz="1400" b="0">
+              <a:tr h="310896">
+                <a:tc>
+                  <a:txBody>
+                    <a:bodyPr/>
+                    <a:lstStyle/>
+                    <a:p>
+                      <a:pPr>
+                        <a:defRPr sz="1300" b="0">
                           <a:solidFill>
                             <a:srgbClr val="0B2A4A"/>
                           </a:solidFill>
@@ -5618,15 +7375,19 @@
                       </a:r>
                     </a:p>
                   </a:txBody>
-                  <a:tcPr/>
-                </a:tc>
-                <a:tc>
-                  <a:txBody>
-                    <a:bodyPr/>
-                    <a:lstStyle/>
-                    <a:p>
-                      <a:pPr>
-                        <a:defRPr sz="1400" b="0">
+                  <a:tcPr>
+                    <a:solidFill>
+                      <a:srgbClr val="FFFFFF"/>
+                    </a:solidFill>
+                  </a:tcPr>
+                </a:tc>
+                <a:tc>
+                  <a:txBody>
+                    <a:bodyPr/>
+                    <a:lstStyle/>
+                    <a:p>
+                      <a:pPr>
+                        <a:defRPr sz="1300" b="0">
                           <a:solidFill>
                             <a:srgbClr val="0B2A4A"/>
                           </a:solidFill>
@@ -5637,15 +7398,19 @@
                       </a:r>
                     </a:p>
                   </a:txBody>
-                  <a:tcPr/>
-                </a:tc>
-                <a:tc>
-                  <a:txBody>
-                    <a:bodyPr/>
-                    <a:lstStyle/>
-                    <a:p>
-                      <a:pPr>
-                        <a:defRPr sz="1400" b="0">
+                  <a:tcPr>
+                    <a:solidFill>
+                      <a:srgbClr val="FFFFFF"/>
+                    </a:solidFill>
+                  </a:tcPr>
+                </a:tc>
+                <a:tc>
+                  <a:txBody>
+                    <a:bodyPr/>
+                    <a:lstStyle/>
+                    <a:p>
+                      <a:pPr>
+                        <a:defRPr sz="1300" b="0">
                           <a:solidFill>
                             <a:srgbClr val="0B2A4A"/>
                           </a:solidFill>
@@ -5656,15 +7421,19 @@
                       </a:r>
                     </a:p>
                   </a:txBody>
-                  <a:tcPr/>
-                </a:tc>
-                <a:tc>
-                  <a:txBody>
-                    <a:bodyPr/>
-                    <a:lstStyle/>
-                    <a:p>
-                      <a:pPr>
-                        <a:defRPr sz="1400" b="0">
+                  <a:tcPr>
+                    <a:solidFill>
+                      <a:srgbClr val="FFFFFF"/>
+                    </a:solidFill>
+                  </a:tcPr>
+                </a:tc>
+                <a:tc>
+                  <a:txBody>
+                    <a:bodyPr/>
+                    <a:lstStyle/>
+                    <a:p>
+                      <a:pPr>
+                        <a:defRPr sz="1300" b="0">
                           <a:solidFill>
                             <a:srgbClr val="0B2A4A"/>
                           </a:solidFill>
@@ -5675,17 +7444,21 @@
                       </a:r>
                     </a:p>
                   </a:txBody>
-                  <a:tcPr/>
+                  <a:tcPr>
+                    <a:solidFill>
+                      <a:srgbClr val="FFFFFF"/>
+                    </a:solidFill>
+                  </a:tcPr>
                 </a:tc>
               </a:tr>
-              <a:tr h="365760">
-                <a:tc>
-                  <a:txBody>
-                    <a:bodyPr/>
-                    <a:lstStyle/>
-                    <a:p>
-                      <a:pPr>
-                        <a:defRPr sz="1400" b="0">
+              <a:tr h="310896">
+                <a:tc>
+                  <a:txBody>
+                    <a:bodyPr/>
+                    <a:lstStyle/>
+                    <a:p>
+                      <a:pPr>
+                        <a:defRPr sz="1300" b="0">
                           <a:solidFill>
                             <a:srgbClr val="0B2A4A"/>
                           </a:solidFill>
@@ -5696,15 +7469,19 @@
                       </a:r>
                     </a:p>
                   </a:txBody>
-                  <a:tcPr/>
-                </a:tc>
-                <a:tc>
-                  <a:txBody>
-                    <a:bodyPr/>
-                    <a:lstStyle/>
-                    <a:p>
-                      <a:pPr>
-                        <a:defRPr sz="1400" b="0">
+                  <a:tcPr>
+                    <a:solidFill>
+                      <a:srgbClr val="FFFFFF"/>
+                    </a:solidFill>
+                  </a:tcPr>
+                </a:tc>
+                <a:tc>
+                  <a:txBody>
+                    <a:bodyPr/>
+                    <a:lstStyle/>
+                    <a:p>
+                      <a:pPr>
+                        <a:defRPr sz="1300" b="0">
                           <a:solidFill>
                             <a:srgbClr val="0B2A4A"/>
                           </a:solidFill>
@@ -5715,15 +7492,19 @@
                       </a:r>
                     </a:p>
                   </a:txBody>
-                  <a:tcPr/>
-                </a:tc>
-                <a:tc>
-                  <a:txBody>
-                    <a:bodyPr/>
-                    <a:lstStyle/>
-                    <a:p>
-                      <a:pPr>
-                        <a:defRPr sz="1400" b="0">
+                  <a:tcPr>
+                    <a:solidFill>
+                      <a:srgbClr val="FFFFFF"/>
+                    </a:solidFill>
+                  </a:tcPr>
+                </a:tc>
+                <a:tc>
+                  <a:txBody>
+                    <a:bodyPr/>
+                    <a:lstStyle/>
+                    <a:p>
+                      <a:pPr>
+                        <a:defRPr sz="1300" b="0">
                           <a:solidFill>
                             <a:srgbClr val="0B2A4A"/>
                           </a:solidFill>
@@ -5734,15 +7515,19 @@
                       </a:r>
                     </a:p>
                   </a:txBody>
-                  <a:tcPr/>
-                </a:tc>
-                <a:tc>
-                  <a:txBody>
-                    <a:bodyPr/>
-                    <a:lstStyle/>
-                    <a:p>
-                      <a:pPr>
-                        <a:defRPr sz="1400" b="0">
+                  <a:tcPr>
+                    <a:solidFill>
+                      <a:srgbClr val="FFFFFF"/>
+                    </a:solidFill>
+                  </a:tcPr>
+                </a:tc>
+                <a:tc>
+                  <a:txBody>
+                    <a:bodyPr/>
+                    <a:lstStyle/>
+                    <a:p>
+                      <a:pPr>
+                        <a:defRPr sz="1300" b="0">
                           <a:solidFill>
                             <a:srgbClr val="0B2A4A"/>
                           </a:solidFill>
@@ -5753,7 +7538,11 @@
                       </a:r>
                     </a:p>
                   </a:txBody>
-                  <a:tcPr/>
+                  <a:tcPr>
+                    <a:solidFill>
+                      <a:srgbClr val="FFFFFF"/>
+                    </a:solidFill>
+                  </a:tcPr>
                 </a:tc>
               </a:tr>
             </a:tbl>
@@ -5762,14 +7551,58 @@
       </p:graphicFrame>
       <p:sp>
         <p:nvSpPr>
-          <p:cNvPr id="4" name="TextBox 3"/>
+          <p:cNvPr id="6" name="Rectangle 5"/>
+          <p:cNvSpPr/>
+          <p:nvPr/>
+        </p:nvSpPr>
+        <p:spPr>
+          <a:xfrm>
+            <a:off x="548640" y="4087368"/>
+            <a:ext cx="11091672" cy="914400"/>
+          </a:xfrm>
+          <a:prstGeom prst="rect">
+            <a:avLst/>
+          </a:prstGeom>
+          <a:solidFill>
+            <a:srgbClr val="ECF1F6"/>
+          </a:solidFill>
+          <a:ln>
+            <a:noFill/>
+          </a:ln>
+          <a:effectLst/>
+        </p:spPr>
+        <p:style>
+          <a:lnRef idx="1">
+            <a:schemeClr val="accent1"/>
+          </a:lnRef>
+          <a:fillRef idx="3">
+            <a:schemeClr val="accent1"/>
+          </a:fillRef>
+          <a:effectRef idx="2">
+            <a:schemeClr val="accent1"/>
+          </a:effectRef>
+          <a:fontRef idx="minor">
+            <a:schemeClr val="lt1"/>
+          </a:fontRef>
+        </p:style>
+        <p:txBody>
+          <a:bodyPr rtlCol="0" anchor="ctr"/>
+          <a:lstStyle/>
+          <a:p>
+            <a:pPr algn="ctr"/>
+          </a:p>
+        </p:txBody>
+      </p:sp>
+      <p:sp>
+        <p:nvSpPr>
+          <p:cNvPr id="7" name="TextBox 6"/>
           <p:cNvSpPr txBox="1"/>
           <p:nvPr/>
         </p:nvSpPr>
         <p:spPr>
           <a:xfrm>
-            <a:off x="822960" y="4800600"/>
-            <a:ext cx="10607040" cy="1280160"/>
+            <a:off x="731520" y="4142232"/>
+            <a:ext cx="10789920" cy="822960"/>
           </a:xfrm>
           <a:prstGeom prst="rect">
             <a:avLst/>
@@ -5777,20 +7610,90 @@
           <a:noFill/>
         </p:spPr>
         <p:txBody>
+          <a:bodyPr wrap="square" anchor="ctr">
+            <a:spAutoFit/>
+          </a:bodyPr>
+          <a:lstStyle/>
+          <a:p>
+            <a:pPr>
+              <a:defRPr sz="1300" i="1">
+                <a:solidFill>
+                  <a:srgbClr val="1F6FB2"/>
+                </a:solidFill>
+              </a:defRPr>
+            </a:pPr>
+            <a:r>
+              <a:t>What it means:  Free true-index history is short (HY index only 2023, MSCI EAFE/EM only 2012); we use the longest free series per sleeve. True long-history index needs Bloomberg.</a:t>
+            </a:r>
+          </a:p>
+        </p:txBody>
+      </p:sp>
+      <p:sp>
+        <p:nvSpPr>
+          <p:cNvPr id="8" name="TextBox 7"/>
+          <p:cNvSpPr txBox="1"/>
+          <p:nvPr/>
+        </p:nvSpPr>
+        <p:spPr>
+          <a:xfrm>
+            <a:off x="548640" y="6419088"/>
+            <a:ext cx="11155680" cy="320040"/>
+          </a:xfrm>
+          <a:prstGeom prst="rect">
+            <a:avLst/>
+          </a:prstGeom>
+          <a:noFill/>
+        </p:spPr>
+        <p:txBody>
           <a:bodyPr wrap="square">
             <a:spAutoFit/>
           </a:bodyPr>
           <a:lstStyle/>
           <a:p>
             <a:pPr>
-              <a:defRPr sz="1600" i="1">
-                <a:solidFill>
-                  <a:srgbClr val="1F6FB2"/>
+              <a:defRPr sz="900">
+                <a:solidFill>
+                  <a:srgbClr val="555B66"/>
                 </a:solidFill>
               </a:defRPr>
             </a:pPr>
             <a:r>
-              <a:t>What it means: Free true-index history is short (HY index only 2023, MSCI EAFE/EM only 2012), so we use the longest free series per sleeve; true long-history index needs Bloomberg.</a:t>
+              <a:t>Multi-Asset Meta-Labeling  ·  June 18, 2026</a:t>
+            </a:r>
+          </a:p>
+        </p:txBody>
+      </p:sp>
+      <p:sp>
+        <p:nvSpPr>
+          <p:cNvPr id="9" name="TextBox 8"/>
+          <p:cNvSpPr txBox="1"/>
+          <p:nvPr/>
+        </p:nvSpPr>
+        <p:spPr>
+          <a:xfrm>
+            <a:off x="11338560" y="6419088"/>
+            <a:ext cx="640080" cy="320040"/>
+          </a:xfrm>
+          <a:prstGeom prst="rect">
+            <a:avLst/>
+          </a:prstGeom>
+          <a:noFill/>
+        </p:spPr>
+        <p:txBody>
+          <a:bodyPr wrap="square">
+            <a:spAutoFit/>
+          </a:bodyPr>
+          <a:lstStyle/>
+          <a:p>
+            <a:pPr>
+              <a:defRPr sz="900">
+                <a:solidFill>
+                  <a:srgbClr val="555B66"/>
+                </a:solidFill>
+              </a:defRPr>
+            </a:pPr>
+            <a:r>
+              <a:t>5</a:t>
             </a:r>
           </a:p>
         </p:txBody>
@@ -5815,14 +7718,58 @@
       <p:grpSpPr/>
       <p:sp>
         <p:nvSpPr>
-          <p:cNvPr id="2" name="TextBox 1"/>
+          <p:cNvPr id="2" name="Rectangle 1"/>
+          <p:cNvSpPr/>
+          <p:nvPr/>
+        </p:nvSpPr>
+        <p:spPr>
+          <a:xfrm>
+            <a:off x="0" y="0"/>
+            <a:ext cx="201168" cy="6858000"/>
+          </a:xfrm>
+          <a:prstGeom prst="rect">
+            <a:avLst/>
+          </a:prstGeom>
+          <a:solidFill>
+            <a:srgbClr val="0B2A4A"/>
+          </a:solidFill>
+          <a:ln>
+            <a:noFill/>
+          </a:ln>
+          <a:effectLst/>
+        </p:spPr>
+        <p:style>
+          <a:lnRef idx="1">
+            <a:schemeClr val="accent1"/>
+          </a:lnRef>
+          <a:fillRef idx="3">
+            <a:schemeClr val="accent1"/>
+          </a:fillRef>
+          <a:effectRef idx="2">
+            <a:schemeClr val="accent1"/>
+          </a:effectRef>
+          <a:fontRef idx="minor">
+            <a:schemeClr val="lt1"/>
+          </a:fontRef>
+        </p:style>
+        <p:txBody>
+          <a:bodyPr rtlCol="0" anchor="ctr"/>
+          <a:lstStyle/>
+          <a:p>
+            <a:pPr algn="ctr"/>
+          </a:p>
+        </p:txBody>
+      </p:sp>
+      <p:sp>
+        <p:nvSpPr>
+          <p:cNvPr id="3" name="TextBox 2"/>
           <p:cNvSpPr txBox="1"/>
           <p:nvPr/>
         </p:nvSpPr>
         <p:spPr>
           <a:xfrm>
-            <a:off x="640080" y="411480"/>
-            <a:ext cx="10972800" cy="914400"/>
+            <a:off x="548640" y="320040"/>
+            <a:ext cx="11338560" cy="822960"/>
           </a:xfrm>
           <a:prstGeom prst="rect">
             <a:avLst/>
@@ -5836,29 +7783,73 @@
           <a:lstStyle/>
           <a:p>
             <a:pPr>
-              <a:defRPr sz="3000" b="1">
+              <a:defRPr sz="2600" b="1">
                 <a:solidFill>
                   <a:srgbClr val="0B2A4A"/>
                 </a:solidFill>
               </a:defRPr>
             </a:pPr>
             <a:r>
-              <a:t>Results — Strategy (full sample 2000-2026; out-of-sample from 2021)</a:t>
-            </a:r>
+              <a:t>Results — Strategy   (full sample 2000-2026; OOS from 2021)</a:t>
+            </a:r>
+          </a:p>
+        </p:txBody>
+      </p:sp>
+      <p:sp>
+        <p:nvSpPr>
+          <p:cNvPr id="4" name="Rectangle 3"/>
+          <p:cNvSpPr/>
+          <p:nvPr/>
+        </p:nvSpPr>
+        <p:spPr>
+          <a:xfrm>
+            <a:off x="566928" y="1078992"/>
+            <a:ext cx="3840480" cy="41148"/>
+          </a:xfrm>
+          <a:prstGeom prst="rect">
+            <a:avLst/>
+          </a:prstGeom>
+          <a:solidFill>
+            <a:srgbClr val="1F6FB2"/>
+          </a:solidFill>
+          <a:ln>
+            <a:noFill/>
+          </a:ln>
+          <a:effectLst/>
+        </p:spPr>
+        <p:style>
+          <a:lnRef idx="1">
+            <a:schemeClr val="accent1"/>
+          </a:lnRef>
+          <a:fillRef idx="3">
+            <a:schemeClr val="accent1"/>
+          </a:fillRef>
+          <a:effectRef idx="2">
+            <a:schemeClr val="accent1"/>
+          </a:effectRef>
+          <a:fontRef idx="minor">
+            <a:schemeClr val="lt1"/>
+          </a:fontRef>
+        </p:style>
+        <p:txBody>
+          <a:bodyPr rtlCol="0" anchor="ctr"/>
+          <a:lstStyle/>
+          <a:p>
+            <a:pPr algn="ctr"/>
           </a:p>
         </p:txBody>
       </p:sp>
       <p:graphicFrame>
         <p:nvGraphicFramePr>
-          <p:cNvPr id="3" name="Table 2"/>
+          <p:cNvPr id="5" name="Table 4"/>
           <p:cNvGraphicFramePr>
             <a:graphicFrameLocks noGrp="1"/>
           </p:cNvGraphicFramePr>
           <p:nvPr/>
         </p:nvGraphicFramePr>
         <p:xfrm>
-          <a:off x="731520" y="1554480"/>
-          <a:ext cx="10698480" cy="2194560"/>
+          <a:off x="640080" y="1371600"/>
+          <a:ext cx="10881360" cy="1865376"/>
         </p:xfrm>
         <a:graphic>
           <a:graphicData uri="http://schemas.openxmlformats.org/drawingml/2006/table">
@@ -5867,20 +7858,20 @@
                 <a:tableStyleId>{5C22544A-7EE6-4342-B048-85BDC9FD1C3A}</a:tableStyleId>
               </a:tblPr>
               <a:tblGrid>
-                <a:gridCol w="2139696"/>
-                <a:gridCol w="2139696"/>
-                <a:gridCol w="2139696"/>
-                <a:gridCol w="2139696"/>
-                <a:gridCol w="2139696"/>
+                <a:gridCol w="2176272"/>
+                <a:gridCol w="2176272"/>
+                <a:gridCol w="2176272"/>
+                <a:gridCol w="2176272"/>
+                <a:gridCol w="2176272"/>
               </a:tblGrid>
-              <a:tr h="365760">
-                <a:tc>
-                  <a:txBody>
-                    <a:bodyPr/>
-                    <a:lstStyle/>
-                    <a:p>
-                      <a:pPr>
-                        <a:defRPr sz="1500" b="1">
+              <a:tr h="310896">
+                <a:tc>
+                  <a:txBody>
+                    <a:bodyPr/>
+                    <a:lstStyle/>
+                    <a:p>
+                      <a:pPr>
+                        <a:defRPr sz="1300" b="1">
                           <a:solidFill>
                             <a:srgbClr val="FFFFFF"/>
                           </a:solidFill>
@@ -5903,7 +7894,7 @@
                     <a:lstStyle/>
                     <a:p>
                       <a:pPr>
-                        <a:defRPr sz="1500" b="1">
+                        <a:defRPr sz="1300" b="1">
                           <a:solidFill>
                             <a:srgbClr val="FFFFFF"/>
                           </a:solidFill>
@@ -5926,7 +7917,7 @@
                     <a:lstStyle/>
                     <a:p>
                       <a:pPr>
-                        <a:defRPr sz="1500" b="1">
+                        <a:defRPr sz="1300" b="1">
                           <a:solidFill>
                             <a:srgbClr val="FFFFFF"/>
                           </a:solidFill>
@@ -5949,7 +7940,7 @@
                     <a:lstStyle/>
                     <a:p>
                       <a:pPr>
-                        <a:defRPr sz="1500" b="1">
+                        <a:defRPr sz="1300" b="1">
                           <a:solidFill>
                             <a:srgbClr val="FFFFFF"/>
                           </a:solidFill>
@@ -5972,7 +7963,7 @@
                     <a:lstStyle/>
                     <a:p>
                       <a:pPr>
-                        <a:defRPr sz="1500" b="1">
+                        <a:defRPr sz="1300" b="1">
                           <a:solidFill>
                             <a:srgbClr val="FFFFFF"/>
                           </a:solidFill>
@@ -5990,14 +7981,14 @@
                   </a:tcPr>
                 </a:tc>
               </a:tr>
-              <a:tr h="365760">
-                <a:tc>
-                  <a:txBody>
-                    <a:bodyPr/>
-                    <a:lstStyle/>
-                    <a:p>
-                      <a:pPr>
-                        <a:defRPr sz="1400" b="0">
+              <a:tr h="310896">
+                <a:tc>
+                  <a:txBody>
+                    <a:bodyPr/>
+                    <a:lstStyle/>
+                    <a:p>
+                      <a:pPr>
+                        <a:defRPr sz="1300" b="0">
                           <a:solidFill>
                             <a:srgbClr val="0B2A4A"/>
                           </a:solidFill>
@@ -6008,15 +7999,19 @@
                       </a:r>
                     </a:p>
                   </a:txBody>
-                  <a:tcPr/>
-                </a:tc>
-                <a:tc>
-                  <a:txBody>
-                    <a:bodyPr/>
-                    <a:lstStyle/>
-                    <a:p>
-                      <a:pPr>
-                        <a:defRPr sz="1400" b="0">
+                  <a:tcPr>
+                    <a:solidFill>
+                      <a:srgbClr val="FFFFFF"/>
+                    </a:solidFill>
+                  </a:tcPr>
+                </a:tc>
+                <a:tc>
+                  <a:txBody>
+                    <a:bodyPr/>
+                    <a:lstStyle/>
+                    <a:p>
+                      <a:pPr>
+                        <a:defRPr sz="1300" b="0">
                           <a:solidFill>
                             <a:srgbClr val="0B2A4A"/>
                           </a:solidFill>
@@ -6027,15 +8022,19 @@
                       </a:r>
                     </a:p>
                   </a:txBody>
-                  <a:tcPr/>
-                </a:tc>
-                <a:tc>
-                  <a:txBody>
-                    <a:bodyPr/>
-                    <a:lstStyle/>
-                    <a:p>
-                      <a:pPr>
-                        <a:defRPr sz="1400" b="0">
+                  <a:tcPr>
+                    <a:solidFill>
+                      <a:srgbClr val="FFFFFF"/>
+                    </a:solidFill>
+                  </a:tcPr>
+                </a:tc>
+                <a:tc>
+                  <a:txBody>
+                    <a:bodyPr/>
+                    <a:lstStyle/>
+                    <a:p>
+                      <a:pPr>
+                        <a:defRPr sz="1300" b="0">
                           <a:solidFill>
                             <a:srgbClr val="0B2A4A"/>
                           </a:solidFill>
@@ -6046,15 +8045,19 @@
                       </a:r>
                     </a:p>
                   </a:txBody>
-                  <a:tcPr/>
-                </a:tc>
-                <a:tc>
-                  <a:txBody>
-                    <a:bodyPr/>
-                    <a:lstStyle/>
-                    <a:p>
-                      <a:pPr>
-                        <a:defRPr sz="1400" b="0">
+                  <a:tcPr>
+                    <a:solidFill>
+                      <a:srgbClr val="FFFFFF"/>
+                    </a:solidFill>
+                  </a:tcPr>
+                </a:tc>
+                <a:tc>
+                  <a:txBody>
+                    <a:bodyPr/>
+                    <a:lstStyle/>
+                    <a:p>
+                      <a:pPr>
+                        <a:defRPr sz="1300" b="0">
                           <a:solidFill>
                             <a:srgbClr val="0B2A4A"/>
                           </a:solidFill>
@@ -6065,15 +8068,19 @@
                       </a:r>
                     </a:p>
                   </a:txBody>
-                  <a:tcPr/>
-                </a:tc>
-                <a:tc>
-                  <a:txBody>
-                    <a:bodyPr/>
-                    <a:lstStyle/>
-                    <a:p>
-                      <a:pPr>
-                        <a:defRPr sz="1400" b="0">
+                  <a:tcPr>
+                    <a:solidFill>
+                      <a:srgbClr val="FFFFFF"/>
+                    </a:solidFill>
+                  </a:tcPr>
+                </a:tc>
+                <a:tc>
+                  <a:txBody>
+                    <a:bodyPr/>
+                    <a:lstStyle/>
+                    <a:p>
+                      <a:pPr>
+                        <a:defRPr sz="1300" b="0">
                           <a:solidFill>
                             <a:srgbClr val="0B2A4A"/>
                           </a:solidFill>
@@ -6084,17 +8091,21 @@
                       </a:r>
                     </a:p>
                   </a:txBody>
-                  <a:tcPr/>
+                  <a:tcPr>
+                    <a:solidFill>
+                      <a:srgbClr val="FFFFFF"/>
+                    </a:solidFill>
+                  </a:tcPr>
                 </a:tc>
               </a:tr>
-              <a:tr h="365760">
-                <a:tc>
-                  <a:txBody>
-                    <a:bodyPr/>
-                    <a:lstStyle/>
-                    <a:p>
-                      <a:pPr>
-                        <a:defRPr sz="1400" b="0">
+              <a:tr h="310896">
+                <a:tc>
+                  <a:txBody>
+                    <a:bodyPr/>
+                    <a:lstStyle/>
+                    <a:p>
+                      <a:pPr>
+                        <a:defRPr sz="1300" b="0">
                           <a:solidFill>
                             <a:srgbClr val="0B2A4A"/>
                           </a:solidFill>
@@ -6105,15 +8116,19 @@
                       </a:r>
                     </a:p>
                   </a:txBody>
-                  <a:tcPr/>
-                </a:tc>
-                <a:tc>
-                  <a:txBody>
-                    <a:bodyPr/>
-                    <a:lstStyle/>
-                    <a:p>
-                      <a:pPr>
-                        <a:defRPr sz="1400" b="0">
+                  <a:tcPr>
+                    <a:solidFill>
+                      <a:srgbClr val="FFFFFF"/>
+                    </a:solidFill>
+                  </a:tcPr>
+                </a:tc>
+                <a:tc>
+                  <a:txBody>
+                    <a:bodyPr/>
+                    <a:lstStyle/>
+                    <a:p>
+                      <a:pPr>
+                        <a:defRPr sz="1300" b="0">
                           <a:solidFill>
                             <a:srgbClr val="0B2A4A"/>
                           </a:solidFill>
@@ -6124,15 +8139,19 @@
                       </a:r>
                     </a:p>
                   </a:txBody>
-                  <a:tcPr/>
-                </a:tc>
-                <a:tc>
-                  <a:txBody>
-                    <a:bodyPr/>
-                    <a:lstStyle/>
-                    <a:p>
-                      <a:pPr>
-                        <a:defRPr sz="1400" b="0">
+                  <a:tcPr>
+                    <a:solidFill>
+                      <a:srgbClr val="FFFFFF"/>
+                    </a:solidFill>
+                  </a:tcPr>
+                </a:tc>
+                <a:tc>
+                  <a:txBody>
+                    <a:bodyPr/>
+                    <a:lstStyle/>
+                    <a:p>
+                      <a:pPr>
+                        <a:defRPr sz="1300" b="0">
                           <a:solidFill>
                             <a:srgbClr val="0B2A4A"/>
                           </a:solidFill>
@@ -6143,15 +8162,19 @@
                       </a:r>
                     </a:p>
                   </a:txBody>
-                  <a:tcPr/>
-                </a:tc>
-                <a:tc>
-                  <a:txBody>
-                    <a:bodyPr/>
-                    <a:lstStyle/>
-                    <a:p>
-                      <a:pPr>
-                        <a:defRPr sz="1400" b="0">
+                  <a:tcPr>
+                    <a:solidFill>
+                      <a:srgbClr val="FFFFFF"/>
+                    </a:solidFill>
+                  </a:tcPr>
+                </a:tc>
+                <a:tc>
+                  <a:txBody>
+                    <a:bodyPr/>
+                    <a:lstStyle/>
+                    <a:p>
+                      <a:pPr>
+                        <a:defRPr sz="1300" b="0">
                           <a:solidFill>
                             <a:srgbClr val="0B2A4A"/>
                           </a:solidFill>
@@ -6162,15 +8185,19 @@
                       </a:r>
                     </a:p>
                   </a:txBody>
-                  <a:tcPr/>
-                </a:tc>
-                <a:tc>
-                  <a:txBody>
-                    <a:bodyPr/>
-                    <a:lstStyle/>
-                    <a:p>
-                      <a:pPr>
-                        <a:defRPr sz="1400" b="0">
+                  <a:tcPr>
+                    <a:solidFill>
+                      <a:srgbClr val="FFFFFF"/>
+                    </a:solidFill>
+                  </a:tcPr>
+                </a:tc>
+                <a:tc>
+                  <a:txBody>
+                    <a:bodyPr/>
+                    <a:lstStyle/>
+                    <a:p>
+                      <a:pPr>
+                        <a:defRPr sz="1300" b="0">
                           <a:solidFill>
                             <a:srgbClr val="0B2A4A"/>
                           </a:solidFill>
@@ -6181,17 +8208,21 @@
                       </a:r>
                     </a:p>
                   </a:txBody>
-                  <a:tcPr/>
+                  <a:tcPr>
+                    <a:solidFill>
+                      <a:srgbClr val="FFFFFF"/>
+                    </a:solidFill>
+                  </a:tcPr>
                 </a:tc>
               </a:tr>
-              <a:tr h="365760">
-                <a:tc>
-                  <a:txBody>
-                    <a:bodyPr/>
-                    <a:lstStyle/>
-                    <a:p>
-                      <a:pPr>
-                        <a:defRPr sz="1400" b="0">
+              <a:tr h="310896">
+                <a:tc>
+                  <a:txBody>
+                    <a:bodyPr/>
+                    <a:lstStyle/>
+                    <a:p>
+                      <a:pPr>
+                        <a:defRPr sz="1300" b="0">
                           <a:solidFill>
                             <a:srgbClr val="0B2A4A"/>
                           </a:solidFill>
@@ -6202,15 +8233,19 @@
                       </a:r>
                     </a:p>
                   </a:txBody>
-                  <a:tcPr/>
-                </a:tc>
-                <a:tc>
-                  <a:txBody>
-                    <a:bodyPr/>
-                    <a:lstStyle/>
-                    <a:p>
-                      <a:pPr>
-                        <a:defRPr sz="1400" b="0">
+                  <a:tcPr>
+                    <a:solidFill>
+                      <a:srgbClr val="FFFFFF"/>
+                    </a:solidFill>
+                  </a:tcPr>
+                </a:tc>
+                <a:tc>
+                  <a:txBody>
+                    <a:bodyPr/>
+                    <a:lstStyle/>
+                    <a:p>
+                      <a:pPr>
+                        <a:defRPr sz="1300" b="0">
                           <a:solidFill>
                             <a:srgbClr val="0B2A4A"/>
                           </a:solidFill>
@@ -6221,15 +8256,19 @@
                       </a:r>
                     </a:p>
                   </a:txBody>
-                  <a:tcPr/>
-                </a:tc>
-                <a:tc>
-                  <a:txBody>
-                    <a:bodyPr/>
-                    <a:lstStyle/>
-                    <a:p>
-                      <a:pPr>
-                        <a:defRPr sz="1400" b="0">
+                  <a:tcPr>
+                    <a:solidFill>
+                      <a:srgbClr val="FFFFFF"/>
+                    </a:solidFill>
+                  </a:tcPr>
+                </a:tc>
+                <a:tc>
+                  <a:txBody>
+                    <a:bodyPr/>
+                    <a:lstStyle/>
+                    <a:p>
+                      <a:pPr>
+                        <a:defRPr sz="1300" b="0">
                           <a:solidFill>
                             <a:srgbClr val="0B2A4A"/>
                           </a:solidFill>
@@ -6240,15 +8279,19 @@
                       </a:r>
                     </a:p>
                   </a:txBody>
-                  <a:tcPr/>
-                </a:tc>
-                <a:tc>
-                  <a:txBody>
-                    <a:bodyPr/>
-                    <a:lstStyle/>
-                    <a:p>
-                      <a:pPr>
-                        <a:defRPr sz="1400" b="0">
+                  <a:tcPr>
+                    <a:solidFill>
+                      <a:srgbClr val="FFFFFF"/>
+                    </a:solidFill>
+                  </a:tcPr>
+                </a:tc>
+                <a:tc>
+                  <a:txBody>
+                    <a:bodyPr/>
+                    <a:lstStyle/>
+                    <a:p>
+                      <a:pPr>
+                        <a:defRPr sz="1300" b="0">
                           <a:solidFill>
                             <a:srgbClr val="0B2A4A"/>
                           </a:solidFill>
@@ -6259,15 +8302,19 @@
                       </a:r>
                     </a:p>
                   </a:txBody>
-                  <a:tcPr/>
-                </a:tc>
-                <a:tc>
-                  <a:txBody>
-                    <a:bodyPr/>
-                    <a:lstStyle/>
-                    <a:p>
-                      <a:pPr>
-                        <a:defRPr sz="1400" b="0">
+                  <a:tcPr>
+                    <a:solidFill>
+                      <a:srgbClr val="FFFFFF"/>
+                    </a:solidFill>
+                  </a:tcPr>
+                </a:tc>
+                <a:tc>
+                  <a:txBody>
+                    <a:bodyPr/>
+                    <a:lstStyle/>
+                    <a:p>
+                      <a:pPr>
+                        <a:defRPr sz="1300" b="0">
                           <a:solidFill>
                             <a:srgbClr val="0B2A4A"/>
                           </a:solidFill>
@@ -6278,17 +8325,21 @@
                       </a:r>
                     </a:p>
                   </a:txBody>
-                  <a:tcPr/>
+                  <a:tcPr>
+                    <a:solidFill>
+                      <a:srgbClr val="FFFFFF"/>
+                    </a:solidFill>
+                  </a:tcPr>
                 </a:tc>
               </a:tr>
-              <a:tr h="365760">
-                <a:tc>
-                  <a:txBody>
-                    <a:bodyPr/>
-                    <a:lstStyle/>
-                    <a:p>
-                      <a:pPr>
-                        <a:defRPr sz="1400" b="1">
+              <a:tr h="310896">
+                <a:tc>
+                  <a:txBody>
+                    <a:bodyPr/>
+                    <a:lstStyle/>
+                    <a:p>
+                      <a:pPr>
+                        <a:defRPr sz="1300" b="1">
                           <a:solidFill>
                             <a:srgbClr val="1F6FB2"/>
                           </a:solidFill>
@@ -6299,15 +8350,19 @@
                       </a:r>
                     </a:p>
                   </a:txBody>
-                  <a:tcPr/>
-                </a:tc>
-                <a:tc>
-                  <a:txBody>
-                    <a:bodyPr/>
-                    <a:lstStyle/>
-                    <a:p>
-                      <a:pPr>
-                        <a:defRPr sz="1400" b="1">
+                  <a:tcPr>
+                    <a:solidFill>
+                      <a:srgbClr val="ECF1F6"/>
+                    </a:solidFill>
+                  </a:tcPr>
+                </a:tc>
+                <a:tc>
+                  <a:txBody>
+                    <a:bodyPr/>
+                    <a:lstStyle/>
+                    <a:p>
+                      <a:pPr>
+                        <a:defRPr sz="1300" b="1">
                           <a:solidFill>
                             <a:srgbClr val="1F6FB2"/>
                           </a:solidFill>
@@ -6318,15 +8373,19 @@
                       </a:r>
                     </a:p>
                   </a:txBody>
-                  <a:tcPr/>
-                </a:tc>
-                <a:tc>
-                  <a:txBody>
-                    <a:bodyPr/>
-                    <a:lstStyle/>
-                    <a:p>
-                      <a:pPr>
-                        <a:defRPr sz="1400" b="1">
+                  <a:tcPr>
+                    <a:solidFill>
+                      <a:srgbClr val="ECF1F6"/>
+                    </a:solidFill>
+                  </a:tcPr>
+                </a:tc>
+                <a:tc>
+                  <a:txBody>
+                    <a:bodyPr/>
+                    <a:lstStyle/>
+                    <a:p>
+                      <a:pPr>
+                        <a:defRPr sz="1300" b="1">
                           <a:solidFill>
                             <a:srgbClr val="1F6FB2"/>
                           </a:solidFill>
@@ -6337,15 +8396,19 @@
                       </a:r>
                     </a:p>
                   </a:txBody>
-                  <a:tcPr/>
-                </a:tc>
-                <a:tc>
-                  <a:txBody>
-                    <a:bodyPr/>
-                    <a:lstStyle/>
-                    <a:p>
-                      <a:pPr>
-                        <a:defRPr sz="1400" b="1">
+                  <a:tcPr>
+                    <a:solidFill>
+                      <a:srgbClr val="ECF1F6"/>
+                    </a:solidFill>
+                  </a:tcPr>
+                </a:tc>
+                <a:tc>
+                  <a:txBody>
+                    <a:bodyPr/>
+                    <a:lstStyle/>
+                    <a:p>
+                      <a:pPr>
+                        <a:defRPr sz="1300" b="1">
                           <a:solidFill>
                             <a:srgbClr val="1F6FB2"/>
                           </a:solidFill>
@@ -6356,15 +8419,19 @@
                       </a:r>
                     </a:p>
                   </a:txBody>
-                  <a:tcPr/>
-                </a:tc>
-                <a:tc>
-                  <a:txBody>
-                    <a:bodyPr/>
-                    <a:lstStyle/>
-                    <a:p>
-                      <a:pPr>
-                        <a:defRPr sz="1400" b="1">
+                  <a:tcPr>
+                    <a:solidFill>
+                      <a:srgbClr val="ECF1F6"/>
+                    </a:solidFill>
+                  </a:tcPr>
+                </a:tc>
+                <a:tc>
+                  <a:txBody>
+                    <a:bodyPr/>
+                    <a:lstStyle/>
+                    <a:p>
+                      <a:pPr>
+                        <a:defRPr sz="1300" b="1">
                           <a:solidFill>
                             <a:srgbClr val="1F6FB2"/>
                           </a:solidFill>
@@ -6375,17 +8442,21 @@
                       </a:r>
                     </a:p>
                   </a:txBody>
-                  <a:tcPr/>
+                  <a:tcPr>
+                    <a:solidFill>
+                      <a:srgbClr val="ECF1F6"/>
+                    </a:solidFill>
+                  </a:tcPr>
                 </a:tc>
               </a:tr>
-              <a:tr h="365760">
-                <a:tc>
-                  <a:txBody>
-                    <a:bodyPr/>
-                    <a:lstStyle/>
-                    <a:p>
-                      <a:pPr>
-                        <a:defRPr sz="1400" b="0">
+              <a:tr h="310896">
+                <a:tc>
+                  <a:txBody>
+                    <a:bodyPr/>
+                    <a:lstStyle/>
+                    <a:p>
+                      <a:pPr>
+                        <a:defRPr sz="1300" b="0">
                           <a:solidFill>
                             <a:srgbClr val="0B2A4A"/>
                           </a:solidFill>
@@ -6396,15 +8467,19 @@
                       </a:r>
                     </a:p>
                   </a:txBody>
-                  <a:tcPr/>
-                </a:tc>
-                <a:tc>
-                  <a:txBody>
-                    <a:bodyPr/>
-                    <a:lstStyle/>
-                    <a:p>
-                      <a:pPr>
-                        <a:defRPr sz="1400" b="0">
+                  <a:tcPr>
+                    <a:solidFill>
+                      <a:srgbClr val="FFFFFF"/>
+                    </a:solidFill>
+                  </a:tcPr>
+                </a:tc>
+                <a:tc>
+                  <a:txBody>
+                    <a:bodyPr/>
+                    <a:lstStyle/>
+                    <a:p>
+                      <a:pPr>
+                        <a:defRPr sz="1300" b="0">
                           <a:solidFill>
                             <a:srgbClr val="0B2A4A"/>
                           </a:solidFill>
@@ -6415,15 +8490,19 @@
                       </a:r>
                     </a:p>
                   </a:txBody>
-                  <a:tcPr/>
-                </a:tc>
-                <a:tc>
-                  <a:txBody>
-                    <a:bodyPr/>
-                    <a:lstStyle/>
-                    <a:p>
-                      <a:pPr>
-                        <a:defRPr sz="1400" b="0">
+                  <a:tcPr>
+                    <a:solidFill>
+                      <a:srgbClr val="FFFFFF"/>
+                    </a:solidFill>
+                  </a:tcPr>
+                </a:tc>
+                <a:tc>
+                  <a:txBody>
+                    <a:bodyPr/>
+                    <a:lstStyle/>
+                    <a:p>
+                      <a:pPr>
+                        <a:defRPr sz="1300" b="0">
                           <a:solidFill>
                             <a:srgbClr val="0B2A4A"/>
                           </a:solidFill>
@@ -6434,15 +8513,19 @@
                       </a:r>
                     </a:p>
                   </a:txBody>
-                  <a:tcPr/>
-                </a:tc>
-                <a:tc>
-                  <a:txBody>
-                    <a:bodyPr/>
-                    <a:lstStyle/>
-                    <a:p>
-                      <a:pPr>
-                        <a:defRPr sz="1400" b="0">
+                  <a:tcPr>
+                    <a:solidFill>
+                      <a:srgbClr val="FFFFFF"/>
+                    </a:solidFill>
+                  </a:tcPr>
+                </a:tc>
+                <a:tc>
+                  <a:txBody>
+                    <a:bodyPr/>
+                    <a:lstStyle/>
+                    <a:p>
+                      <a:pPr>
+                        <a:defRPr sz="1300" b="0">
                           <a:solidFill>
                             <a:srgbClr val="0B2A4A"/>
                           </a:solidFill>
@@ -6453,15 +8536,19 @@
                       </a:r>
                     </a:p>
                   </a:txBody>
-                  <a:tcPr/>
-                </a:tc>
-                <a:tc>
-                  <a:txBody>
-                    <a:bodyPr/>
-                    <a:lstStyle/>
-                    <a:p>
-                      <a:pPr>
-                        <a:defRPr sz="1400" b="0">
+                  <a:tcPr>
+                    <a:solidFill>
+                      <a:srgbClr val="FFFFFF"/>
+                    </a:solidFill>
+                  </a:tcPr>
+                </a:tc>
+                <a:tc>
+                  <a:txBody>
+                    <a:bodyPr/>
+                    <a:lstStyle/>
+                    <a:p>
+                      <a:pPr>
+                        <a:defRPr sz="1300" b="0">
                           <a:solidFill>
                             <a:srgbClr val="0B2A4A"/>
                           </a:solidFill>
@@ -6472,7 +8559,11 @@
                       </a:r>
                     </a:p>
                   </a:txBody>
-                  <a:tcPr/>
+                  <a:tcPr>
+                    <a:solidFill>
+                      <a:srgbClr val="FFFFFF"/>
+                    </a:solidFill>
+                  </a:tcPr>
                 </a:tc>
               </a:tr>
             </a:tbl>
@@ -6481,14 +8572,58 @@
       </p:graphicFrame>
       <p:sp>
         <p:nvSpPr>
-          <p:cNvPr id="4" name="TextBox 3"/>
+          <p:cNvPr id="6" name="Rectangle 5"/>
+          <p:cNvSpPr/>
+          <p:nvPr/>
+        </p:nvSpPr>
+        <p:spPr>
+          <a:xfrm>
+            <a:off x="548640" y="3465576"/>
+            <a:ext cx="11091672" cy="914400"/>
+          </a:xfrm>
+          <a:prstGeom prst="rect">
+            <a:avLst/>
+          </a:prstGeom>
+          <a:solidFill>
+            <a:srgbClr val="ECF1F6"/>
+          </a:solidFill>
+          <a:ln>
+            <a:noFill/>
+          </a:ln>
+          <a:effectLst/>
+        </p:spPr>
+        <p:style>
+          <a:lnRef idx="1">
+            <a:schemeClr val="accent1"/>
+          </a:lnRef>
+          <a:fillRef idx="3">
+            <a:schemeClr val="accent1"/>
+          </a:fillRef>
+          <a:effectRef idx="2">
+            <a:schemeClr val="accent1"/>
+          </a:effectRef>
+          <a:fontRef idx="minor">
+            <a:schemeClr val="lt1"/>
+          </a:fontRef>
+        </p:style>
+        <p:txBody>
+          <a:bodyPr rtlCol="0" anchor="ctr"/>
+          <a:lstStyle/>
+          <a:p>
+            <a:pPr algn="ctr"/>
+          </a:p>
+        </p:txBody>
+      </p:sp>
+      <p:sp>
+        <p:nvSpPr>
+          <p:cNvPr id="7" name="TextBox 6"/>
           <p:cNvSpPr txBox="1"/>
           <p:nvPr/>
         </p:nvSpPr>
         <p:spPr>
           <a:xfrm>
-            <a:off x="822960" y="4069080"/>
-            <a:ext cx="10607040" cy="1280160"/>
+            <a:off x="731520" y="3520440"/>
+            <a:ext cx="10789920" cy="822960"/>
           </a:xfrm>
           <a:prstGeom prst="rect">
             <a:avLst/>
@@ -6496,20 +8631,90 @@
           <a:noFill/>
         </p:spPr>
         <p:txBody>
+          <a:bodyPr wrap="square" anchor="ctr">
+            <a:spAutoFit/>
+          </a:bodyPr>
+          <a:lstStyle/>
+          <a:p>
+            <a:pPr>
+              <a:defRPr sz="1300" i="1">
+                <a:solidFill>
+                  <a:srgbClr val="1F6FB2"/>
+                </a:solidFill>
+              </a:defRPr>
+            </a:pPr>
+            <a:r>
+              <a:t>What it means:  M1 beats all baselines on risk-adjusted return and cuts drawdown the most (-22% vs -30%). Adding M2 makes every metric slightly worse.</a:t>
+            </a:r>
+          </a:p>
+        </p:txBody>
+      </p:sp>
+      <p:sp>
+        <p:nvSpPr>
+          <p:cNvPr id="8" name="TextBox 7"/>
+          <p:cNvSpPr txBox="1"/>
+          <p:nvPr/>
+        </p:nvSpPr>
+        <p:spPr>
+          <a:xfrm>
+            <a:off x="548640" y="6419088"/>
+            <a:ext cx="11155680" cy="320040"/>
+          </a:xfrm>
+          <a:prstGeom prst="rect">
+            <a:avLst/>
+          </a:prstGeom>
+          <a:noFill/>
+        </p:spPr>
+        <p:txBody>
           <a:bodyPr wrap="square">
             <a:spAutoFit/>
           </a:bodyPr>
           <a:lstStyle/>
           <a:p>
             <a:pPr>
-              <a:defRPr sz="1600" i="1">
-                <a:solidFill>
-                  <a:srgbClr val="1F6FB2"/>
+              <a:defRPr sz="900">
+                <a:solidFill>
+                  <a:srgbClr val="555B66"/>
                 </a:solidFill>
               </a:defRPr>
             </a:pPr>
             <a:r>
-              <a:t>What it means: M1 edges all baselines on risk-adjusted return and cuts drawdown the most (-22% vs -30%). Adding M2 makes every metric slightly worse.</a:t>
+              <a:t>Multi-Asset Meta-Labeling  ·  June 18, 2026</a:t>
+            </a:r>
+          </a:p>
+        </p:txBody>
+      </p:sp>
+      <p:sp>
+        <p:nvSpPr>
+          <p:cNvPr id="9" name="TextBox 8"/>
+          <p:cNvSpPr txBox="1"/>
+          <p:nvPr/>
+        </p:nvSpPr>
+        <p:spPr>
+          <a:xfrm>
+            <a:off x="11338560" y="6419088"/>
+            <a:ext cx="640080" cy="320040"/>
+          </a:xfrm>
+          <a:prstGeom prst="rect">
+            <a:avLst/>
+          </a:prstGeom>
+          <a:noFill/>
+        </p:spPr>
+        <p:txBody>
+          <a:bodyPr wrap="square">
+            <a:spAutoFit/>
+          </a:bodyPr>
+          <a:lstStyle/>
+          <a:p>
+            <a:pPr>
+              <a:defRPr sz="900">
+                <a:solidFill>
+                  <a:srgbClr val="555B66"/>
+                </a:solidFill>
+              </a:defRPr>
+            </a:pPr>
+            <a:r>
+              <a:t>6</a:t>
             </a:r>
           </a:p>
         </p:txBody>
@@ -6534,14 +8739,58 @@
       <p:grpSpPr/>
       <p:sp>
         <p:nvSpPr>
-          <p:cNvPr id="2" name="TextBox 1"/>
+          <p:cNvPr id="2" name="Rectangle 1"/>
+          <p:cNvSpPr/>
+          <p:nvPr/>
+        </p:nvSpPr>
+        <p:spPr>
+          <a:xfrm>
+            <a:off x="0" y="0"/>
+            <a:ext cx="201168" cy="6858000"/>
+          </a:xfrm>
+          <a:prstGeom prst="rect">
+            <a:avLst/>
+          </a:prstGeom>
+          <a:solidFill>
+            <a:srgbClr val="0B2A4A"/>
+          </a:solidFill>
+          <a:ln>
+            <a:noFill/>
+          </a:ln>
+          <a:effectLst/>
+        </p:spPr>
+        <p:style>
+          <a:lnRef idx="1">
+            <a:schemeClr val="accent1"/>
+          </a:lnRef>
+          <a:fillRef idx="3">
+            <a:schemeClr val="accent1"/>
+          </a:fillRef>
+          <a:effectRef idx="2">
+            <a:schemeClr val="accent1"/>
+          </a:effectRef>
+          <a:fontRef idx="minor">
+            <a:schemeClr val="lt1"/>
+          </a:fontRef>
+        </p:style>
+        <p:txBody>
+          <a:bodyPr rtlCol="0" anchor="ctr"/>
+          <a:lstStyle/>
+          <a:p>
+            <a:pPr algn="ctr"/>
+          </a:p>
+        </p:txBody>
+      </p:sp>
+      <p:sp>
+        <p:nvSpPr>
+          <p:cNvPr id="3" name="TextBox 2"/>
           <p:cNvSpPr txBox="1"/>
           <p:nvPr/>
         </p:nvSpPr>
         <p:spPr>
           <a:xfrm>
-            <a:off x="640080" y="411480"/>
-            <a:ext cx="10972800" cy="914400"/>
+            <a:off x="548640" y="320040"/>
+            <a:ext cx="11338560" cy="822960"/>
           </a:xfrm>
           <a:prstGeom prst="rect">
             <a:avLst/>
@@ -6555,29 +8804,73 @@
           <a:lstStyle/>
           <a:p>
             <a:pPr>
-              <a:defRPr sz="3000" b="1">
+              <a:defRPr sz="2600" b="1">
                 <a:solidFill>
                   <a:srgbClr val="0B2A4A"/>
                 </a:solidFill>
               </a:defRPr>
             </a:pPr>
             <a:r>
-              <a:t>Results — Walk-Forward (Sharpe by window)</a:t>
-            </a:r>
+              <a:t>Results — Walk-Forward   (Sharpe by window)</a:t>
+            </a:r>
+          </a:p>
+        </p:txBody>
+      </p:sp>
+      <p:sp>
+        <p:nvSpPr>
+          <p:cNvPr id="4" name="Rectangle 3"/>
+          <p:cNvSpPr/>
+          <p:nvPr/>
+        </p:nvSpPr>
+        <p:spPr>
+          <a:xfrm>
+            <a:off x="566928" y="1078992"/>
+            <a:ext cx="3840480" cy="41148"/>
+          </a:xfrm>
+          <a:prstGeom prst="rect">
+            <a:avLst/>
+          </a:prstGeom>
+          <a:solidFill>
+            <a:srgbClr val="1F6FB2"/>
+          </a:solidFill>
+          <a:ln>
+            <a:noFill/>
+          </a:ln>
+          <a:effectLst/>
+        </p:spPr>
+        <p:style>
+          <a:lnRef idx="1">
+            <a:schemeClr val="accent1"/>
+          </a:lnRef>
+          <a:fillRef idx="3">
+            <a:schemeClr val="accent1"/>
+          </a:fillRef>
+          <a:effectRef idx="2">
+            <a:schemeClr val="accent1"/>
+          </a:effectRef>
+          <a:fontRef idx="minor">
+            <a:schemeClr val="lt1"/>
+          </a:fontRef>
+        </p:style>
+        <p:txBody>
+          <a:bodyPr rtlCol="0" anchor="ctr"/>
+          <a:lstStyle/>
+          <a:p>
+            <a:pPr algn="ctr"/>
           </a:p>
         </p:txBody>
       </p:sp>
       <p:graphicFrame>
         <p:nvGraphicFramePr>
-          <p:cNvPr id="3" name="Table 2"/>
+          <p:cNvPr id="5" name="Table 4"/>
           <p:cNvGraphicFramePr>
             <a:graphicFrameLocks noGrp="1"/>
           </p:cNvGraphicFramePr>
           <p:nvPr/>
         </p:nvGraphicFramePr>
         <p:xfrm>
-          <a:off x="731520" y="1554480"/>
-          <a:ext cx="10698480" cy="1828800"/>
+          <a:off x="640080" y="1371600"/>
+          <a:ext cx="10881360" cy="1554480"/>
         </p:xfrm>
         <a:graphic>
           <a:graphicData uri="http://schemas.openxmlformats.org/drawingml/2006/table">
@@ -6586,19 +8879,19 @@
                 <a:tableStyleId>{5C22544A-7EE6-4342-B048-85BDC9FD1C3A}</a:tableStyleId>
               </a:tblPr>
               <a:tblGrid>
-                <a:gridCol w="2674620"/>
-                <a:gridCol w="2674620"/>
-                <a:gridCol w="2674620"/>
-                <a:gridCol w="2674620"/>
+                <a:gridCol w="2720340"/>
+                <a:gridCol w="2720340"/>
+                <a:gridCol w="2720340"/>
+                <a:gridCol w="2720340"/>
               </a:tblGrid>
-              <a:tr h="365760">
-                <a:tc>
-                  <a:txBody>
-                    <a:bodyPr/>
-                    <a:lstStyle/>
-                    <a:p>
-                      <a:pPr>
-                        <a:defRPr sz="1500" b="1">
+              <a:tr h="310896">
+                <a:tc>
+                  <a:txBody>
+                    <a:bodyPr/>
+                    <a:lstStyle/>
+                    <a:p>
+                      <a:pPr>
+                        <a:defRPr sz="1300" b="1">
                           <a:solidFill>
                             <a:srgbClr val="FFFFFF"/>
                           </a:solidFill>
@@ -6621,7 +8914,7 @@
                     <a:lstStyle/>
                     <a:p>
                       <a:pPr>
-                        <a:defRPr sz="1500" b="1">
+                        <a:defRPr sz="1300" b="1">
                           <a:solidFill>
                             <a:srgbClr val="FFFFFF"/>
                           </a:solidFill>
@@ -6644,7 +8937,7 @@
                     <a:lstStyle/>
                     <a:p>
                       <a:pPr>
-                        <a:defRPr sz="1500" b="1">
+                        <a:defRPr sz="1300" b="1">
                           <a:solidFill>
                             <a:srgbClr val="FFFFFF"/>
                           </a:solidFill>
@@ -6667,7 +8960,7 @@
                     <a:lstStyle/>
                     <a:p>
                       <a:pPr>
-                        <a:defRPr sz="1500" b="1">
+                        <a:defRPr sz="1300" b="1">
                           <a:solidFill>
                             <a:srgbClr val="FFFFFF"/>
                           </a:solidFill>
@@ -6685,14 +8978,14 @@
                   </a:tcPr>
                 </a:tc>
               </a:tr>
-              <a:tr h="365760">
-                <a:tc>
-                  <a:txBody>
-                    <a:bodyPr/>
-                    <a:lstStyle/>
-                    <a:p>
-                      <a:pPr>
-                        <a:defRPr sz="1400" b="0">
+              <a:tr h="310896">
+                <a:tc>
+                  <a:txBody>
+                    <a:bodyPr/>
+                    <a:lstStyle/>
+                    <a:p>
+                      <a:pPr>
+                        <a:defRPr sz="1300" b="0">
                           <a:solidFill>
                             <a:srgbClr val="0B2A4A"/>
                           </a:solidFill>
@@ -6703,15 +8996,19 @@
                       </a:r>
                     </a:p>
                   </a:txBody>
-                  <a:tcPr/>
-                </a:tc>
-                <a:tc>
-                  <a:txBody>
-                    <a:bodyPr/>
-                    <a:lstStyle/>
-                    <a:p>
-                      <a:pPr>
-                        <a:defRPr sz="1400" b="0">
+                  <a:tcPr>
+                    <a:solidFill>
+                      <a:srgbClr val="FFFFFF"/>
+                    </a:solidFill>
+                  </a:tcPr>
+                </a:tc>
+                <a:tc>
+                  <a:txBody>
+                    <a:bodyPr/>
+                    <a:lstStyle/>
+                    <a:p>
+                      <a:pPr>
+                        <a:defRPr sz="1300" b="0">
                           <a:solidFill>
                             <a:srgbClr val="0B2A4A"/>
                           </a:solidFill>
@@ -6722,15 +9019,19 @@
                       </a:r>
                     </a:p>
                   </a:txBody>
-                  <a:tcPr/>
-                </a:tc>
-                <a:tc>
-                  <a:txBody>
-                    <a:bodyPr/>
-                    <a:lstStyle/>
-                    <a:p>
-                      <a:pPr>
-                        <a:defRPr sz="1400" b="0">
+                  <a:tcPr>
+                    <a:solidFill>
+                      <a:srgbClr val="FFFFFF"/>
+                    </a:solidFill>
+                  </a:tcPr>
+                </a:tc>
+                <a:tc>
+                  <a:txBody>
+                    <a:bodyPr/>
+                    <a:lstStyle/>
+                    <a:p>
+                      <a:pPr>
+                        <a:defRPr sz="1300" b="0">
                           <a:solidFill>
                             <a:srgbClr val="0B2A4A"/>
                           </a:solidFill>
@@ -6741,15 +9042,19 @@
                       </a:r>
                     </a:p>
                   </a:txBody>
-                  <a:tcPr/>
-                </a:tc>
-                <a:tc>
-                  <a:txBody>
-                    <a:bodyPr/>
-                    <a:lstStyle/>
-                    <a:p>
-                      <a:pPr>
-                        <a:defRPr sz="1400" b="0">
+                  <a:tcPr>
+                    <a:solidFill>
+                      <a:srgbClr val="FFFFFF"/>
+                    </a:solidFill>
+                  </a:tcPr>
+                </a:tc>
+                <a:tc>
+                  <a:txBody>
+                    <a:bodyPr/>
+                    <a:lstStyle/>
+                    <a:p>
+                      <a:pPr>
+                        <a:defRPr sz="1300" b="0">
                           <a:solidFill>
                             <a:srgbClr val="0B2A4A"/>
                           </a:solidFill>
@@ -6760,17 +9065,21 @@
                       </a:r>
                     </a:p>
                   </a:txBody>
-                  <a:tcPr/>
+                  <a:tcPr>
+                    <a:solidFill>
+                      <a:srgbClr val="FFFFFF"/>
+                    </a:solidFill>
+                  </a:tcPr>
                 </a:tc>
               </a:tr>
-              <a:tr h="365760">
-                <a:tc>
-                  <a:txBody>
-                    <a:bodyPr/>
-                    <a:lstStyle/>
-                    <a:p>
-                      <a:pPr>
-                        <a:defRPr sz="1400" b="0">
+              <a:tr h="310896">
+                <a:tc>
+                  <a:txBody>
+                    <a:bodyPr/>
+                    <a:lstStyle/>
+                    <a:p>
+                      <a:pPr>
+                        <a:defRPr sz="1300" b="0">
                           <a:solidFill>
                             <a:srgbClr val="0B2A4A"/>
                           </a:solidFill>
@@ -6781,15 +9090,19 @@
                       </a:r>
                     </a:p>
                   </a:txBody>
-                  <a:tcPr/>
-                </a:tc>
-                <a:tc>
-                  <a:txBody>
-                    <a:bodyPr/>
-                    <a:lstStyle/>
-                    <a:p>
-                      <a:pPr>
-                        <a:defRPr sz="1400" b="0">
+                  <a:tcPr>
+                    <a:solidFill>
+                      <a:srgbClr val="FFFFFF"/>
+                    </a:solidFill>
+                  </a:tcPr>
+                </a:tc>
+                <a:tc>
+                  <a:txBody>
+                    <a:bodyPr/>
+                    <a:lstStyle/>
+                    <a:p>
+                      <a:pPr>
+                        <a:defRPr sz="1300" b="0">
                           <a:solidFill>
                             <a:srgbClr val="0B2A4A"/>
                           </a:solidFill>
@@ -6800,15 +9113,19 @@
                       </a:r>
                     </a:p>
                   </a:txBody>
-                  <a:tcPr/>
-                </a:tc>
-                <a:tc>
-                  <a:txBody>
-                    <a:bodyPr/>
-                    <a:lstStyle/>
-                    <a:p>
-                      <a:pPr>
-                        <a:defRPr sz="1400" b="0">
+                  <a:tcPr>
+                    <a:solidFill>
+                      <a:srgbClr val="FFFFFF"/>
+                    </a:solidFill>
+                  </a:tcPr>
+                </a:tc>
+                <a:tc>
+                  <a:txBody>
+                    <a:bodyPr/>
+                    <a:lstStyle/>
+                    <a:p>
+                      <a:pPr>
+                        <a:defRPr sz="1300" b="0">
                           <a:solidFill>
                             <a:srgbClr val="0B2A4A"/>
                           </a:solidFill>
@@ -6819,15 +9136,19 @@
                       </a:r>
                     </a:p>
                   </a:txBody>
-                  <a:tcPr/>
-                </a:tc>
-                <a:tc>
-                  <a:txBody>
-                    <a:bodyPr/>
-                    <a:lstStyle/>
-                    <a:p>
-                      <a:pPr>
-                        <a:defRPr sz="1400" b="0">
+                  <a:tcPr>
+                    <a:solidFill>
+                      <a:srgbClr val="FFFFFF"/>
+                    </a:solidFill>
+                  </a:tcPr>
+                </a:tc>
+                <a:tc>
+                  <a:txBody>
+                    <a:bodyPr/>
+                    <a:lstStyle/>
+                    <a:p>
+                      <a:pPr>
+                        <a:defRPr sz="1300" b="0">
                           <a:solidFill>
                             <a:srgbClr val="0B2A4A"/>
                           </a:solidFill>
@@ -6838,17 +9159,21 @@
                       </a:r>
                     </a:p>
                   </a:txBody>
-                  <a:tcPr/>
+                  <a:tcPr>
+                    <a:solidFill>
+                      <a:srgbClr val="FFFFFF"/>
+                    </a:solidFill>
+                  </a:tcPr>
                 </a:tc>
               </a:tr>
-              <a:tr h="365760">
-                <a:tc>
-                  <a:txBody>
-                    <a:bodyPr/>
-                    <a:lstStyle/>
-                    <a:p>
-                      <a:pPr>
-                        <a:defRPr sz="1400" b="0">
+              <a:tr h="310896">
+                <a:tc>
+                  <a:txBody>
+                    <a:bodyPr/>
+                    <a:lstStyle/>
+                    <a:p>
+                      <a:pPr>
+                        <a:defRPr sz="1300" b="0">
                           <a:solidFill>
                             <a:srgbClr val="0B2A4A"/>
                           </a:solidFill>
@@ -6859,15 +9184,19 @@
                       </a:r>
                     </a:p>
                   </a:txBody>
-                  <a:tcPr/>
-                </a:tc>
-                <a:tc>
-                  <a:txBody>
-                    <a:bodyPr/>
-                    <a:lstStyle/>
-                    <a:p>
-                      <a:pPr>
-                        <a:defRPr sz="1400" b="0">
+                  <a:tcPr>
+                    <a:solidFill>
+                      <a:srgbClr val="FFFFFF"/>
+                    </a:solidFill>
+                  </a:tcPr>
+                </a:tc>
+                <a:tc>
+                  <a:txBody>
+                    <a:bodyPr/>
+                    <a:lstStyle/>
+                    <a:p>
+                      <a:pPr>
+                        <a:defRPr sz="1300" b="0">
                           <a:solidFill>
                             <a:srgbClr val="0B2A4A"/>
                           </a:solidFill>
@@ -6878,15 +9207,19 @@
                       </a:r>
                     </a:p>
                   </a:txBody>
-                  <a:tcPr/>
-                </a:tc>
-                <a:tc>
-                  <a:txBody>
-                    <a:bodyPr/>
-                    <a:lstStyle/>
-                    <a:p>
-                      <a:pPr>
-                        <a:defRPr sz="1400" b="0">
+                  <a:tcPr>
+                    <a:solidFill>
+                      <a:srgbClr val="FFFFFF"/>
+                    </a:solidFill>
+                  </a:tcPr>
+                </a:tc>
+                <a:tc>
+                  <a:txBody>
+                    <a:bodyPr/>
+                    <a:lstStyle/>
+                    <a:p>
+                      <a:pPr>
+                        <a:defRPr sz="1300" b="0">
                           <a:solidFill>
                             <a:srgbClr val="0B2A4A"/>
                           </a:solidFill>
@@ -6897,15 +9230,19 @@
                       </a:r>
                     </a:p>
                   </a:txBody>
-                  <a:tcPr/>
-                </a:tc>
-                <a:tc>
-                  <a:txBody>
-                    <a:bodyPr/>
-                    <a:lstStyle/>
-                    <a:p>
-                      <a:pPr>
-                        <a:defRPr sz="1400" b="0">
+                  <a:tcPr>
+                    <a:solidFill>
+                      <a:srgbClr val="FFFFFF"/>
+                    </a:solidFill>
+                  </a:tcPr>
+                </a:tc>
+                <a:tc>
+                  <a:txBody>
+                    <a:bodyPr/>
+                    <a:lstStyle/>
+                    <a:p>
+                      <a:pPr>
+                        <a:defRPr sz="1300" b="0">
                           <a:solidFill>
                             <a:srgbClr val="0B2A4A"/>
                           </a:solidFill>
@@ -6916,17 +9253,21 @@
                       </a:r>
                     </a:p>
                   </a:txBody>
-                  <a:tcPr/>
+                  <a:tcPr>
+                    <a:solidFill>
+                      <a:srgbClr val="FFFFFF"/>
+                    </a:solidFill>
+                  </a:tcPr>
                 </a:tc>
               </a:tr>
-              <a:tr h="365760">
-                <a:tc>
-                  <a:txBody>
-                    <a:bodyPr/>
-                    <a:lstStyle/>
-                    <a:p>
-                      <a:pPr>
-                        <a:defRPr sz="1400" b="1">
+              <a:tr h="310896">
+                <a:tc>
+                  <a:txBody>
+                    <a:bodyPr/>
+                    <a:lstStyle/>
+                    <a:p>
+                      <a:pPr>
+                        <a:defRPr sz="1300" b="1">
                           <a:solidFill>
                             <a:srgbClr val="1F6FB2"/>
                           </a:solidFill>
@@ -6937,15 +9278,19 @@
                       </a:r>
                     </a:p>
                   </a:txBody>
-                  <a:tcPr/>
-                </a:tc>
-                <a:tc>
-                  <a:txBody>
-                    <a:bodyPr/>
-                    <a:lstStyle/>
-                    <a:p>
-                      <a:pPr>
-                        <a:defRPr sz="1400" b="1">
+                  <a:tcPr>
+                    <a:solidFill>
+                      <a:srgbClr val="ECF1F6"/>
+                    </a:solidFill>
+                  </a:tcPr>
+                </a:tc>
+                <a:tc>
+                  <a:txBody>
+                    <a:bodyPr/>
+                    <a:lstStyle/>
+                    <a:p>
+                      <a:pPr>
+                        <a:defRPr sz="1300" b="1">
                           <a:solidFill>
                             <a:srgbClr val="1F6FB2"/>
                           </a:solidFill>
@@ -6956,15 +9301,19 @@
                       </a:r>
                     </a:p>
                   </a:txBody>
-                  <a:tcPr/>
-                </a:tc>
-                <a:tc>
-                  <a:txBody>
-                    <a:bodyPr/>
-                    <a:lstStyle/>
-                    <a:p>
-                      <a:pPr>
-                        <a:defRPr sz="1400" b="1">
+                  <a:tcPr>
+                    <a:solidFill>
+                      <a:srgbClr val="ECF1F6"/>
+                    </a:solidFill>
+                  </a:tcPr>
+                </a:tc>
+                <a:tc>
+                  <a:txBody>
+                    <a:bodyPr/>
+                    <a:lstStyle/>
+                    <a:p>
+                      <a:pPr>
+                        <a:defRPr sz="1300" b="1">
                           <a:solidFill>
                             <a:srgbClr val="1F6FB2"/>
                           </a:solidFill>
@@ -6975,15 +9324,19 @@
                       </a:r>
                     </a:p>
                   </a:txBody>
-                  <a:tcPr/>
-                </a:tc>
-                <a:tc>
-                  <a:txBody>
-                    <a:bodyPr/>
-                    <a:lstStyle/>
-                    <a:p>
-                      <a:pPr>
-                        <a:defRPr sz="1400" b="1">
+                  <a:tcPr>
+                    <a:solidFill>
+                      <a:srgbClr val="ECF1F6"/>
+                    </a:solidFill>
+                  </a:tcPr>
+                </a:tc>
+                <a:tc>
+                  <a:txBody>
+                    <a:bodyPr/>
+                    <a:lstStyle/>
+                    <a:p>
+                      <a:pPr>
+                        <a:defRPr sz="1300" b="1">
                           <a:solidFill>
                             <a:srgbClr val="1F6FB2"/>
                           </a:solidFill>
@@ -6994,7 +9347,11 @@
                       </a:r>
                     </a:p>
                   </a:txBody>
-                  <a:tcPr/>
+                  <a:tcPr>
+                    <a:solidFill>
+                      <a:srgbClr val="ECF1F6"/>
+                    </a:solidFill>
+                  </a:tcPr>
                 </a:tc>
               </a:tr>
             </a:tbl>
@@ -7003,14 +9360,58 @@
       </p:graphicFrame>
       <p:sp>
         <p:nvSpPr>
-          <p:cNvPr id="4" name="TextBox 3"/>
+          <p:cNvPr id="6" name="Rectangle 5"/>
+          <p:cNvSpPr/>
+          <p:nvPr/>
+        </p:nvSpPr>
+        <p:spPr>
+          <a:xfrm>
+            <a:off x="548640" y="3154680"/>
+            <a:ext cx="11091672" cy="914400"/>
+          </a:xfrm>
+          <a:prstGeom prst="rect">
+            <a:avLst/>
+          </a:prstGeom>
+          <a:solidFill>
+            <a:srgbClr val="ECF1F6"/>
+          </a:solidFill>
+          <a:ln>
+            <a:noFill/>
+          </a:ln>
+          <a:effectLst/>
+        </p:spPr>
+        <p:style>
+          <a:lnRef idx="1">
+            <a:schemeClr val="accent1"/>
+          </a:lnRef>
+          <a:fillRef idx="3">
+            <a:schemeClr val="accent1"/>
+          </a:fillRef>
+          <a:effectRef idx="2">
+            <a:schemeClr val="accent1"/>
+          </a:effectRef>
+          <a:fontRef idx="minor">
+            <a:schemeClr val="lt1"/>
+          </a:fontRef>
+        </p:style>
+        <p:txBody>
+          <a:bodyPr rtlCol="0" anchor="ctr"/>
+          <a:lstStyle/>
+          <a:p>
+            <a:pPr algn="ctr"/>
+          </a:p>
+        </p:txBody>
+      </p:sp>
+      <p:sp>
+        <p:nvSpPr>
+          <p:cNvPr id="7" name="TextBox 6"/>
           <p:cNvSpPr txBox="1"/>
           <p:nvPr/>
         </p:nvSpPr>
         <p:spPr>
           <a:xfrm>
-            <a:off x="822960" y="3703320"/>
-            <a:ext cx="10607040" cy="1280160"/>
+            <a:off x="731520" y="3209544"/>
+            <a:ext cx="10789920" cy="822960"/>
           </a:xfrm>
           <a:prstGeom prst="rect">
             <a:avLst/>
@@ -7018,20 +9419,90 @@
           <a:noFill/>
         </p:spPr>
         <p:txBody>
+          <a:bodyPr wrap="square" anchor="ctr">
+            <a:spAutoFit/>
+          </a:bodyPr>
+          <a:lstStyle/>
+          <a:p>
+            <a:pPr>
+              <a:defRPr sz="1300" i="1">
+                <a:solidFill>
+                  <a:srgbClr val="1F6FB2"/>
+                </a:solidFill>
+              </a:defRPr>
+            </a:pPr>
+            <a:r>
+              <a:t>What it means:  M1's edge over equal-weight is concentrated in 2021+, not uniform. Full-sample numbers flatter M1 than the regime-by-regime view.</a:t>
+            </a:r>
+          </a:p>
+        </p:txBody>
+      </p:sp>
+      <p:sp>
+        <p:nvSpPr>
+          <p:cNvPr id="8" name="TextBox 7"/>
+          <p:cNvSpPr txBox="1"/>
+          <p:nvPr/>
+        </p:nvSpPr>
+        <p:spPr>
+          <a:xfrm>
+            <a:off x="548640" y="6419088"/>
+            <a:ext cx="11155680" cy="320040"/>
+          </a:xfrm>
+          <a:prstGeom prst="rect">
+            <a:avLst/>
+          </a:prstGeom>
+          <a:noFill/>
+        </p:spPr>
+        <p:txBody>
           <a:bodyPr wrap="square">
             <a:spAutoFit/>
           </a:bodyPr>
           <a:lstStyle/>
           <a:p>
             <a:pPr>
-              <a:defRPr sz="1600" i="1">
-                <a:solidFill>
-                  <a:srgbClr val="1F6FB2"/>
+              <a:defRPr sz="900">
+                <a:solidFill>
+                  <a:srgbClr val="555B66"/>
                 </a:solidFill>
               </a:defRPr>
             </a:pPr>
             <a:r>
-              <a:t>What it means: M1's edge over equal-weight is concentrated in the 2021+ window, not uniform. Full-sample numbers flatter M1 than the regime-by-regime view does.</a:t>
+              <a:t>Multi-Asset Meta-Labeling  ·  June 18, 2026</a:t>
+            </a:r>
+          </a:p>
+        </p:txBody>
+      </p:sp>
+      <p:sp>
+        <p:nvSpPr>
+          <p:cNvPr id="9" name="TextBox 8"/>
+          <p:cNvSpPr txBox="1"/>
+          <p:nvPr/>
+        </p:nvSpPr>
+        <p:spPr>
+          <a:xfrm>
+            <a:off x="11338560" y="6419088"/>
+            <a:ext cx="640080" cy="320040"/>
+          </a:xfrm>
+          <a:prstGeom prst="rect">
+            <a:avLst/>
+          </a:prstGeom>
+          <a:noFill/>
+        </p:spPr>
+        <p:txBody>
+          <a:bodyPr wrap="square">
+            <a:spAutoFit/>
+          </a:bodyPr>
+          <a:lstStyle/>
+          <a:p>
+            <a:pPr>
+              <a:defRPr sz="900">
+                <a:solidFill>
+                  <a:srgbClr val="555B66"/>
+                </a:solidFill>
+              </a:defRPr>
+            </a:pPr>
+            <a:r>
+              <a:t>7</a:t>
             </a:r>
           </a:p>
         </p:txBody>
@@ -7056,14 +9527,58 @@
       <p:grpSpPr/>
       <p:sp>
         <p:nvSpPr>
-          <p:cNvPr id="2" name="TextBox 1"/>
+          <p:cNvPr id="2" name="Rectangle 1"/>
+          <p:cNvSpPr/>
+          <p:nvPr/>
+        </p:nvSpPr>
+        <p:spPr>
+          <a:xfrm>
+            <a:off x="0" y="0"/>
+            <a:ext cx="201168" cy="6858000"/>
+          </a:xfrm>
+          <a:prstGeom prst="rect">
+            <a:avLst/>
+          </a:prstGeom>
+          <a:solidFill>
+            <a:srgbClr val="0B2A4A"/>
+          </a:solidFill>
+          <a:ln>
+            <a:noFill/>
+          </a:ln>
+          <a:effectLst/>
+        </p:spPr>
+        <p:style>
+          <a:lnRef idx="1">
+            <a:schemeClr val="accent1"/>
+          </a:lnRef>
+          <a:fillRef idx="3">
+            <a:schemeClr val="accent1"/>
+          </a:fillRef>
+          <a:effectRef idx="2">
+            <a:schemeClr val="accent1"/>
+          </a:effectRef>
+          <a:fontRef idx="minor">
+            <a:schemeClr val="lt1"/>
+          </a:fontRef>
+        </p:style>
+        <p:txBody>
+          <a:bodyPr rtlCol="0" anchor="ctr"/>
+          <a:lstStyle/>
+          <a:p>
+            <a:pPr algn="ctr"/>
+          </a:p>
+        </p:txBody>
+      </p:sp>
+      <p:sp>
+        <p:nvSpPr>
+          <p:cNvPr id="3" name="TextBox 2"/>
           <p:cNvSpPr txBox="1"/>
           <p:nvPr/>
         </p:nvSpPr>
         <p:spPr>
           <a:xfrm>
-            <a:off x="640080" y="411480"/>
-            <a:ext cx="10972800" cy="914400"/>
+            <a:off x="548640" y="320040"/>
+            <a:ext cx="11338560" cy="822960"/>
           </a:xfrm>
           <a:prstGeom prst="rect">
             <a:avLst/>
@@ -7077,7 +9592,7 @@
           <a:lstStyle/>
           <a:p>
             <a:pPr>
-              <a:defRPr sz="3000" b="1">
+              <a:defRPr sz="2600" b="1">
                 <a:solidFill>
                   <a:srgbClr val="0B2A4A"/>
                 </a:solidFill>
@@ -7091,14 +9606,58 @@
       </p:sp>
       <p:sp>
         <p:nvSpPr>
-          <p:cNvPr id="3" name="TextBox 2"/>
+          <p:cNvPr id="4" name="Rectangle 3"/>
+          <p:cNvSpPr/>
+          <p:nvPr/>
+        </p:nvSpPr>
+        <p:spPr>
+          <a:xfrm>
+            <a:off x="566928" y="1078992"/>
+            <a:ext cx="3840480" cy="41148"/>
+          </a:xfrm>
+          <a:prstGeom prst="rect">
+            <a:avLst/>
+          </a:prstGeom>
+          <a:solidFill>
+            <a:srgbClr val="1F6FB2"/>
+          </a:solidFill>
+          <a:ln>
+            <a:noFill/>
+          </a:ln>
+          <a:effectLst/>
+        </p:spPr>
+        <p:style>
+          <a:lnRef idx="1">
+            <a:schemeClr val="accent1"/>
+          </a:lnRef>
+          <a:fillRef idx="3">
+            <a:schemeClr val="accent1"/>
+          </a:fillRef>
+          <a:effectRef idx="2">
+            <a:schemeClr val="accent1"/>
+          </a:effectRef>
+          <a:fontRef idx="minor">
+            <a:schemeClr val="lt1"/>
+          </a:fontRef>
+        </p:style>
+        <p:txBody>
+          <a:bodyPr rtlCol="0" anchor="ctr"/>
+          <a:lstStyle/>
+          <a:p>
+            <a:pPr algn="ctr"/>
+          </a:p>
+        </p:txBody>
+      </p:sp>
+      <p:sp>
+        <p:nvSpPr>
+          <p:cNvPr id="5" name="TextBox 4"/>
           <p:cNvSpPr txBox="1"/>
           <p:nvPr/>
         </p:nvSpPr>
         <p:spPr>
           <a:xfrm>
-            <a:off x="822960" y="1463040"/>
-            <a:ext cx="10607040" cy="4206240"/>
+            <a:off x="640080" y="1325880"/>
+            <a:ext cx="10972800" cy="4297680"/>
           </a:xfrm>
           <a:prstGeom prst="rect">
             <a:avLst/>
@@ -7113,90 +9672,134 @@
           <a:p>
             <a:pPr>
               <a:spcAft>
-                <a:spcPts val="700"/>
+                <a:spcPts val="500"/>
               </a:spcAft>
-              <a:defRPr sz="2000">
+              <a:defRPr sz="1700" b="1">
                 <a:solidFill>
                   <a:srgbClr val="0B2A4A"/>
                 </a:solidFill>
               </a:defRPr>
             </a:pPr>
             <a:r>
-              <a:t>• M2's probabilities carry no information — realized success is flat across every predicted bucket:</a:t>
+              <a:t>■  M2's probabilities carry no information — realized success is flat across every predicted bucket:</a:t>
             </a:r>
           </a:p>
           <a:p>
             <a:pPr lvl="1">
               <a:spcAft>
-                <a:spcPts val="700"/>
+                <a:spcPts val="500"/>
               </a:spcAft>
-              <a:defRPr sz="1700">
+              <a:defRPr sz="1400" b="0">
                 <a:solidFill>
                   <a:srgbClr val="555B66"/>
                 </a:solidFill>
               </a:defRPr>
             </a:pPr>
             <a:r>
-              <a:t>– predicted 0.14 -&gt; realized 0.44   |   predicted 0.82 -&gt; realized 0.43</a:t>
+              <a:t>–  predicted 0.14 → realized 0.44   |   predicted 0.82 → realized 0.43</a:t>
             </a:r>
           </a:p>
           <a:p>
             <a:pPr>
               <a:spcAft>
-                <a:spcPts val="700"/>
+                <a:spcPts val="500"/>
               </a:spcAft>
-              <a:defRPr sz="2000">
+              <a:defRPr sz="1700" b="1">
                 <a:solidFill>
                   <a:srgbClr val="0B2A4A"/>
                 </a:solidFill>
               </a:defRPr>
             </a:pPr>
             <a:r>
-              <a:t>• AUC-ROC = 0.50 (full) / 0.46 (out-of-sample) — i.e. random, slightly worse OOS.</a:t>
+              <a:t>■  AUC-ROC = 0.50 full / 0.46 out-of-sample — i.e. random, slightly worse OOS.</a:t>
             </a:r>
           </a:p>
           <a:p>
             <a:pPr>
               <a:spcAft>
-                <a:spcPts val="700"/>
+                <a:spcPts val="500"/>
               </a:spcAft>
-              <a:defRPr sz="2000">
+              <a:defRPr sz="1700" b="1">
                 <a:solidFill>
                   <a:srgbClr val="0B2A4A"/>
                 </a:solidFill>
               </a:defRPr>
             </a:pPr>
             <a:r>
-              <a:t>• M2 underperforms M1-only in every walk-forward window.</a:t>
+              <a:t>■  M2 underperforms M1-only in every walk-forward window.</a:t>
             </a:r>
           </a:p>
           <a:p>
             <a:pPr>
               <a:spcAft>
-                <a:spcPts val="700"/>
+                <a:spcPts val="500"/>
               </a:spcAft>
-              <a:defRPr sz="2000">
+              <a:defRPr sz="1700" b="1">
                 <a:solidFill>
                   <a:srgbClr val="0B2A4A"/>
                 </a:solidFill>
               </a:defRPr>
             </a:pPr>
             <a:r>
-              <a:t>• Held under both proxy and real macro data -&gt; this is robust, not a tuning artifact.</a:t>
-            </a:r>
-          </a:p>
-        </p:txBody>
-      </p:sp>
-      <p:sp>
-        <p:nvSpPr>
-          <p:cNvPr id="4" name="TextBox 3"/>
+              <a:t>■  Held under both proxy and real macro data — robust, not a tuning artifact.</a:t>
+            </a:r>
+          </a:p>
+        </p:txBody>
+      </p:sp>
+      <p:sp>
+        <p:nvSpPr>
+          <p:cNvPr id="6" name="Rectangle 5"/>
+          <p:cNvSpPr/>
+          <p:nvPr/>
+        </p:nvSpPr>
+        <p:spPr>
+          <a:xfrm>
+            <a:off x="548640" y="5715000"/>
+            <a:ext cx="11091672" cy="566928"/>
+          </a:xfrm>
+          <a:prstGeom prst="rect">
+            <a:avLst/>
+          </a:prstGeom>
+          <a:solidFill>
+            <a:srgbClr val="ECF1F6"/>
+          </a:solidFill>
+          <a:ln>
+            <a:noFill/>
+          </a:ln>
+          <a:effectLst/>
+        </p:spPr>
+        <p:style>
+          <a:lnRef idx="1">
+            <a:schemeClr val="accent1"/>
+          </a:lnRef>
+          <a:fillRef idx="3">
+            <a:schemeClr val="accent1"/>
+          </a:fillRef>
+          <a:effectRef idx="2">
+            <a:schemeClr val="accent1"/>
+          </a:effectRef>
+          <a:fontRef idx="minor">
+            <a:schemeClr val="lt1"/>
+          </a:fontRef>
+        </p:style>
+        <p:txBody>
+          <a:bodyPr rtlCol="0" anchor="ctr"/>
+          <a:lstStyle/>
+          <a:p>
+            <a:pPr algn="ctr"/>
+          </a:p>
+        </p:txBody>
+      </p:sp>
+      <p:sp>
+        <p:nvSpPr>
+          <p:cNvPr id="7" name="TextBox 6"/>
           <p:cNvSpPr txBox="1"/>
           <p:nvPr/>
         </p:nvSpPr>
         <p:spPr>
           <a:xfrm>
-            <a:off x="822960" y="5897880"/>
-            <a:ext cx="10607040" cy="822960"/>
+            <a:off x="731520" y="5760720"/>
+            <a:ext cx="10789920" cy="502920"/>
           </a:xfrm>
           <a:prstGeom prst="rect">
             <a:avLst/>
@@ -7204,20 +9807,90 @@
           <a:noFill/>
         </p:spPr>
         <p:txBody>
+          <a:bodyPr wrap="square" anchor="ctr">
+            <a:spAutoFit/>
+          </a:bodyPr>
+          <a:lstStyle/>
+          <a:p>
+            <a:pPr>
+              <a:defRPr sz="1300" b="1">
+                <a:solidFill>
+                  <a:srgbClr val="1F6FB2"/>
+                </a:solidFill>
+              </a:defRPr>
+            </a:pPr>
+            <a:r>
+              <a:t>Takeaway:  The meta-label as specified (per-asset, 4-week, benchmark-relative) extracts no conditional signal.</a:t>
+            </a:r>
+          </a:p>
+        </p:txBody>
+      </p:sp>
+      <p:sp>
+        <p:nvSpPr>
+          <p:cNvPr id="8" name="TextBox 7"/>
+          <p:cNvSpPr txBox="1"/>
+          <p:nvPr/>
+        </p:nvSpPr>
+        <p:spPr>
+          <a:xfrm>
+            <a:off x="548640" y="6419088"/>
+            <a:ext cx="11155680" cy="320040"/>
+          </a:xfrm>
+          <a:prstGeom prst="rect">
+            <a:avLst/>
+          </a:prstGeom>
+          <a:noFill/>
+        </p:spPr>
+        <p:txBody>
           <a:bodyPr wrap="square">
             <a:spAutoFit/>
           </a:bodyPr>
           <a:lstStyle/>
           <a:p>
             <a:pPr>
-              <a:defRPr sz="1600" b="1" i="1">
-                <a:solidFill>
-                  <a:srgbClr val="1F6FB2"/>
+              <a:defRPr sz="900">
+                <a:solidFill>
+                  <a:srgbClr val="555B66"/>
                 </a:solidFill>
               </a:defRPr>
             </a:pPr>
             <a:r>
-              <a:t>Takeaway: Honest result: the meta-label as specified (per-asset, 4-week, benchmark-relative) extracts no conditional signal.</a:t>
+              <a:t>Multi-Asset Meta-Labeling  ·  June 18, 2026</a:t>
+            </a:r>
+          </a:p>
+        </p:txBody>
+      </p:sp>
+      <p:sp>
+        <p:nvSpPr>
+          <p:cNvPr id="9" name="TextBox 8"/>
+          <p:cNvSpPr txBox="1"/>
+          <p:nvPr/>
+        </p:nvSpPr>
+        <p:spPr>
+          <a:xfrm>
+            <a:off x="11338560" y="6419088"/>
+            <a:ext cx="640080" cy="320040"/>
+          </a:xfrm>
+          <a:prstGeom prst="rect">
+            <a:avLst/>
+          </a:prstGeom>
+          <a:noFill/>
+        </p:spPr>
+        <p:txBody>
+          <a:bodyPr wrap="square">
+            <a:spAutoFit/>
+          </a:bodyPr>
+          <a:lstStyle/>
+          <a:p>
+            <a:pPr>
+              <a:defRPr sz="900">
+                <a:solidFill>
+                  <a:srgbClr val="555B66"/>
+                </a:solidFill>
+              </a:defRPr>
+            </a:pPr>
+            <a:r>
+              <a:t>8</a:t>
             </a:r>
           </a:p>
         </p:txBody>

--- a/reports/Meta_Labeling_Deck.pptx
+++ b/reports/Meta_Labeling_Deck.pptx
@@ -17,6 +17,7 @@
     <p:sldId id="265" r:id="rId16"/>
     <p:sldId id="266" r:id="rId17"/>
     <p:sldId id="267" r:id="rId18"/>
+    <p:sldId id="268" r:id="rId19"/>
   </p:sldIdLst>
   <p:sldSz cx="12191695" cy="6858000" type="screen4x3"/>
   <p:notesSz cx="6858000" cy="9144000"/>
@@ -3344,7 +3345,7 @@
               </a:defRPr>
             </a:pPr>
             <a:r>
-              <a:t>Attribution — Factors &amp; Costs</a:t>
+              <a:t>Key Finding — M2 Does Not Add Value Yet</a:t>
             </a:r>
           </a:p>
         </p:txBody>
@@ -3426,7 +3427,7 @@
               </a:defRPr>
             </a:pPr>
             <a:r>
-              <a:t>■  M1 decomposed into its two sub-signals (full-sample Sharpe):</a:t>
+              <a:t>■  M2's probabilities carry no information — realized success is flat across every predicted bucket:</a:t>
             </a:r>
           </a:p>
           <a:p>
@@ -3441,7 +3442,7 @@
               </a:defRPr>
             </a:pPr>
             <a:r>
-              <a:t>–  momentum 0.61  ·  trend 0.65  ·  combined technical 0.65</a:t>
+              <a:t>–  predicted 0.14 → realized 0.44   |   predicted 0.82 → realized 0.43</a:t>
             </a:r>
           </a:p>
           <a:p>
@@ -3456,7 +3457,22 @@
               </a:defRPr>
             </a:pPr>
             <a:r>
-              <a:t>■  Interaction is positive (+0.015) — momentum and trend reinforce, not redundant.</a:t>
+              <a:t>■  AUC-ROC = 0.50 full / 0.46 out-of-sample — i.e. random, slightly worse OOS.</a:t>
+            </a:r>
+          </a:p>
+          <a:p>
+            <a:pPr lvl="1">
+              <a:spcAft>
+                <a:spcPts val="500"/>
+              </a:spcAft>
+              <a:defRPr sz="1400" b="0">
+                <a:solidFill>
+                  <a:srgbClr val="555B66"/>
+                </a:solidFill>
+              </a:defRPr>
+            </a:pPr>
+            <a:r>
+              <a:t>–  Simple error metrics agree — Brier 0.31, calibration MAPE ≈ 0.49 (probabilities ~49% off).</a:t>
             </a:r>
           </a:p>
           <a:p>
@@ -3471,22 +3487,22 @@
               </a:defRPr>
             </a:pPr>
             <a:r>
-              <a:t>■  Cost layers (annualized): gross 6.48% → net of expense 6.39% → net of all 6.19%.</a:t>
-            </a:r>
-          </a:p>
-          <a:p>
-            <a:pPr lvl="1">
+              <a:t>■  M2 underperforms M1-only in every walk-forward window.</a:t>
+            </a:r>
+          </a:p>
+          <a:p>
+            <a:pPr>
               <a:spcAft>
                 <a:spcPts val="500"/>
               </a:spcAft>
-              <a:defRPr sz="1400" b="0">
-                <a:solidFill>
-                  <a:srgbClr val="555B66"/>
+              <a:defRPr sz="1700" b="1">
+                <a:solidFill>
+                  <a:srgbClr val="0B2A4A"/>
                 </a:solidFill>
               </a:defRPr>
             </a:pPr>
             <a:r>
-              <a:t>–  transaction cost (~29 bps) is a larger drag than the expense ratio (~9 bps)</a:t>
+              <a:t>■  Held under both proxy and real macro data — robust, not a tuning artifact.</a:t>
             </a:r>
           </a:p>
         </p:txBody>
@@ -3565,7 +3581,7 @@
               </a:defRPr>
             </a:pPr>
             <a:r>
-              <a:t>Takeaway:  The directional value is real and complementary; costs are modest and turnover-driven.</a:t>
+              <a:t>Takeaway:  The meta-label as specified (per-asset, 4-week, benchmark-relative) extracts no conditional signal.</a:t>
             </a:r>
           </a:p>
         </p:txBody>
@@ -3732,7 +3748,7 @@
               </a:defRPr>
             </a:pPr>
             <a:r>
-              <a:t>Limitations</a:t>
+              <a:t>Attribution — Factors &amp; Costs</a:t>
             </a:r>
           </a:p>
         </p:txBody>
@@ -3814,7 +3830,22 @@
               </a:defRPr>
             </a:pPr>
             <a:r>
-              <a:t>■  Research-grade data (free index / ETF-proxy series); true long-history index needs Bloomberg.</a:t>
+              <a:t>■  M1 decomposed into its two sub-signals (full-sample Sharpe):</a:t>
+            </a:r>
+          </a:p>
+          <a:p>
+            <a:pPr lvl="1">
+              <a:spcAft>
+                <a:spcPts val="500"/>
+              </a:spcAft>
+              <a:defRPr sz="1400" b="0">
+                <a:solidFill>
+                  <a:srgbClr val="555B66"/>
+                </a:solidFill>
+              </a:defRPr>
+            </a:pPr>
+            <a:r>
+              <a:t>–  momentum 0.61  ·  trend 0.65  ·  combined technical 0.65</a:t>
             </a:r>
           </a:p>
           <a:p>
@@ -3829,7 +3860,7 @@
               </a:defRPr>
             </a:pPr>
             <a:r>
-              <a:t>■  Historical simulation only — no capacity, market impact, borrow, or live execution.</a:t>
+              <a:t>■  Interaction is positive (+0.015) — momentum and trend reinforce, not redundant.</a:t>
             </a:r>
           </a:p>
           <a:p>
@@ -3844,37 +3875,22 @@
               </a:defRPr>
             </a:pPr>
             <a:r>
-              <a:t>■  M1's edge is regime-concentrated (recent), not uniform across history.</a:t>
-            </a:r>
-          </a:p>
-          <a:p>
-            <a:pPr>
+              <a:t>■  Cost layers (annualized): gross 6.48% → net of expense 6.39% → net of all 6.19%.</a:t>
+            </a:r>
+          </a:p>
+          <a:p>
+            <a:pPr lvl="1">
               <a:spcAft>
                 <a:spcPts val="500"/>
               </a:spcAft>
-              <a:defRPr sz="1700" b="1">
-                <a:solidFill>
-                  <a:srgbClr val="0B2A4A"/>
+              <a:defRPr sz="1400" b="0">
+                <a:solidFill>
+                  <a:srgbClr val="555B66"/>
                 </a:solidFill>
               </a:defRPr>
             </a:pPr>
             <a:r>
-              <a:t>■  M2 is not yet usable; its prediction target needs reformulation.</a:t>
-            </a:r>
-          </a:p>
-          <a:p>
-            <a:pPr>
-              <a:spcAft>
-                <a:spcPts val="500"/>
-              </a:spcAft>
-              <a:defRPr sz="1700" b="1">
-                <a:solidFill>
-                  <a:srgbClr val="0B2A4A"/>
-                </a:solidFill>
-              </a:defRPr>
-            </a:pPr>
-            <a:r>
-              <a:t>■  Some diagnostics are full-sample; production needs broader walk-forward / purged CV.</a:t>
+              <a:t>–  transaction cost (~29 bps) is a larger drag than the expense ratio (~9 bps)</a:t>
             </a:r>
           </a:p>
         </p:txBody>
@@ -3953,7 +3969,7 @@
               </a:defRPr>
             </a:pPr>
             <a:r>
-              <a:t>Takeaway:  Solid on each step — we report what works and what does not, without overselling.</a:t>
+              <a:t>Takeaway:  The directional value is real and complementary; costs are modest and turnover-driven.</a:t>
             </a:r>
           </a:p>
         </p:txBody>
@@ -4120,7 +4136,7 @@
               </a:defRPr>
             </a:pPr>
             <a:r>
-              <a:t>Questions for Discussion</a:t>
+              <a:t>Limitations</a:t>
             </a:r>
           </a:p>
         </p:txBody>
@@ -4202,37 +4218,7 @@
               </a:defRPr>
             </a:pPr>
             <a:r>
-              <a:t>■  M2 reformulation — which direction?</a:t>
-            </a:r>
-          </a:p>
-          <a:p>
-            <a:pPr lvl="1">
-              <a:spcAft>
-                <a:spcPts val="500"/>
-              </a:spcAft>
-              <a:defRPr sz="1400" b="0">
-                <a:solidFill>
-                  <a:srgbClr val="555B66"/>
-                </a:solidFill>
-              </a:defRPr>
-            </a:pPr>
-            <a:r>
-              <a:t>–  a regime gate (scale total active risk down in stress), or</a:t>
-            </a:r>
-          </a:p>
-          <a:p>
-            <a:pPr lvl="1">
-              <a:spcAft>
-                <a:spcPts val="500"/>
-              </a:spcAft>
-              <a:defRPr sz="1400" b="0">
-                <a:solidFill>
-                  <a:srgbClr val="555B66"/>
-                </a:solidFill>
-              </a:defRPr>
-            </a:pPr>
-            <a:r>
-              <a:t>–  a factor-timer (momentum vs trend by regime), or a different target / horizon?</a:t>
+              <a:t>■  Research-grade data (free index / ETF-proxy series); true long-history index needs Bloomberg.</a:t>
             </a:r>
           </a:p>
           <a:p>
@@ -4247,7 +4233,7 @@
               </a:defRPr>
             </a:pPr>
             <a:r>
-              <a:t>■  Is the 4-week, benchmark-relative success label the right thing to predict?</a:t>
+              <a:t>■  Historical simulation only — no capacity, market impact, borrow, or live execution.</a:t>
             </a:r>
           </a:p>
           <a:p>
@@ -4262,7 +4248,7 @@
               </a:defRPr>
             </a:pPr>
             <a:r>
-              <a:t>■  M1's edge is recent-regime concentrated — acceptable, or do we need cross-regime robustness?</a:t>
+              <a:t>■  M1's edge is regime-concentrated (recent), not uniform across history.</a:t>
             </a:r>
           </a:p>
           <a:p>
@@ -4277,7 +4263,7 @@
               </a:defRPr>
             </a:pPr>
             <a:r>
-              <a:t>■  Data — prioritize Bloomberg true-index history (pre-2012)? Which sleeves first?</a:t>
+              <a:t>■  M2 is not yet usable; its prediction target needs reformulation.</a:t>
             </a:r>
           </a:p>
           <a:p>
@@ -4292,22 +4278,7 @@
               </a:defRPr>
             </a:pPr>
             <a:r>
-              <a:t>■  Universe — stay at 7, or add IG credit + broad commodity (9)?</a:t>
-            </a:r>
-          </a:p>
-          <a:p>
-            <a:pPr>
-              <a:spcAft>
-                <a:spcPts val="500"/>
-              </a:spcAft>
-              <a:defRPr sz="1700" b="1">
-                <a:solidFill>
-                  <a:srgbClr val="0B2A4A"/>
-                </a:solidFill>
-              </a:defRPr>
-            </a:pPr>
-            <a:r>
-              <a:t>■  Benchmark / tracking-error budget for the information-ratio framing?</a:t>
+              <a:t>■  Some diagnostics are full-sample; production needs broader walk-forward / purged CV.</a:t>
             </a:r>
           </a:p>
         </p:txBody>
@@ -4386,7 +4357,7 @@
               </a:defRPr>
             </a:pPr>
             <a:r>
-              <a:t>Takeaway:  We are solid on M1 and the framework; M2's design is the open research decision.</a:t>
+              <a:t>Takeaway:  Solid on each step — we report what works and what does not, without overselling.</a:t>
             </a:r>
           </a:p>
         </p:txBody>
@@ -4457,6 +4428,439 @@
             </a:pPr>
             <a:r>
               <a:t>11</a:t>
+            </a:r>
+          </a:p>
+        </p:txBody>
+      </p:sp>
+    </p:spTree>
+  </p:cSld>
+  <p:clrMapOvr>
+    <a:masterClrMapping/>
+  </p:clrMapOvr>
+</p:sld>
+</file>
+
+<file path=ppt/slides/slide13.xml><?xml version="1.0" encoding="utf-8"?>
+<p:sld xmlns:a="http://schemas.openxmlformats.org/drawingml/2006/main" xmlns:p="http://schemas.openxmlformats.org/presentationml/2006/main" xmlns:r="http://schemas.openxmlformats.org/officeDocument/2006/relationships">
+  <p:cSld>
+    <p:spTree>
+      <p:nvGrpSpPr>
+        <p:cNvPr id="1" name=""/>
+        <p:cNvGrpSpPr/>
+        <p:nvPr/>
+      </p:nvGrpSpPr>
+      <p:grpSpPr/>
+      <p:sp>
+        <p:nvSpPr>
+          <p:cNvPr id="2" name="Rectangle 1"/>
+          <p:cNvSpPr/>
+          <p:nvPr/>
+        </p:nvSpPr>
+        <p:spPr>
+          <a:xfrm>
+            <a:off x="0" y="0"/>
+            <a:ext cx="201168" cy="6858000"/>
+          </a:xfrm>
+          <a:prstGeom prst="rect">
+            <a:avLst/>
+          </a:prstGeom>
+          <a:solidFill>
+            <a:srgbClr val="0B2A4A"/>
+          </a:solidFill>
+          <a:ln>
+            <a:noFill/>
+          </a:ln>
+          <a:effectLst/>
+        </p:spPr>
+        <p:style>
+          <a:lnRef idx="1">
+            <a:schemeClr val="accent1"/>
+          </a:lnRef>
+          <a:fillRef idx="3">
+            <a:schemeClr val="accent1"/>
+          </a:fillRef>
+          <a:effectRef idx="2">
+            <a:schemeClr val="accent1"/>
+          </a:effectRef>
+          <a:fontRef idx="minor">
+            <a:schemeClr val="lt1"/>
+          </a:fontRef>
+        </p:style>
+        <p:txBody>
+          <a:bodyPr rtlCol="0" anchor="ctr"/>
+          <a:lstStyle/>
+          <a:p>
+            <a:pPr algn="ctr"/>
+          </a:p>
+        </p:txBody>
+      </p:sp>
+      <p:sp>
+        <p:nvSpPr>
+          <p:cNvPr id="3" name="TextBox 2"/>
+          <p:cNvSpPr txBox="1"/>
+          <p:nvPr/>
+        </p:nvSpPr>
+        <p:spPr>
+          <a:xfrm>
+            <a:off x="548640" y="320040"/>
+            <a:ext cx="11338560" cy="822960"/>
+          </a:xfrm>
+          <a:prstGeom prst="rect">
+            <a:avLst/>
+          </a:prstGeom>
+          <a:noFill/>
+        </p:spPr>
+        <p:txBody>
+          <a:bodyPr wrap="square">
+            <a:spAutoFit/>
+          </a:bodyPr>
+          <a:lstStyle/>
+          <a:p>
+            <a:pPr>
+              <a:defRPr sz="2600" b="1">
+                <a:solidFill>
+                  <a:srgbClr val="0B2A4A"/>
+                </a:solidFill>
+              </a:defRPr>
+            </a:pPr>
+            <a:r>
+              <a:t>Questions for Discussion</a:t>
+            </a:r>
+          </a:p>
+        </p:txBody>
+      </p:sp>
+      <p:sp>
+        <p:nvSpPr>
+          <p:cNvPr id="4" name="Rectangle 3"/>
+          <p:cNvSpPr/>
+          <p:nvPr/>
+        </p:nvSpPr>
+        <p:spPr>
+          <a:xfrm>
+            <a:off x="566928" y="1078992"/>
+            <a:ext cx="3840480" cy="41148"/>
+          </a:xfrm>
+          <a:prstGeom prst="rect">
+            <a:avLst/>
+          </a:prstGeom>
+          <a:solidFill>
+            <a:srgbClr val="1F6FB2"/>
+          </a:solidFill>
+          <a:ln>
+            <a:noFill/>
+          </a:ln>
+          <a:effectLst/>
+        </p:spPr>
+        <p:style>
+          <a:lnRef idx="1">
+            <a:schemeClr val="accent1"/>
+          </a:lnRef>
+          <a:fillRef idx="3">
+            <a:schemeClr val="accent1"/>
+          </a:fillRef>
+          <a:effectRef idx="2">
+            <a:schemeClr val="accent1"/>
+          </a:effectRef>
+          <a:fontRef idx="minor">
+            <a:schemeClr val="lt1"/>
+          </a:fontRef>
+        </p:style>
+        <p:txBody>
+          <a:bodyPr rtlCol="0" anchor="ctr"/>
+          <a:lstStyle/>
+          <a:p>
+            <a:pPr algn="ctr"/>
+          </a:p>
+        </p:txBody>
+      </p:sp>
+      <p:sp>
+        <p:nvSpPr>
+          <p:cNvPr id="5" name="TextBox 4"/>
+          <p:cNvSpPr txBox="1"/>
+          <p:nvPr/>
+        </p:nvSpPr>
+        <p:spPr>
+          <a:xfrm>
+            <a:off x="640080" y="1325880"/>
+            <a:ext cx="10972800" cy="4297680"/>
+          </a:xfrm>
+          <a:prstGeom prst="rect">
+            <a:avLst/>
+          </a:prstGeom>
+          <a:noFill/>
+        </p:spPr>
+        <p:txBody>
+          <a:bodyPr wrap="square">
+            <a:spAutoFit/>
+          </a:bodyPr>
+          <a:lstStyle/>
+          <a:p>
+            <a:pPr>
+              <a:spcAft>
+                <a:spcPts val="500"/>
+              </a:spcAft>
+              <a:defRPr sz="1700" b="1">
+                <a:solidFill>
+                  <a:srgbClr val="0B2A4A"/>
+                </a:solidFill>
+              </a:defRPr>
+            </a:pPr>
+            <a:r>
+              <a:t>■  M2 reformulation — which direction?</a:t>
+            </a:r>
+          </a:p>
+          <a:p>
+            <a:pPr lvl="1">
+              <a:spcAft>
+                <a:spcPts val="500"/>
+              </a:spcAft>
+              <a:defRPr sz="1400" b="0">
+                <a:solidFill>
+                  <a:srgbClr val="555B66"/>
+                </a:solidFill>
+              </a:defRPr>
+            </a:pPr>
+            <a:r>
+              <a:t>–  a regime gate (scale total active risk down in stress), or</a:t>
+            </a:r>
+          </a:p>
+          <a:p>
+            <a:pPr lvl="1">
+              <a:spcAft>
+                <a:spcPts val="500"/>
+              </a:spcAft>
+              <a:defRPr sz="1400" b="0">
+                <a:solidFill>
+                  <a:srgbClr val="555B66"/>
+                </a:solidFill>
+              </a:defRPr>
+            </a:pPr>
+            <a:r>
+              <a:t>–  a factor-timer (momentum vs trend by regime), or a different target / horizon?</a:t>
+            </a:r>
+          </a:p>
+          <a:p>
+            <a:pPr>
+              <a:spcAft>
+                <a:spcPts val="500"/>
+              </a:spcAft>
+              <a:defRPr sz="1700" b="1">
+                <a:solidFill>
+                  <a:srgbClr val="0B2A4A"/>
+                </a:solidFill>
+              </a:defRPr>
+            </a:pPr>
+            <a:r>
+              <a:t>■  Is the 4-week, benchmark-relative success label the right thing to predict?</a:t>
+            </a:r>
+          </a:p>
+          <a:p>
+            <a:pPr>
+              <a:spcAft>
+                <a:spcPts val="500"/>
+              </a:spcAft>
+              <a:defRPr sz="1700" b="1">
+                <a:solidFill>
+                  <a:srgbClr val="0B2A4A"/>
+                </a:solidFill>
+              </a:defRPr>
+            </a:pPr>
+            <a:r>
+              <a:t>■  M1's edge is recent-regime concentrated — acceptable, or do we need cross-regime robustness?</a:t>
+            </a:r>
+          </a:p>
+          <a:p>
+            <a:pPr>
+              <a:spcAft>
+                <a:spcPts val="500"/>
+              </a:spcAft>
+              <a:defRPr sz="1700" b="1">
+                <a:solidFill>
+                  <a:srgbClr val="0B2A4A"/>
+                </a:solidFill>
+              </a:defRPr>
+            </a:pPr>
+            <a:r>
+              <a:t>■  Data — prioritize Bloomberg true-index history (pre-2012)? Which sleeves first?</a:t>
+            </a:r>
+          </a:p>
+          <a:p>
+            <a:pPr>
+              <a:spcAft>
+                <a:spcPts val="500"/>
+              </a:spcAft>
+              <a:defRPr sz="1700" b="1">
+                <a:solidFill>
+                  <a:srgbClr val="0B2A4A"/>
+                </a:solidFill>
+              </a:defRPr>
+            </a:pPr>
+            <a:r>
+              <a:t>■  Universe — stay at 7, or add IG credit + broad commodity (9)?</a:t>
+            </a:r>
+          </a:p>
+          <a:p>
+            <a:pPr>
+              <a:spcAft>
+                <a:spcPts val="500"/>
+              </a:spcAft>
+              <a:defRPr sz="1700" b="1">
+                <a:solidFill>
+                  <a:srgbClr val="0B2A4A"/>
+                </a:solidFill>
+              </a:defRPr>
+            </a:pPr>
+            <a:r>
+              <a:t>■  Benchmark / tracking-error budget for the information-ratio framing?</a:t>
+            </a:r>
+          </a:p>
+        </p:txBody>
+      </p:sp>
+      <p:sp>
+        <p:nvSpPr>
+          <p:cNvPr id="6" name="Rectangle 5"/>
+          <p:cNvSpPr/>
+          <p:nvPr/>
+        </p:nvSpPr>
+        <p:spPr>
+          <a:xfrm>
+            <a:off x="548640" y="5715000"/>
+            <a:ext cx="11091672" cy="566928"/>
+          </a:xfrm>
+          <a:prstGeom prst="rect">
+            <a:avLst/>
+          </a:prstGeom>
+          <a:solidFill>
+            <a:srgbClr val="ECF1F6"/>
+          </a:solidFill>
+          <a:ln>
+            <a:noFill/>
+          </a:ln>
+          <a:effectLst/>
+        </p:spPr>
+        <p:style>
+          <a:lnRef idx="1">
+            <a:schemeClr val="accent1"/>
+          </a:lnRef>
+          <a:fillRef idx="3">
+            <a:schemeClr val="accent1"/>
+          </a:fillRef>
+          <a:effectRef idx="2">
+            <a:schemeClr val="accent1"/>
+          </a:effectRef>
+          <a:fontRef idx="minor">
+            <a:schemeClr val="lt1"/>
+          </a:fontRef>
+        </p:style>
+        <p:txBody>
+          <a:bodyPr rtlCol="0" anchor="ctr"/>
+          <a:lstStyle/>
+          <a:p>
+            <a:pPr algn="ctr"/>
+          </a:p>
+        </p:txBody>
+      </p:sp>
+      <p:sp>
+        <p:nvSpPr>
+          <p:cNvPr id="7" name="TextBox 6"/>
+          <p:cNvSpPr txBox="1"/>
+          <p:nvPr/>
+        </p:nvSpPr>
+        <p:spPr>
+          <a:xfrm>
+            <a:off x="731520" y="5760720"/>
+            <a:ext cx="10789920" cy="502920"/>
+          </a:xfrm>
+          <a:prstGeom prst="rect">
+            <a:avLst/>
+          </a:prstGeom>
+          <a:noFill/>
+        </p:spPr>
+        <p:txBody>
+          <a:bodyPr wrap="square" anchor="ctr">
+            <a:spAutoFit/>
+          </a:bodyPr>
+          <a:lstStyle/>
+          <a:p>
+            <a:pPr>
+              <a:defRPr sz="1300" b="1">
+                <a:solidFill>
+                  <a:srgbClr val="1F6FB2"/>
+                </a:solidFill>
+              </a:defRPr>
+            </a:pPr>
+            <a:r>
+              <a:t>Takeaway:  We are solid on M1 and the framework; M2's design is the open research decision.</a:t>
+            </a:r>
+          </a:p>
+        </p:txBody>
+      </p:sp>
+      <p:sp>
+        <p:nvSpPr>
+          <p:cNvPr id="8" name="TextBox 7"/>
+          <p:cNvSpPr txBox="1"/>
+          <p:nvPr/>
+        </p:nvSpPr>
+        <p:spPr>
+          <a:xfrm>
+            <a:off x="548640" y="6419088"/>
+            <a:ext cx="11155680" cy="320040"/>
+          </a:xfrm>
+          <a:prstGeom prst="rect">
+            <a:avLst/>
+          </a:prstGeom>
+          <a:noFill/>
+        </p:spPr>
+        <p:txBody>
+          <a:bodyPr wrap="square">
+            <a:spAutoFit/>
+          </a:bodyPr>
+          <a:lstStyle/>
+          <a:p>
+            <a:pPr>
+              <a:defRPr sz="900">
+                <a:solidFill>
+                  <a:srgbClr val="555B66"/>
+                </a:solidFill>
+              </a:defRPr>
+            </a:pPr>
+            <a:r>
+              <a:t>Multi-Asset Meta-Labeling  ·  June 18, 2026</a:t>
+            </a:r>
+          </a:p>
+        </p:txBody>
+      </p:sp>
+      <p:sp>
+        <p:nvSpPr>
+          <p:cNvPr id="9" name="TextBox 8"/>
+          <p:cNvSpPr txBox="1"/>
+          <p:nvPr/>
+        </p:nvSpPr>
+        <p:spPr>
+          <a:xfrm>
+            <a:off x="11338560" y="6419088"/>
+            <a:ext cx="640080" cy="320040"/>
+          </a:xfrm>
+          <a:prstGeom prst="rect">
+            <a:avLst/>
+          </a:prstGeom>
+          <a:noFill/>
+        </p:spPr>
+        <p:txBody>
+          <a:bodyPr wrap="square">
+            <a:spAutoFit/>
+          </a:bodyPr>
+          <a:lstStyle/>
+          <a:p>
+            <a:pPr>
+              <a:defRPr sz="900">
+                <a:solidFill>
+                  <a:srgbClr val="555B66"/>
+                </a:solidFill>
+              </a:defRPr>
+            </a:pPr>
+            <a:r>
+              <a:t>12</a:t>
             </a:r>
           </a:p>
         </p:txBody>
@@ -4956,7 +5360,7 @@
               </a:defRPr>
             </a:pPr>
             <a:r>
-              <a:t>Architecture</a:t>
+              <a:t>Changes Since Last Review</a:t>
             </a:r>
           </a:p>
         </p:txBody>
@@ -5038,7 +5442,7 @@
               </a:defRPr>
             </a:pPr>
             <a:r>
-              <a:t>■  M1 — static, linear directional model (momentum + trend only).</a:t>
+              <a:t>■  M1 simplified to a single static factor (momentum + trend); macro &amp; risk moved out.</a:t>
             </a:r>
           </a:p>
           <a:p>
@@ -5053,37 +5457,7 @@
               </a:defRPr>
             </a:pPr>
             <a:r>
-              <a:t>■  M2 — dynamic, regime-aware meta-label (logistic regression):</a:t>
-            </a:r>
-          </a:p>
-          <a:p>
-            <a:pPr lvl="1">
-              <a:spcAft>
-                <a:spcPts val="500"/>
-              </a:spcAft>
-              <a:defRPr sz="1400" b="0">
-                <a:solidFill>
-                  <a:srgbClr val="555B66"/>
-                </a:solidFill>
-              </a:defRPr>
-            </a:pPr>
-            <a:r>
-              <a:t>–  sees momentum, trend, macro, volatility separately + regime features</a:t>
-            </a:r>
-          </a:p>
-          <a:p>
-            <a:pPr lvl="1">
-              <a:spcAft>
-                <a:spcPts val="500"/>
-              </a:spcAft>
-              <a:defRPr sz="1400" b="0">
-                <a:solidFill>
-                  <a:srgbClr val="555B66"/>
-                </a:solidFill>
-              </a:defRPr>
-            </a:pPr>
-            <a:r>
-              <a:t>–  weights factors differently across regimes (factor-timing)</a:t>
+              <a:t>■  ML layer kept to logistic regression only.</a:t>
             </a:r>
           </a:p>
           <a:p>
@@ -5098,7 +5472,7 @@
               </a:defRPr>
             </a:pPr>
             <a:r>
-              <a:t>■  Portfolio — benchmark-relative active weights, vol targeting, position caps, 2-layer costs.</a:t>
+              <a:t>■  Static factors → M1; dynamic factors (macro, volatility, regime) → M2.</a:t>
             </a:r>
           </a:p>
           <a:p>
@@ -5113,7 +5487,37 @@
               </a:defRPr>
             </a:pPr>
             <a:r>
-              <a:t>■  Discipline — no look-ahead, 4-week macro lag, 4-week train/test embargo.</a:t>
+              <a:t>■  Macro / regime datasets now feed M2 (not used by earlier work).</a:t>
+            </a:r>
+          </a:p>
+          <a:p>
+            <a:pPr>
+              <a:spcAft>
+                <a:spcPts val="500"/>
+              </a:spcAft>
+              <a:defRPr sz="1700" b="1">
+                <a:solidFill>
+                  <a:srgbClr val="0B2A4A"/>
+                </a:solidFill>
+              </a:defRPr>
+            </a:pPr>
+            <a:r>
+              <a:t>■  Added simple evaluations — mean difference, MAE, Brier, calibration MAPE.</a:t>
+            </a:r>
+          </a:p>
+          <a:p>
+            <a:pPr>
+              <a:spcAft>
+                <a:spcPts val="500"/>
+              </a:spcAft>
+              <a:defRPr sz="1700" b="1">
+                <a:solidFill>
+                  <a:srgbClr val="0B2A4A"/>
+                </a:solidFill>
+              </a:defRPr>
+            </a:pPr>
+            <a:r>
+              <a:t>■  Out-of-sample confirmation — train/test split + 4-week embargo + walk-forward.</a:t>
             </a:r>
           </a:p>
         </p:txBody>
@@ -5192,7 +5596,7 @@
               </a:defRPr>
             </a:pPr>
             <a:r>
-              <a:t>Takeaway:  M1 is simple on purpose; all dynamic / regime intelligence is isolated in M2.</a:t>
+              <a:t>Takeaway:  Every change follows one rule: static -&gt; M1, dynamic -&gt; M2, keep each layer simple.</a:t>
             </a:r>
           </a:p>
         </p:txBody>
@@ -5276,6 +5680,409 @@
 </file>
 
 <file path=ppt/slides/slide4.xml><?xml version="1.0" encoding="utf-8"?>
+<p:sld xmlns:a="http://schemas.openxmlformats.org/drawingml/2006/main" xmlns:p="http://schemas.openxmlformats.org/presentationml/2006/main" xmlns:r="http://schemas.openxmlformats.org/officeDocument/2006/relationships">
+  <p:cSld>
+    <p:spTree>
+      <p:nvGrpSpPr>
+        <p:cNvPr id="1" name=""/>
+        <p:cNvGrpSpPr/>
+        <p:nvPr/>
+      </p:nvGrpSpPr>
+      <p:grpSpPr/>
+      <p:sp>
+        <p:nvSpPr>
+          <p:cNvPr id="2" name="Rectangle 1"/>
+          <p:cNvSpPr/>
+          <p:nvPr/>
+        </p:nvSpPr>
+        <p:spPr>
+          <a:xfrm>
+            <a:off x="0" y="0"/>
+            <a:ext cx="201168" cy="6858000"/>
+          </a:xfrm>
+          <a:prstGeom prst="rect">
+            <a:avLst/>
+          </a:prstGeom>
+          <a:solidFill>
+            <a:srgbClr val="0B2A4A"/>
+          </a:solidFill>
+          <a:ln>
+            <a:noFill/>
+          </a:ln>
+          <a:effectLst/>
+        </p:spPr>
+        <p:style>
+          <a:lnRef idx="1">
+            <a:schemeClr val="accent1"/>
+          </a:lnRef>
+          <a:fillRef idx="3">
+            <a:schemeClr val="accent1"/>
+          </a:fillRef>
+          <a:effectRef idx="2">
+            <a:schemeClr val="accent1"/>
+          </a:effectRef>
+          <a:fontRef idx="minor">
+            <a:schemeClr val="lt1"/>
+          </a:fontRef>
+        </p:style>
+        <p:txBody>
+          <a:bodyPr rtlCol="0" anchor="ctr"/>
+          <a:lstStyle/>
+          <a:p>
+            <a:pPr algn="ctr"/>
+          </a:p>
+        </p:txBody>
+      </p:sp>
+      <p:sp>
+        <p:nvSpPr>
+          <p:cNvPr id="3" name="TextBox 2"/>
+          <p:cNvSpPr txBox="1"/>
+          <p:nvPr/>
+        </p:nvSpPr>
+        <p:spPr>
+          <a:xfrm>
+            <a:off x="548640" y="320040"/>
+            <a:ext cx="11338560" cy="822960"/>
+          </a:xfrm>
+          <a:prstGeom prst="rect">
+            <a:avLst/>
+          </a:prstGeom>
+          <a:noFill/>
+        </p:spPr>
+        <p:txBody>
+          <a:bodyPr wrap="square">
+            <a:spAutoFit/>
+          </a:bodyPr>
+          <a:lstStyle/>
+          <a:p>
+            <a:pPr>
+              <a:defRPr sz="2600" b="1">
+                <a:solidFill>
+                  <a:srgbClr val="0B2A4A"/>
+                </a:solidFill>
+              </a:defRPr>
+            </a:pPr>
+            <a:r>
+              <a:t>Architecture</a:t>
+            </a:r>
+          </a:p>
+        </p:txBody>
+      </p:sp>
+      <p:sp>
+        <p:nvSpPr>
+          <p:cNvPr id="4" name="Rectangle 3"/>
+          <p:cNvSpPr/>
+          <p:nvPr/>
+        </p:nvSpPr>
+        <p:spPr>
+          <a:xfrm>
+            <a:off x="566928" y="1078992"/>
+            <a:ext cx="3840480" cy="41148"/>
+          </a:xfrm>
+          <a:prstGeom prst="rect">
+            <a:avLst/>
+          </a:prstGeom>
+          <a:solidFill>
+            <a:srgbClr val="1F6FB2"/>
+          </a:solidFill>
+          <a:ln>
+            <a:noFill/>
+          </a:ln>
+          <a:effectLst/>
+        </p:spPr>
+        <p:style>
+          <a:lnRef idx="1">
+            <a:schemeClr val="accent1"/>
+          </a:lnRef>
+          <a:fillRef idx="3">
+            <a:schemeClr val="accent1"/>
+          </a:fillRef>
+          <a:effectRef idx="2">
+            <a:schemeClr val="accent1"/>
+          </a:effectRef>
+          <a:fontRef idx="minor">
+            <a:schemeClr val="lt1"/>
+          </a:fontRef>
+        </p:style>
+        <p:txBody>
+          <a:bodyPr rtlCol="0" anchor="ctr"/>
+          <a:lstStyle/>
+          <a:p>
+            <a:pPr algn="ctr"/>
+          </a:p>
+        </p:txBody>
+      </p:sp>
+      <p:sp>
+        <p:nvSpPr>
+          <p:cNvPr id="5" name="TextBox 4"/>
+          <p:cNvSpPr txBox="1"/>
+          <p:nvPr/>
+        </p:nvSpPr>
+        <p:spPr>
+          <a:xfrm>
+            <a:off x="640080" y="1325880"/>
+            <a:ext cx="10972800" cy="4297680"/>
+          </a:xfrm>
+          <a:prstGeom prst="rect">
+            <a:avLst/>
+          </a:prstGeom>
+          <a:noFill/>
+        </p:spPr>
+        <p:txBody>
+          <a:bodyPr wrap="square">
+            <a:spAutoFit/>
+          </a:bodyPr>
+          <a:lstStyle/>
+          <a:p>
+            <a:pPr>
+              <a:spcAft>
+                <a:spcPts val="500"/>
+              </a:spcAft>
+              <a:defRPr sz="1700" b="1">
+                <a:solidFill>
+                  <a:srgbClr val="0B2A4A"/>
+                </a:solidFill>
+              </a:defRPr>
+            </a:pPr>
+            <a:r>
+              <a:t>■  M1 — static, linear directional model (momentum + trend only).</a:t>
+            </a:r>
+          </a:p>
+          <a:p>
+            <a:pPr>
+              <a:spcAft>
+                <a:spcPts val="500"/>
+              </a:spcAft>
+              <a:defRPr sz="1700" b="1">
+                <a:solidFill>
+                  <a:srgbClr val="0B2A4A"/>
+                </a:solidFill>
+              </a:defRPr>
+            </a:pPr>
+            <a:r>
+              <a:t>■  M2 — dynamic, regime-aware meta-label (logistic regression):</a:t>
+            </a:r>
+          </a:p>
+          <a:p>
+            <a:pPr lvl="1">
+              <a:spcAft>
+                <a:spcPts val="500"/>
+              </a:spcAft>
+              <a:defRPr sz="1400" b="0">
+                <a:solidFill>
+                  <a:srgbClr val="555B66"/>
+                </a:solidFill>
+              </a:defRPr>
+            </a:pPr>
+            <a:r>
+              <a:t>–  sees momentum, trend, macro, volatility separately + regime features</a:t>
+            </a:r>
+          </a:p>
+          <a:p>
+            <a:pPr lvl="1">
+              <a:spcAft>
+                <a:spcPts val="500"/>
+              </a:spcAft>
+              <a:defRPr sz="1400" b="0">
+                <a:solidFill>
+                  <a:srgbClr val="555B66"/>
+                </a:solidFill>
+              </a:defRPr>
+            </a:pPr>
+            <a:r>
+              <a:t>–  weights factors differently across regimes (factor-timing)</a:t>
+            </a:r>
+          </a:p>
+          <a:p>
+            <a:pPr>
+              <a:spcAft>
+                <a:spcPts val="500"/>
+              </a:spcAft>
+              <a:defRPr sz="1700" b="1">
+                <a:solidFill>
+                  <a:srgbClr val="0B2A4A"/>
+                </a:solidFill>
+              </a:defRPr>
+            </a:pPr>
+            <a:r>
+              <a:t>■  Portfolio — benchmark-relative active weights, vol targeting, position caps, 2-layer costs.</a:t>
+            </a:r>
+          </a:p>
+          <a:p>
+            <a:pPr>
+              <a:spcAft>
+                <a:spcPts val="500"/>
+              </a:spcAft>
+              <a:defRPr sz="1700" b="1">
+                <a:solidFill>
+                  <a:srgbClr val="0B2A4A"/>
+                </a:solidFill>
+              </a:defRPr>
+            </a:pPr>
+            <a:r>
+              <a:t>■  Discipline — no look-ahead, 4-week macro lag, 4-week train/test embargo.</a:t>
+            </a:r>
+          </a:p>
+        </p:txBody>
+      </p:sp>
+      <p:sp>
+        <p:nvSpPr>
+          <p:cNvPr id="6" name="Rectangle 5"/>
+          <p:cNvSpPr/>
+          <p:nvPr/>
+        </p:nvSpPr>
+        <p:spPr>
+          <a:xfrm>
+            <a:off x="548640" y="5715000"/>
+            <a:ext cx="11091672" cy="566928"/>
+          </a:xfrm>
+          <a:prstGeom prst="rect">
+            <a:avLst/>
+          </a:prstGeom>
+          <a:solidFill>
+            <a:srgbClr val="ECF1F6"/>
+          </a:solidFill>
+          <a:ln>
+            <a:noFill/>
+          </a:ln>
+          <a:effectLst/>
+        </p:spPr>
+        <p:style>
+          <a:lnRef idx="1">
+            <a:schemeClr val="accent1"/>
+          </a:lnRef>
+          <a:fillRef idx="3">
+            <a:schemeClr val="accent1"/>
+          </a:fillRef>
+          <a:effectRef idx="2">
+            <a:schemeClr val="accent1"/>
+          </a:effectRef>
+          <a:fontRef idx="minor">
+            <a:schemeClr val="lt1"/>
+          </a:fontRef>
+        </p:style>
+        <p:txBody>
+          <a:bodyPr rtlCol="0" anchor="ctr"/>
+          <a:lstStyle/>
+          <a:p>
+            <a:pPr algn="ctr"/>
+          </a:p>
+        </p:txBody>
+      </p:sp>
+      <p:sp>
+        <p:nvSpPr>
+          <p:cNvPr id="7" name="TextBox 6"/>
+          <p:cNvSpPr txBox="1"/>
+          <p:nvPr/>
+        </p:nvSpPr>
+        <p:spPr>
+          <a:xfrm>
+            <a:off x="731520" y="5760720"/>
+            <a:ext cx="10789920" cy="502920"/>
+          </a:xfrm>
+          <a:prstGeom prst="rect">
+            <a:avLst/>
+          </a:prstGeom>
+          <a:noFill/>
+        </p:spPr>
+        <p:txBody>
+          <a:bodyPr wrap="square" anchor="ctr">
+            <a:spAutoFit/>
+          </a:bodyPr>
+          <a:lstStyle/>
+          <a:p>
+            <a:pPr>
+              <a:defRPr sz="1300" b="1">
+                <a:solidFill>
+                  <a:srgbClr val="1F6FB2"/>
+                </a:solidFill>
+              </a:defRPr>
+            </a:pPr>
+            <a:r>
+              <a:t>Takeaway:  M1 is simple on purpose; all dynamic / regime intelligence is isolated in M2.</a:t>
+            </a:r>
+          </a:p>
+        </p:txBody>
+      </p:sp>
+      <p:sp>
+        <p:nvSpPr>
+          <p:cNvPr id="8" name="TextBox 7"/>
+          <p:cNvSpPr txBox="1"/>
+          <p:nvPr/>
+        </p:nvSpPr>
+        <p:spPr>
+          <a:xfrm>
+            <a:off x="548640" y="6419088"/>
+            <a:ext cx="11155680" cy="320040"/>
+          </a:xfrm>
+          <a:prstGeom prst="rect">
+            <a:avLst/>
+          </a:prstGeom>
+          <a:noFill/>
+        </p:spPr>
+        <p:txBody>
+          <a:bodyPr wrap="square">
+            <a:spAutoFit/>
+          </a:bodyPr>
+          <a:lstStyle/>
+          <a:p>
+            <a:pPr>
+              <a:defRPr sz="900">
+                <a:solidFill>
+                  <a:srgbClr val="555B66"/>
+                </a:solidFill>
+              </a:defRPr>
+            </a:pPr>
+            <a:r>
+              <a:t>Multi-Asset Meta-Labeling  ·  June 18, 2026</a:t>
+            </a:r>
+          </a:p>
+        </p:txBody>
+      </p:sp>
+      <p:sp>
+        <p:nvSpPr>
+          <p:cNvPr id="9" name="TextBox 8"/>
+          <p:cNvSpPr txBox="1"/>
+          <p:nvPr/>
+        </p:nvSpPr>
+        <p:spPr>
+          <a:xfrm>
+            <a:off x="11338560" y="6419088"/>
+            <a:ext cx="640080" cy="320040"/>
+          </a:xfrm>
+          <a:prstGeom prst="rect">
+            <a:avLst/>
+          </a:prstGeom>
+          <a:noFill/>
+        </p:spPr>
+        <p:txBody>
+          <a:bodyPr wrap="square">
+            <a:spAutoFit/>
+          </a:bodyPr>
+          <a:lstStyle/>
+          <a:p>
+            <a:pPr>
+              <a:defRPr sz="900">
+                <a:solidFill>
+                  <a:srgbClr val="555B66"/>
+                </a:solidFill>
+              </a:defRPr>
+            </a:pPr>
+            <a:r>
+              <a:t>3</a:t>
+            </a:r>
+          </a:p>
+        </p:txBody>
+      </p:sp>
+    </p:spTree>
+  </p:cSld>
+  <p:clrMapOvr>
+    <a:masterClrMapping/>
+  </p:clrMapOvr>
+</p:sld>
+</file>
+
+<file path=ppt/slides/slide5.xml><?xml version="1.0" encoding="utf-8"?>
 <p:sld xmlns:a="http://schemas.openxmlformats.org/drawingml/2006/main" xmlns:p="http://schemas.openxmlformats.org/presentationml/2006/main" xmlns:r="http://schemas.openxmlformats.org/officeDocument/2006/relationships">
   <p:cSld>
     <p:spTree>
@@ -6235,7 +7042,7 @@
               </a:defRPr>
             </a:pPr>
             <a:r>
-              <a:t>3</a:t>
+              <a:t>4</a:t>
             </a:r>
           </a:p>
         </p:txBody>
@@ -6248,7 +7055,7 @@
 </p:sld>
 </file>
 
-<file path=ppt/slides/slide5.xml><?xml version="1.0" encoding="utf-8"?>
+<file path=ppt/slides/slide6.xml><?xml version="1.0" encoding="utf-8"?>
 <p:sld xmlns:a="http://schemas.openxmlformats.org/drawingml/2006/main" xmlns:p="http://schemas.openxmlformats.org/presentationml/2006/main" xmlns:r="http://schemas.openxmlformats.org/officeDocument/2006/relationships">
   <p:cSld>
     <p:spTree>
@@ -6623,7 +7430,7 @@
               </a:defRPr>
             </a:pPr>
             <a:r>
-              <a:t>4</a:t>
+              <a:t>5</a:t>
             </a:r>
           </a:p>
         </p:txBody>
@@ -6636,7 +7443,7 @@
 </p:sld>
 </file>
 
-<file path=ppt/slides/slide6.xml><?xml version="1.0" encoding="utf-8"?>
+<file path=ppt/slides/slide7.xml><?xml version="1.0" encoding="utf-8"?>
 <p:sld xmlns:a="http://schemas.openxmlformats.org/drawingml/2006/main" xmlns:p="http://schemas.openxmlformats.org/presentationml/2006/main" xmlns:r="http://schemas.openxmlformats.org/officeDocument/2006/relationships">
   <p:cSld>
     <p:spTree>
@@ -7693,7 +8500,7 @@
               </a:defRPr>
             </a:pPr>
             <a:r>
-              <a:t>5</a:t>
+              <a:t>6</a:t>
             </a:r>
           </a:p>
         </p:txBody>
@@ -7706,7 +8513,7 @@
 </p:sld>
 </file>
 
-<file path=ppt/slides/slide7.xml><?xml version="1.0" encoding="utf-8"?>
+<file path=ppt/slides/slide8.xml><?xml version="1.0" encoding="utf-8"?>
 <p:sld xmlns:a="http://schemas.openxmlformats.org/drawingml/2006/main" xmlns:p="http://schemas.openxmlformats.org/presentationml/2006/main" xmlns:r="http://schemas.openxmlformats.org/officeDocument/2006/relationships">
   <p:cSld>
     <p:spTree>
@@ -8714,7 +9521,7 @@
               </a:defRPr>
             </a:pPr>
             <a:r>
-              <a:t>6</a:t>
+              <a:t>7</a:t>
             </a:r>
           </a:p>
         </p:txBody>
@@ -8727,7 +9534,7 @@
 </p:sld>
 </file>
 
-<file path=ppt/slides/slide8.xml><?xml version="1.0" encoding="utf-8"?>
+<file path=ppt/slides/slide9.xml><?xml version="1.0" encoding="utf-8"?>
 <p:sld xmlns:a="http://schemas.openxmlformats.org/drawingml/2006/main" xmlns:p="http://schemas.openxmlformats.org/presentationml/2006/main" xmlns:r="http://schemas.openxmlformats.org/officeDocument/2006/relationships">
   <p:cSld>
     <p:spTree>
@@ -9433,394 +10240,6 @@
             </a:pPr>
             <a:r>
               <a:t>What it means:  M1's edge over equal-weight is concentrated in 2021+, not uniform. Full-sample numbers flatter M1 than the regime-by-regime view.</a:t>
-            </a:r>
-          </a:p>
-        </p:txBody>
-      </p:sp>
-      <p:sp>
-        <p:nvSpPr>
-          <p:cNvPr id="8" name="TextBox 7"/>
-          <p:cNvSpPr txBox="1"/>
-          <p:nvPr/>
-        </p:nvSpPr>
-        <p:spPr>
-          <a:xfrm>
-            <a:off x="548640" y="6419088"/>
-            <a:ext cx="11155680" cy="320040"/>
-          </a:xfrm>
-          <a:prstGeom prst="rect">
-            <a:avLst/>
-          </a:prstGeom>
-          <a:noFill/>
-        </p:spPr>
-        <p:txBody>
-          <a:bodyPr wrap="square">
-            <a:spAutoFit/>
-          </a:bodyPr>
-          <a:lstStyle/>
-          <a:p>
-            <a:pPr>
-              <a:defRPr sz="900">
-                <a:solidFill>
-                  <a:srgbClr val="555B66"/>
-                </a:solidFill>
-              </a:defRPr>
-            </a:pPr>
-            <a:r>
-              <a:t>Multi-Asset Meta-Labeling  ·  June 18, 2026</a:t>
-            </a:r>
-          </a:p>
-        </p:txBody>
-      </p:sp>
-      <p:sp>
-        <p:nvSpPr>
-          <p:cNvPr id="9" name="TextBox 8"/>
-          <p:cNvSpPr txBox="1"/>
-          <p:nvPr/>
-        </p:nvSpPr>
-        <p:spPr>
-          <a:xfrm>
-            <a:off x="11338560" y="6419088"/>
-            <a:ext cx="640080" cy="320040"/>
-          </a:xfrm>
-          <a:prstGeom prst="rect">
-            <a:avLst/>
-          </a:prstGeom>
-          <a:noFill/>
-        </p:spPr>
-        <p:txBody>
-          <a:bodyPr wrap="square">
-            <a:spAutoFit/>
-          </a:bodyPr>
-          <a:lstStyle/>
-          <a:p>
-            <a:pPr>
-              <a:defRPr sz="900">
-                <a:solidFill>
-                  <a:srgbClr val="555B66"/>
-                </a:solidFill>
-              </a:defRPr>
-            </a:pPr>
-            <a:r>
-              <a:t>7</a:t>
-            </a:r>
-          </a:p>
-        </p:txBody>
-      </p:sp>
-    </p:spTree>
-  </p:cSld>
-  <p:clrMapOvr>
-    <a:masterClrMapping/>
-  </p:clrMapOvr>
-</p:sld>
-</file>
-
-<file path=ppt/slides/slide9.xml><?xml version="1.0" encoding="utf-8"?>
-<p:sld xmlns:a="http://schemas.openxmlformats.org/drawingml/2006/main" xmlns:p="http://schemas.openxmlformats.org/presentationml/2006/main" xmlns:r="http://schemas.openxmlformats.org/officeDocument/2006/relationships">
-  <p:cSld>
-    <p:spTree>
-      <p:nvGrpSpPr>
-        <p:cNvPr id="1" name=""/>
-        <p:cNvGrpSpPr/>
-        <p:nvPr/>
-      </p:nvGrpSpPr>
-      <p:grpSpPr/>
-      <p:sp>
-        <p:nvSpPr>
-          <p:cNvPr id="2" name="Rectangle 1"/>
-          <p:cNvSpPr/>
-          <p:nvPr/>
-        </p:nvSpPr>
-        <p:spPr>
-          <a:xfrm>
-            <a:off x="0" y="0"/>
-            <a:ext cx="201168" cy="6858000"/>
-          </a:xfrm>
-          <a:prstGeom prst="rect">
-            <a:avLst/>
-          </a:prstGeom>
-          <a:solidFill>
-            <a:srgbClr val="0B2A4A"/>
-          </a:solidFill>
-          <a:ln>
-            <a:noFill/>
-          </a:ln>
-          <a:effectLst/>
-        </p:spPr>
-        <p:style>
-          <a:lnRef idx="1">
-            <a:schemeClr val="accent1"/>
-          </a:lnRef>
-          <a:fillRef idx="3">
-            <a:schemeClr val="accent1"/>
-          </a:fillRef>
-          <a:effectRef idx="2">
-            <a:schemeClr val="accent1"/>
-          </a:effectRef>
-          <a:fontRef idx="minor">
-            <a:schemeClr val="lt1"/>
-          </a:fontRef>
-        </p:style>
-        <p:txBody>
-          <a:bodyPr rtlCol="0" anchor="ctr"/>
-          <a:lstStyle/>
-          <a:p>
-            <a:pPr algn="ctr"/>
-          </a:p>
-        </p:txBody>
-      </p:sp>
-      <p:sp>
-        <p:nvSpPr>
-          <p:cNvPr id="3" name="TextBox 2"/>
-          <p:cNvSpPr txBox="1"/>
-          <p:nvPr/>
-        </p:nvSpPr>
-        <p:spPr>
-          <a:xfrm>
-            <a:off x="548640" y="320040"/>
-            <a:ext cx="11338560" cy="822960"/>
-          </a:xfrm>
-          <a:prstGeom prst="rect">
-            <a:avLst/>
-          </a:prstGeom>
-          <a:noFill/>
-        </p:spPr>
-        <p:txBody>
-          <a:bodyPr wrap="square">
-            <a:spAutoFit/>
-          </a:bodyPr>
-          <a:lstStyle/>
-          <a:p>
-            <a:pPr>
-              <a:defRPr sz="2600" b="1">
-                <a:solidFill>
-                  <a:srgbClr val="0B2A4A"/>
-                </a:solidFill>
-              </a:defRPr>
-            </a:pPr>
-            <a:r>
-              <a:t>Key Finding — M2 Does Not Add Value Yet</a:t>
-            </a:r>
-          </a:p>
-        </p:txBody>
-      </p:sp>
-      <p:sp>
-        <p:nvSpPr>
-          <p:cNvPr id="4" name="Rectangle 3"/>
-          <p:cNvSpPr/>
-          <p:nvPr/>
-        </p:nvSpPr>
-        <p:spPr>
-          <a:xfrm>
-            <a:off x="566928" y="1078992"/>
-            <a:ext cx="3840480" cy="41148"/>
-          </a:xfrm>
-          <a:prstGeom prst="rect">
-            <a:avLst/>
-          </a:prstGeom>
-          <a:solidFill>
-            <a:srgbClr val="1F6FB2"/>
-          </a:solidFill>
-          <a:ln>
-            <a:noFill/>
-          </a:ln>
-          <a:effectLst/>
-        </p:spPr>
-        <p:style>
-          <a:lnRef idx="1">
-            <a:schemeClr val="accent1"/>
-          </a:lnRef>
-          <a:fillRef idx="3">
-            <a:schemeClr val="accent1"/>
-          </a:fillRef>
-          <a:effectRef idx="2">
-            <a:schemeClr val="accent1"/>
-          </a:effectRef>
-          <a:fontRef idx="minor">
-            <a:schemeClr val="lt1"/>
-          </a:fontRef>
-        </p:style>
-        <p:txBody>
-          <a:bodyPr rtlCol="0" anchor="ctr"/>
-          <a:lstStyle/>
-          <a:p>
-            <a:pPr algn="ctr"/>
-          </a:p>
-        </p:txBody>
-      </p:sp>
-      <p:sp>
-        <p:nvSpPr>
-          <p:cNvPr id="5" name="TextBox 4"/>
-          <p:cNvSpPr txBox="1"/>
-          <p:nvPr/>
-        </p:nvSpPr>
-        <p:spPr>
-          <a:xfrm>
-            <a:off x="640080" y="1325880"/>
-            <a:ext cx="10972800" cy="4297680"/>
-          </a:xfrm>
-          <a:prstGeom prst="rect">
-            <a:avLst/>
-          </a:prstGeom>
-          <a:noFill/>
-        </p:spPr>
-        <p:txBody>
-          <a:bodyPr wrap="square">
-            <a:spAutoFit/>
-          </a:bodyPr>
-          <a:lstStyle/>
-          <a:p>
-            <a:pPr>
-              <a:spcAft>
-                <a:spcPts val="500"/>
-              </a:spcAft>
-              <a:defRPr sz="1700" b="1">
-                <a:solidFill>
-                  <a:srgbClr val="0B2A4A"/>
-                </a:solidFill>
-              </a:defRPr>
-            </a:pPr>
-            <a:r>
-              <a:t>■  M2's probabilities carry no information — realized success is flat across every predicted bucket:</a:t>
-            </a:r>
-          </a:p>
-          <a:p>
-            <a:pPr lvl="1">
-              <a:spcAft>
-                <a:spcPts val="500"/>
-              </a:spcAft>
-              <a:defRPr sz="1400" b="0">
-                <a:solidFill>
-                  <a:srgbClr val="555B66"/>
-                </a:solidFill>
-              </a:defRPr>
-            </a:pPr>
-            <a:r>
-              <a:t>–  predicted 0.14 → realized 0.44   |   predicted 0.82 → realized 0.43</a:t>
-            </a:r>
-          </a:p>
-          <a:p>
-            <a:pPr>
-              <a:spcAft>
-                <a:spcPts val="500"/>
-              </a:spcAft>
-              <a:defRPr sz="1700" b="1">
-                <a:solidFill>
-                  <a:srgbClr val="0B2A4A"/>
-                </a:solidFill>
-              </a:defRPr>
-            </a:pPr>
-            <a:r>
-              <a:t>■  AUC-ROC = 0.50 full / 0.46 out-of-sample — i.e. random, slightly worse OOS.</a:t>
-            </a:r>
-          </a:p>
-          <a:p>
-            <a:pPr>
-              <a:spcAft>
-                <a:spcPts val="500"/>
-              </a:spcAft>
-              <a:defRPr sz="1700" b="1">
-                <a:solidFill>
-                  <a:srgbClr val="0B2A4A"/>
-                </a:solidFill>
-              </a:defRPr>
-            </a:pPr>
-            <a:r>
-              <a:t>■  M2 underperforms M1-only in every walk-forward window.</a:t>
-            </a:r>
-          </a:p>
-          <a:p>
-            <a:pPr>
-              <a:spcAft>
-                <a:spcPts val="500"/>
-              </a:spcAft>
-              <a:defRPr sz="1700" b="1">
-                <a:solidFill>
-                  <a:srgbClr val="0B2A4A"/>
-                </a:solidFill>
-              </a:defRPr>
-            </a:pPr>
-            <a:r>
-              <a:t>■  Held under both proxy and real macro data — robust, not a tuning artifact.</a:t>
-            </a:r>
-          </a:p>
-        </p:txBody>
-      </p:sp>
-      <p:sp>
-        <p:nvSpPr>
-          <p:cNvPr id="6" name="Rectangle 5"/>
-          <p:cNvSpPr/>
-          <p:nvPr/>
-        </p:nvSpPr>
-        <p:spPr>
-          <a:xfrm>
-            <a:off x="548640" y="5715000"/>
-            <a:ext cx="11091672" cy="566928"/>
-          </a:xfrm>
-          <a:prstGeom prst="rect">
-            <a:avLst/>
-          </a:prstGeom>
-          <a:solidFill>
-            <a:srgbClr val="ECF1F6"/>
-          </a:solidFill>
-          <a:ln>
-            <a:noFill/>
-          </a:ln>
-          <a:effectLst/>
-        </p:spPr>
-        <p:style>
-          <a:lnRef idx="1">
-            <a:schemeClr val="accent1"/>
-          </a:lnRef>
-          <a:fillRef idx="3">
-            <a:schemeClr val="accent1"/>
-          </a:fillRef>
-          <a:effectRef idx="2">
-            <a:schemeClr val="accent1"/>
-          </a:effectRef>
-          <a:fontRef idx="minor">
-            <a:schemeClr val="lt1"/>
-          </a:fontRef>
-        </p:style>
-        <p:txBody>
-          <a:bodyPr rtlCol="0" anchor="ctr"/>
-          <a:lstStyle/>
-          <a:p>
-            <a:pPr algn="ctr"/>
-          </a:p>
-        </p:txBody>
-      </p:sp>
-      <p:sp>
-        <p:nvSpPr>
-          <p:cNvPr id="7" name="TextBox 6"/>
-          <p:cNvSpPr txBox="1"/>
-          <p:nvPr/>
-        </p:nvSpPr>
-        <p:spPr>
-          <a:xfrm>
-            <a:off x="731520" y="5760720"/>
-            <a:ext cx="10789920" cy="502920"/>
-          </a:xfrm>
-          <a:prstGeom prst="rect">
-            <a:avLst/>
-          </a:prstGeom>
-          <a:noFill/>
-        </p:spPr>
-        <p:txBody>
-          <a:bodyPr wrap="square" anchor="ctr">
-            <a:spAutoFit/>
-          </a:bodyPr>
-          <a:lstStyle/>
-          <a:p>
-            <a:pPr>
-              <a:defRPr sz="1300" b="1">
-                <a:solidFill>
-                  <a:srgbClr val="1F6FB2"/>
-                </a:solidFill>
-              </a:defRPr>
-            </a:pPr>
-            <a:r>
-              <a:t>Takeaway:  The meta-label as specified (per-asset, 4-week, benchmark-relative) extracts no conditional signal.</a:t>
             </a:r>
           </a:p>
         </p:txBody>
